--- a/W5/W5S2 - RegEx/W5S2.pptx
+++ b/W5/W5S2 - RegEx/W5S2.pptx
@@ -326,761 +326,212 @@
 </p188:authorLst>
 </file>
 
+<file path=ppt/revisionInfo.xml><?xml version="1.0" encoding="utf-8"?>
+<p1510:revInfo xmlns:a="http://schemas.openxmlformats.org/drawingml/2006/main" xmlns:r="http://schemas.openxmlformats.org/officeDocument/2006/relationships" xmlns:p1510="http://schemas.microsoft.com/office/powerpoint/2015/10/main">
+  <p1510:revLst>
+    <p1510:client id="{681CBE4F-CC71-4C63-997E-D1757BF8379E}" v="2" dt="2026-01-14T08:47:23.150"/>
+  </p1510:revLst>
+</p1510:revInfo>
+</file>
+
 <file path=ppt/changesInfos/changesInfo1.xml><?xml version="1.0" encoding="utf-8"?>
 <pc:chgInfo xmlns:a="http://schemas.openxmlformats.org/drawingml/2006/main" xmlns:r="http://schemas.openxmlformats.org/officeDocument/2006/relationships" xmlns:ac="http://schemas.microsoft.com/office/drawing/2013/main/command" xmlns:pc="http://schemas.microsoft.com/office/powerpoint/2013/main/command">
   <pc:docChgLst>
-    <pc:chgData name="Matthieu De Mari" userId="dfb708c9-d8dc-439f-9a3b-c772bf4a311c" providerId="ADAL" clId="{A7A059E7-93C7-4781-9870-5EC88FF7F596}"/>
-    <pc:docChg chg="undo redo custSel addSld delSld modSld sldOrd addSection delSection modSection">
-      <pc:chgData name="Matthieu De Mari" userId="dfb708c9-d8dc-439f-9a3b-c772bf4a311c" providerId="ADAL" clId="{A7A059E7-93C7-4781-9870-5EC88FF7F596}" dt="2023-04-20T05:54:18.615" v="12056" actId="20577"/>
+    <pc:chgData name="Matthieu De Mari" userId="dfb708c9-d8dc-439f-9a3b-c772bf4a311c" providerId="ADAL" clId="{81E9B007-0C2C-493E-9B93-55A62C9C1F12}"/>
+    <pc:docChg chg="custSel modSld">
+      <pc:chgData name="Matthieu De Mari" userId="dfb708c9-d8dc-439f-9a3b-c772bf4a311c" providerId="ADAL" clId="{81E9B007-0C2C-493E-9B93-55A62C9C1F12}" dt="2026-01-14T08:48:42.334" v="155" actId="14100"/>
       <pc:docMkLst>
         <pc:docMk/>
       </pc:docMkLst>
       <pc:sldChg chg="modSp mod">
-        <pc:chgData name="Matthieu De Mari" userId="dfb708c9-d8dc-439f-9a3b-c772bf4a311c" providerId="ADAL" clId="{A7A059E7-93C7-4781-9870-5EC88FF7F596}" dt="2023-03-15T08:57:07.331" v="55" actId="20577"/>
-        <pc:sldMkLst>
-          <pc:docMk/>
-          <pc:sldMk cId="1040156172" sldId="377"/>
-        </pc:sldMkLst>
-      </pc:sldChg>
-      <pc:sldChg chg="modSp new mod">
-        <pc:chgData name="Matthieu De Mari" userId="dfb708c9-d8dc-439f-9a3b-c772bf4a311c" providerId="ADAL" clId="{A7A059E7-93C7-4781-9870-5EC88FF7F596}" dt="2023-03-15T09:07:48.119" v="380" actId="20577"/>
-        <pc:sldMkLst>
-          <pc:docMk/>
-          <pc:sldMk cId="3431685878" sldId="378"/>
-        </pc:sldMkLst>
-      </pc:sldChg>
-      <pc:sldChg chg="addSp delSp modSp new mod modClrScheme chgLayout">
-        <pc:chgData name="Matthieu De Mari" userId="dfb708c9-d8dc-439f-9a3b-c772bf4a311c" providerId="ADAL" clId="{A7A059E7-93C7-4781-9870-5EC88FF7F596}" dt="2023-03-18T06:23:38.889" v="7414" actId="113"/>
-        <pc:sldMkLst>
-          <pc:docMk/>
-          <pc:sldMk cId="2656047251" sldId="379"/>
-        </pc:sldMkLst>
-      </pc:sldChg>
-      <pc:sldChg chg="addSp delSp modSp new mod">
-        <pc:chgData name="Matthieu De Mari" userId="dfb708c9-d8dc-439f-9a3b-c772bf4a311c" providerId="ADAL" clId="{A7A059E7-93C7-4781-9870-5EC88FF7F596}" dt="2023-03-17T11:38:54.610" v="7159" actId="20577"/>
-        <pc:sldMkLst>
-          <pc:docMk/>
-          <pc:sldMk cId="3478712926" sldId="380"/>
-        </pc:sldMkLst>
-      </pc:sldChg>
-      <pc:sldChg chg="addSp delSp modSp new mod modClrScheme chgLayout">
-        <pc:chgData name="Matthieu De Mari" userId="dfb708c9-d8dc-439f-9a3b-c772bf4a311c" providerId="ADAL" clId="{A7A059E7-93C7-4781-9870-5EC88FF7F596}" dt="2023-03-18T07:05:33.409" v="9049" actId="20577"/>
-        <pc:sldMkLst>
-          <pc:docMk/>
-          <pc:sldMk cId="687323073" sldId="381"/>
-        </pc:sldMkLst>
-      </pc:sldChg>
-      <pc:sldChg chg="addSp delSp modSp new mod ord modClrScheme chgLayout">
-        <pc:chgData name="Matthieu De Mari" userId="dfb708c9-d8dc-439f-9a3b-c772bf4a311c" providerId="ADAL" clId="{A7A059E7-93C7-4781-9870-5EC88FF7F596}" dt="2023-03-18T06:51:11.498" v="8303" actId="14100"/>
-        <pc:sldMkLst>
-          <pc:docMk/>
-          <pc:sldMk cId="1749567037" sldId="382"/>
-        </pc:sldMkLst>
-      </pc:sldChg>
-      <pc:sldChg chg="addSp delSp modSp new mod modClrScheme chgLayout">
-        <pc:chgData name="Matthieu De Mari" userId="dfb708c9-d8dc-439f-9a3b-c772bf4a311c" providerId="ADAL" clId="{A7A059E7-93C7-4781-9870-5EC88FF7F596}" dt="2023-03-18T07:19:09.715" v="9881" actId="20577"/>
-        <pc:sldMkLst>
-          <pc:docMk/>
-          <pc:sldMk cId="3718139832" sldId="383"/>
-        </pc:sldMkLst>
-      </pc:sldChg>
-      <pc:sldChg chg="addSp modSp new mod ord modClrScheme chgLayout">
-        <pc:chgData name="Matthieu De Mari" userId="dfb708c9-d8dc-439f-9a3b-c772bf4a311c" providerId="ADAL" clId="{A7A059E7-93C7-4781-9870-5EC88FF7F596}" dt="2023-03-22T05:37:33.748" v="11960"/>
-        <pc:sldMkLst>
-          <pc:docMk/>
-          <pc:sldMk cId="3649959589" sldId="384"/>
-        </pc:sldMkLst>
-      </pc:sldChg>
-      <pc:sldChg chg="modSp new mod">
-        <pc:chgData name="Matthieu De Mari" userId="dfb708c9-d8dc-439f-9a3b-c772bf4a311c" providerId="ADAL" clId="{A7A059E7-93C7-4781-9870-5EC88FF7F596}" dt="2023-03-18T08:30:21.250" v="11446" actId="20577"/>
-        <pc:sldMkLst>
-          <pc:docMk/>
-          <pc:sldMk cId="3174082147" sldId="385"/>
-        </pc:sldMkLst>
-      </pc:sldChg>
-      <pc:sldChg chg="new del">
-        <pc:chgData name="Matthieu De Mari" userId="dfb708c9-d8dc-439f-9a3b-c772bf4a311c" providerId="ADAL" clId="{A7A059E7-93C7-4781-9870-5EC88FF7F596}" dt="2023-03-18T08:23:05.161" v="11313" actId="47"/>
-        <pc:sldMkLst>
-          <pc:docMk/>
-          <pc:sldMk cId="540619278" sldId="386"/>
-        </pc:sldMkLst>
-      </pc:sldChg>
-      <pc:sldChg chg="del">
-        <pc:chgData name="Matthieu De Mari" userId="dfb708c9-d8dc-439f-9a3b-c772bf4a311c" providerId="ADAL" clId="{A7A059E7-93C7-4781-9870-5EC88FF7F596}" dt="2023-03-15T08:57:13.501" v="56" actId="47"/>
-        <pc:sldMkLst>
-          <pc:docMk/>
-          <pc:sldMk cId="1161233365" sldId="422"/>
-        </pc:sldMkLst>
-      </pc:sldChg>
-      <pc:sldChg chg="modSp add del mod">
-        <pc:chgData name="Matthieu De Mari" userId="dfb708c9-d8dc-439f-9a3b-c772bf4a311c" providerId="ADAL" clId="{A7A059E7-93C7-4781-9870-5EC88FF7F596}" dt="2023-03-15T09:12:47.160" v="1023" actId="20577"/>
-        <pc:sldMkLst>
-          <pc:docMk/>
-          <pc:sldMk cId="4226169062" sldId="423"/>
-        </pc:sldMkLst>
-      </pc:sldChg>
-      <pc:sldChg chg="modSp add mod">
-        <pc:chgData name="Matthieu De Mari" userId="dfb708c9-d8dc-439f-9a3b-c772bf4a311c" providerId="ADAL" clId="{A7A059E7-93C7-4781-9870-5EC88FF7F596}" dt="2023-03-18T06:22:24.479" v="7316" actId="20577"/>
-        <pc:sldMkLst>
-          <pc:docMk/>
-          <pc:sldMk cId="1794465962" sldId="424"/>
-        </pc:sldMkLst>
-      </pc:sldChg>
-      <pc:sldChg chg="modSp add mod">
-        <pc:chgData name="Matthieu De Mari" userId="dfb708c9-d8dc-439f-9a3b-c772bf4a311c" providerId="ADAL" clId="{A7A059E7-93C7-4781-9870-5EC88FF7F596}" dt="2023-03-18T06:20:27.592" v="7183" actId="20577"/>
-        <pc:sldMkLst>
-          <pc:docMk/>
-          <pc:sldMk cId="909573732" sldId="425"/>
-        </pc:sldMkLst>
-      </pc:sldChg>
-      <pc:sldChg chg="del">
-        <pc:chgData name="Matthieu De Mari" userId="dfb708c9-d8dc-439f-9a3b-c772bf4a311c" providerId="ADAL" clId="{A7A059E7-93C7-4781-9870-5EC88FF7F596}" dt="2023-03-15T08:57:19.715" v="64" actId="47"/>
-        <pc:sldMkLst>
-          <pc:docMk/>
-          <pc:sldMk cId="2244529904" sldId="425"/>
-        </pc:sldMkLst>
-      </pc:sldChg>
-      <pc:sldChg chg="addSp delSp modSp add mod chgLayout">
-        <pc:chgData name="Matthieu De Mari" userId="dfb708c9-d8dc-439f-9a3b-c772bf4a311c" providerId="ADAL" clId="{A7A059E7-93C7-4781-9870-5EC88FF7F596}" dt="2023-03-18T06:38:32.614" v="7469" actId="478"/>
-        <pc:sldMkLst>
-          <pc:docMk/>
-          <pc:sldMk cId="730515734" sldId="426"/>
-        </pc:sldMkLst>
-      </pc:sldChg>
-      <pc:sldChg chg="del">
-        <pc:chgData name="Matthieu De Mari" userId="dfb708c9-d8dc-439f-9a3b-c772bf4a311c" providerId="ADAL" clId="{A7A059E7-93C7-4781-9870-5EC88FF7F596}" dt="2023-03-15T08:57:19.715" v="64" actId="47"/>
-        <pc:sldMkLst>
-          <pc:docMk/>
-          <pc:sldMk cId="1586635455" sldId="427"/>
-        </pc:sldMkLst>
-      </pc:sldChg>
-      <pc:sldChg chg="addSp delSp modSp add mod">
-        <pc:chgData name="Matthieu De Mari" userId="dfb708c9-d8dc-439f-9a3b-c772bf4a311c" providerId="ADAL" clId="{A7A059E7-93C7-4781-9870-5EC88FF7F596}" dt="2023-03-18T06:36:12.129" v="7446" actId="22"/>
-        <pc:sldMkLst>
-          <pc:docMk/>
-          <pc:sldMk cId="1865957258" sldId="427"/>
-        </pc:sldMkLst>
-      </pc:sldChg>
-      <pc:sldChg chg="addSp delSp add mod">
-        <pc:chgData name="Matthieu De Mari" userId="dfb708c9-d8dc-439f-9a3b-c772bf4a311c" providerId="ADAL" clId="{A7A059E7-93C7-4781-9870-5EC88FF7F596}" dt="2023-03-18T06:37:30.431" v="7447" actId="22"/>
-        <pc:sldMkLst>
-          <pc:docMk/>
-          <pc:sldMk cId="2022369352" sldId="428"/>
-        </pc:sldMkLst>
-      </pc:sldChg>
-      <pc:sldChg chg="addSp delSp modSp add mod">
-        <pc:chgData name="Matthieu De Mari" userId="dfb708c9-d8dc-439f-9a3b-c772bf4a311c" providerId="ADAL" clId="{A7A059E7-93C7-4781-9870-5EC88FF7F596}" dt="2023-03-18T06:38:51.920" v="7484" actId="20577"/>
-        <pc:sldMkLst>
-          <pc:docMk/>
-          <pc:sldMk cId="1549216935" sldId="429"/>
-        </pc:sldMkLst>
-      </pc:sldChg>
-      <pc:sldChg chg="addSp delSp modSp new mod modClrScheme chgLayout">
-        <pc:chgData name="Matthieu De Mari" userId="dfb708c9-d8dc-439f-9a3b-c772bf4a311c" providerId="ADAL" clId="{A7A059E7-93C7-4781-9870-5EC88FF7F596}" dt="2023-03-20T06:40:31.505" v="11612"/>
-        <pc:sldMkLst>
-          <pc:docMk/>
-          <pc:sldMk cId="2376719029" sldId="430"/>
-        </pc:sldMkLst>
-      </pc:sldChg>
-      <pc:sldChg chg="addSp delSp modSp add mod">
-        <pc:chgData name="Matthieu De Mari" userId="dfb708c9-d8dc-439f-9a3b-c772bf4a311c" providerId="ADAL" clId="{A7A059E7-93C7-4781-9870-5EC88FF7F596}" dt="2023-03-20T06:40:29.283" v="11611" actId="1076"/>
-        <pc:sldMkLst>
-          <pc:docMk/>
-          <pc:sldMk cId="133940590" sldId="431"/>
-        </pc:sldMkLst>
-      </pc:sldChg>
-      <pc:sldChg chg="modSp add del mod">
-        <pc:chgData name="Matthieu De Mari" userId="dfb708c9-d8dc-439f-9a3b-c772bf4a311c" providerId="ADAL" clId="{A7A059E7-93C7-4781-9870-5EC88FF7F596}" dt="2023-03-18T06:47:02.201" v="8166" actId="47"/>
-        <pc:sldMkLst>
-          <pc:docMk/>
-          <pc:sldMk cId="2188406462" sldId="432"/>
-        </pc:sldMkLst>
-      </pc:sldChg>
-      <pc:sldChg chg="modSp add mod">
-        <pc:chgData name="Matthieu De Mari" userId="dfb708c9-d8dc-439f-9a3b-c772bf4a311c" providerId="ADAL" clId="{A7A059E7-93C7-4781-9870-5EC88FF7F596}" dt="2023-03-18T06:47:40.087" v="8198" actId="20577"/>
-        <pc:sldMkLst>
-          <pc:docMk/>
-          <pc:sldMk cId="1769846722" sldId="433"/>
-        </pc:sldMkLst>
-      </pc:sldChg>
-      <pc:sldChg chg="addSp delSp modSp add mod">
-        <pc:chgData name="Matthieu De Mari" userId="dfb708c9-d8dc-439f-9a3b-c772bf4a311c" providerId="ADAL" clId="{A7A059E7-93C7-4781-9870-5EC88FF7F596}" dt="2023-03-18T06:50:59.959" v="8301" actId="20577"/>
-        <pc:sldMkLst>
-          <pc:docMk/>
-          <pc:sldMk cId="3094800006" sldId="434"/>
-        </pc:sldMkLst>
-      </pc:sldChg>
-      <pc:sldChg chg="addSp delSp modSp add del mod">
-        <pc:chgData name="Matthieu De Mari" userId="dfb708c9-d8dc-439f-9a3b-c772bf4a311c" providerId="ADAL" clId="{A7A059E7-93C7-4781-9870-5EC88FF7F596}" dt="2023-03-18T06:51:20.224" v="8304" actId="47"/>
-        <pc:sldMkLst>
-          <pc:docMk/>
-          <pc:sldMk cId="3322702571" sldId="435"/>
-        </pc:sldMkLst>
-      </pc:sldChg>
-      <pc:sldChg chg="modSp new del mod">
-        <pc:chgData name="Matthieu De Mari" userId="dfb708c9-d8dc-439f-9a3b-c772bf4a311c" providerId="ADAL" clId="{A7A059E7-93C7-4781-9870-5EC88FF7F596}" dt="2023-03-16T06:51:32.545" v="4341" actId="47"/>
-        <pc:sldMkLst>
-          <pc:docMk/>
-          <pc:sldMk cId="1876045740" sldId="436"/>
-        </pc:sldMkLst>
-      </pc:sldChg>
-      <pc:sldChg chg="modSp add mod">
-        <pc:chgData name="Matthieu De Mari" userId="dfb708c9-d8dc-439f-9a3b-c772bf4a311c" providerId="ADAL" clId="{A7A059E7-93C7-4781-9870-5EC88FF7F596}" dt="2023-03-18T06:52:03.770" v="8346" actId="207"/>
-        <pc:sldMkLst>
-          <pc:docMk/>
-          <pc:sldMk cId="861916422" sldId="437"/>
-        </pc:sldMkLst>
-      </pc:sldChg>
-      <pc:sldChg chg="delSp modSp new mod modClrScheme chgLayout">
-        <pc:chgData name="Matthieu De Mari" userId="dfb708c9-d8dc-439f-9a3b-c772bf4a311c" providerId="ADAL" clId="{A7A059E7-93C7-4781-9870-5EC88FF7F596}" dt="2023-03-18T07:03:32.738" v="9040" actId="14100"/>
-        <pc:sldMkLst>
-          <pc:docMk/>
-          <pc:sldMk cId="671110687" sldId="438"/>
-        </pc:sldMkLst>
-      </pc:sldChg>
-      <pc:sldChg chg="modSp add del mod">
-        <pc:chgData name="Matthieu De Mari" userId="dfb708c9-d8dc-439f-9a3b-c772bf4a311c" providerId="ADAL" clId="{A7A059E7-93C7-4781-9870-5EC88FF7F596}" dt="2023-03-18T07:07:50.896" v="9316" actId="47"/>
-        <pc:sldMkLst>
-          <pc:docMk/>
-          <pc:sldMk cId="1589725218" sldId="439"/>
-        </pc:sldMkLst>
-      </pc:sldChg>
-      <pc:sldChg chg="modSp add mod ord">
-        <pc:chgData name="Matthieu De Mari" userId="dfb708c9-d8dc-439f-9a3b-c772bf4a311c" providerId="ADAL" clId="{A7A059E7-93C7-4781-9870-5EC88FF7F596}" dt="2023-03-18T07:08:04.349" v="9340" actId="20577"/>
-        <pc:sldMkLst>
-          <pc:docMk/>
-          <pc:sldMk cId="2955466283" sldId="440"/>
-        </pc:sldMkLst>
-      </pc:sldChg>
-      <pc:sldChg chg="modSp new mod">
-        <pc:chgData name="Matthieu De Mari" userId="dfb708c9-d8dc-439f-9a3b-c772bf4a311c" providerId="ADAL" clId="{A7A059E7-93C7-4781-9870-5EC88FF7F596}" dt="2023-03-18T07:16:59.315" v="9789"/>
+        <pc:chgData name="Matthieu De Mari" userId="dfb708c9-d8dc-439f-9a3b-c772bf4a311c" providerId="ADAL" clId="{81E9B007-0C2C-493E-9B93-55A62C9C1F12}" dt="2026-01-14T08:42:00.123" v="10" actId="20577"/>
         <pc:sldMkLst>
           <pc:docMk/>
           <pc:sldMk cId="1448790682" sldId="441"/>
         </pc:sldMkLst>
+        <pc:spChg chg="mod">
+          <ac:chgData name="Matthieu De Mari" userId="dfb708c9-d8dc-439f-9a3b-c772bf4a311c" providerId="ADAL" clId="{81E9B007-0C2C-493E-9B93-55A62C9C1F12}" dt="2026-01-14T08:42:00.123" v="10" actId="20577"/>
+          <ac:spMkLst>
+            <pc:docMk/>
+            <pc:sldMk cId="1448790682" sldId="441"/>
+            <ac:spMk id="3" creationId="{0A9CA01A-4500-13DA-32DD-0418598356B9}"/>
+          </ac:spMkLst>
+        </pc:spChg>
       </pc:sldChg>
-      <pc:sldChg chg="addSp delSp modSp add mod">
-        <pc:chgData name="Matthieu De Mari" userId="dfb708c9-d8dc-439f-9a3b-c772bf4a311c" providerId="ADAL" clId="{A7A059E7-93C7-4781-9870-5EC88FF7F596}" dt="2023-03-18T07:12:28.316" v="9701" actId="20577"/>
-        <pc:sldMkLst>
-          <pc:docMk/>
-          <pc:sldMk cId="75594367" sldId="442"/>
-        </pc:sldMkLst>
-      </pc:sldChg>
-      <pc:sldChg chg="modSp add mod">
-        <pc:chgData name="Matthieu De Mari" userId="dfb708c9-d8dc-439f-9a3b-c772bf4a311c" providerId="ADAL" clId="{A7A059E7-93C7-4781-9870-5EC88FF7F596}" dt="2023-03-22T05:37:01.323" v="11957" actId="20577"/>
+      <pc:sldChg chg="modSp mod">
+        <pc:chgData name="Matthieu De Mari" userId="dfb708c9-d8dc-439f-9a3b-c772bf4a311c" providerId="ADAL" clId="{81E9B007-0C2C-493E-9B93-55A62C9C1F12}" dt="2026-01-14T08:42:51.360" v="102" actId="20577"/>
         <pc:sldMkLst>
           <pc:docMk/>
           <pc:sldMk cId="110232736" sldId="443"/>
         </pc:sldMkLst>
+        <pc:spChg chg="mod">
+          <ac:chgData name="Matthieu De Mari" userId="dfb708c9-d8dc-439f-9a3b-c772bf4a311c" providerId="ADAL" clId="{81E9B007-0C2C-493E-9B93-55A62C9C1F12}" dt="2026-01-14T08:42:51.360" v="102" actId="20577"/>
+          <ac:spMkLst>
+            <pc:docMk/>
+            <pc:sldMk cId="110232736" sldId="443"/>
+            <ac:spMk id="3" creationId="{0A9CA01A-4500-13DA-32DD-0418598356B9}"/>
+          </ac:spMkLst>
+        </pc:spChg>
       </pc:sldChg>
-      <pc:sldChg chg="modSp add mod">
-        <pc:chgData name="Matthieu De Mari" userId="dfb708c9-d8dc-439f-9a3b-c772bf4a311c" providerId="ADAL" clId="{A7A059E7-93C7-4781-9870-5EC88FF7F596}" dt="2023-03-16T07:33:40.151" v="6351" actId="20577"/>
-        <pc:sldMkLst>
-          <pc:docMk/>
-          <pc:sldMk cId="1237963508" sldId="444"/>
-        </pc:sldMkLst>
-      </pc:sldChg>
-      <pc:sldChg chg="modSp add mod">
-        <pc:chgData name="Matthieu De Mari" userId="dfb708c9-d8dc-439f-9a3b-c772bf4a311c" providerId="ADAL" clId="{A7A059E7-93C7-4781-9870-5EC88FF7F596}" dt="2023-03-16T07:33:46.815" v="6354" actId="207"/>
-        <pc:sldMkLst>
-          <pc:docMk/>
-          <pc:sldMk cId="1417587332" sldId="445"/>
-        </pc:sldMkLst>
-      </pc:sldChg>
-      <pc:sldChg chg="modSp new del mod">
-        <pc:chgData name="Matthieu De Mari" userId="dfb708c9-d8dc-439f-9a3b-c772bf4a311c" providerId="ADAL" clId="{A7A059E7-93C7-4781-9870-5EC88FF7F596}" dt="2023-03-16T07:38:37.318" v="6557" actId="47"/>
-        <pc:sldMkLst>
-          <pc:docMk/>
-          <pc:sldMk cId="1902125911" sldId="446"/>
-        </pc:sldMkLst>
-      </pc:sldChg>
-      <pc:sldChg chg="addSp delSp modSp add del mod modClrScheme chgLayout">
-        <pc:chgData name="Matthieu De Mari" userId="dfb708c9-d8dc-439f-9a3b-c772bf4a311c" providerId="ADAL" clId="{A7A059E7-93C7-4781-9870-5EC88FF7F596}" dt="2023-03-18T07:15:48.152" v="9775" actId="47"/>
-        <pc:sldMkLst>
-          <pc:docMk/>
-          <pc:sldMk cId="1624935982" sldId="447"/>
-        </pc:sldMkLst>
-      </pc:sldChg>
-      <pc:sldChg chg="modSp add mod ord">
-        <pc:chgData name="Matthieu De Mari" userId="dfb708c9-d8dc-439f-9a3b-c772bf4a311c" providerId="ADAL" clId="{A7A059E7-93C7-4781-9870-5EC88FF7F596}" dt="2023-03-18T07:17:55.373" v="9813" actId="20577"/>
+      <pc:sldChg chg="modSp mod">
+        <pc:chgData name="Matthieu De Mari" userId="dfb708c9-d8dc-439f-9a3b-c772bf4a311c" providerId="ADAL" clId="{81E9B007-0C2C-493E-9B93-55A62C9C1F12}" dt="2026-01-14T08:43:09.779" v="104" actId="115"/>
         <pc:sldMkLst>
           <pc:docMk/>
           <pc:sldMk cId="4016554108" sldId="448"/>
         </pc:sldMkLst>
+        <pc:spChg chg="mod">
+          <ac:chgData name="Matthieu De Mari" userId="dfb708c9-d8dc-439f-9a3b-c772bf4a311c" providerId="ADAL" clId="{81E9B007-0C2C-493E-9B93-55A62C9C1F12}" dt="2026-01-14T08:43:09.779" v="104" actId="115"/>
+          <ac:spMkLst>
+            <pc:docMk/>
+            <pc:sldMk cId="4016554108" sldId="448"/>
+            <ac:spMk id="3" creationId="{98C8E745-17FA-0972-8665-9C637236AA5B}"/>
+          </ac:spMkLst>
+        </pc:spChg>
       </pc:sldChg>
-      <pc:sldChg chg="modSp add mod">
-        <pc:chgData name="Matthieu De Mari" userId="dfb708c9-d8dc-439f-9a3b-c772bf4a311c" providerId="ADAL" clId="{A7A059E7-93C7-4781-9870-5EC88FF7F596}" dt="2023-03-18T07:17:59.024" v="9814"/>
+      <pc:sldChg chg="modSp mod">
+        <pc:chgData name="Matthieu De Mari" userId="dfb708c9-d8dc-439f-9a3b-c772bf4a311c" providerId="ADAL" clId="{81E9B007-0C2C-493E-9B93-55A62C9C1F12}" dt="2026-01-14T08:43:06.584" v="103" actId="115"/>
         <pc:sldMkLst>
           <pc:docMk/>
           <pc:sldMk cId="512281156" sldId="449"/>
         </pc:sldMkLst>
+        <pc:spChg chg="mod">
+          <ac:chgData name="Matthieu De Mari" userId="dfb708c9-d8dc-439f-9a3b-c772bf4a311c" providerId="ADAL" clId="{81E9B007-0C2C-493E-9B93-55A62C9C1F12}" dt="2026-01-14T08:43:06.584" v="103" actId="115"/>
+          <ac:spMkLst>
+            <pc:docMk/>
+            <pc:sldMk cId="512281156" sldId="449"/>
+            <ac:spMk id="3" creationId="{98C8E745-17FA-0972-8665-9C637236AA5B}"/>
+          </ac:spMkLst>
+        </pc:spChg>
       </pc:sldChg>
-      <pc:sldChg chg="del">
-        <pc:chgData name="Matthieu De Mari" userId="dfb708c9-d8dc-439f-9a3b-c772bf4a311c" providerId="ADAL" clId="{A7A059E7-93C7-4781-9870-5EC88FF7F596}" dt="2023-03-15T08:57:14.502" v="57" actId="47"/>
-        <pc:sldMkLst>
-          <pc:docMk/>
-          <pc:sldMk cId="3149159304" sldId="449"/>
-        </pc:sldMkLst>
-      </pc:sldChg>
-      <pc:sldChg chg="del">
-        <pc:chgData name="Matthieu De Mari" userId="dfb708c9-d8dc-439f-9a3b-c772bf4a311c" providerId="ADAL" clId="{A7A059E7-93C7-4781-9870-5EC88FF7F596}" dt="2023-03-15T08:57:14.502" v="57" actId="47"/>
-        <pc:sldMkLst>
-          <pc:docMk/>
-          <pc:sldMk cId="2020760118" sldId="450"/>
-        </pc:sldMkLst>
-      </pc:sldChg>
-      <pc:sldChg chg="modSp add mod">
-        <pc:chgData name="Matthieu De Mari" userId="dfb708c9-d8dc-439f-9a3b-c772bf4a311c" providerId="ADAL" clId="{A7A059E7-93C7-4781-9870-5EC88FF7F596}" dt="2023-03-16T07:45:46.004" v="7108" actId="20577"/>
-        <pc:sldMkLst>
-          <pc:docMk/>
-          <pc:sldMk cId="3938870733" sldId="450"/>
-        </pc:sldMkLst>
-      </pc:sldChg>
-      <pc:sldChg chg="modSp add mod">
-        <pc:chgData name="Matthieu De Mari" userId="dfb708c9-d8dc-439f-9a3b-c772bf4a311c" providerId="ADAL" clId="{A7A059E7-93C7-4781-9870-5EC88FF7F596}" dt="2023-03-22T05:37:22.758" v="11958" actId="20577"/>
-        <pc:sldMkLst>
-          <pc:docMk/>
-          <pc:sldMk cId="3522887232" sldId="451"/>
-        </pc:sldMkLst>
-      </pc:sldChg>
-      <pc:sldChg chg="modSp add mod">
-        <pc:chgData name="Matthieu De Mari" userId="dfb708c9-d8dc-439f-9a3b-c772bf4a311c" providerId="ADAL" clId="{A7A059E7-93C7-4781-9870-5EC88FF7F596}" dt="2023-03-20T06:39:37.437" v="11598" actId="20577"/>
-        <pc:sldMkLst>
-          <pc:docMk/>
-          <pc:sldMk cId="216138188" sldId="452"/>
-        </pc:sldMkLst>
-      </pc:sldChg>
-      <pc:sldChg chg="addSp delSp modSp add mod modClrScheme chgLayout">
-        <pc:chgData name="Matthieu De Mari" userId="dfb708c9-d8dc-439f-9a3b-c772bf4a311c" providerId="ADAL" clId="{A7A059E7-93C7-4781-9870-5EC88FF7F596}" dt="2023-03-18T06:56:59.272" v="8632" actId="1076"/>
+      <pc:sldChg chg="addSp delSp modSp mod">
+        <pc:chgData name="Matthieu De Mari" userId="dfb708c9-d8dc-439f-9a3b-c772bf4a311c" providerId="ADAL" clId="{81E9B007-0C2C-493E-9B93-55A62C9C1F12}" dt="2026-01-14T08:37:57.734" v="2"/>
         <pc:sldMkLst>
           <pc:docMk/>
           <pc:sldMk cId="3824911825" sldId="453"/>
         </pc:sldMkLst>
+        <pc:spChg chg="del">
+          <ac:chgData name="Matthieu De Mari" userId="dfb708c9-d8dc-439f-9a3b-c772bf4a311c" providerId="ADAL" clId="{81E9B007-0C2C-493E-9B93-55A62C9C1F12}" dt="2026-01-14T08:37:55.300" v="0" actId="478"/>
+          <ac:spMkLst>
+            <pc:docMk/>
+            <pc:sldMk cId="3824911825" sldId="453"/>
+            <ac:spMk id="4" creationId="{A0FF4252-8E53-B941-EF50-7759A6112153}"/>
+          </ac:spMkLst>
+        </pc:spChg>
+        <pc:spChg chg="add del mod">
+          <ac:chgData name="Matthieu De Mari" userId="dfb708c9-d8dc-439f-9a3b-c772bf4a311c" providerId="ADAL" clId="{81E9B007-0C2C-493E-9B93-55A62C9C1F12}" dt="2026-01-14T08:37:57.138" v="1" actId="478"/>
+          <ac:spMkLst>
+            <pc:docMk/>
+            <pc:sldMk cId="3824911825" sldId="453"/>
+            <ac:spMk id="8" creationId="{3D530F01-50FF-BF4C-1977-D8BC1A2F697D}"/>
+          </ac:spMkLst>
+        </pc:spChg>
+        <pc:spChg chg="add mod">
+          <ac:chgData name="Matthieu De Mari" userId="dfb708c9-d8dc-439f-9a3b-c772bf4a311c" providerId="ADAL" clId="{81E9B007-0C2C-493E-9B93-55A62C9C1F12}" dt="2026-01-14T08:37:57.734" v="2"/>
+          <ac:spMkLst>
+            <pc:docMk/>
+            <pc:sldMk cId="3824911825" sldId="453"/>
+            <ac:spMk id="14" creationId="{BDDF3693-513D-940D-EFD1-AD78FE2B1690}"/>
+          </ac:spMkLst>
+        </pc:spChg>
       </pc:sldChg>
-      <pc:sldChg chg="addSp delSp modSp add mod">
-        <pc:chgData name="Matthieu De Mari" userId="dfb708c9-d8dc-439f-9a3b-c772bf4a311c" providerId="ADAL" clId="{A7A059E7-93C7-4781-9870-5EC88FF7F596}" dt="2023-03-18T07:02:17.508" v="8951" actId="20577"/>
-        <pc:sldMkLst>
-          <pc:docMk/>
-          <pc:sldMk cId="55300730" sldId="454"/>
-        </pc:sldMkLst>
-      </pc:sldChg>
-      <pc:sldChg chg="del">
-        <pc:chgData name="Matthieu De Mari" userId="dfb708c9-d8dc-439f-9a3b-c772bf4a311c" providerId="ADAL" clId="{A7A059E7-93C7-4781-9870-5EC88FF7F596}" dt="2023-03-15T08:57:15.514" v="58" actId="47"/>
-        <pc:sldMkLst>
-          <pc:docMk/>
-          <pc:sldMk cId="4072425385" sldId="454"/>
-        </pc:sldMkLst>
-      </pc:sldChg>
-      <pc:sldChg chg="modSp add mod">
-        <pc:chgData name="Matthieu De Mari" userId="dfb708c9-d8dc-439f-9a3b-c772bf4a311c" providerId="ADAL" clId="{A7A059E7-93C7-4781-9870-5EC88FF7F596}" dt="2023-03-20T06:41:39.027" v="11626" actId="20577"/>
-        <pc:sldMkLst>
-          <pc:docMk/>
-          <pc:sldMk cId="2415983017" sldId="455"/>
-        </pc:sldMkLst>
-      </pc:sldChg>
-      <pc:sldChg chg="modSp add mod">
-        <pc:chgData name="Matthieu De Mari" userId="dfb708c9-d8dc-439f-9a3b-c772bf4a311c" providerId="ADAL" clId="{A7A059E7-93C7-4781-9870-5EC88FF7F596}" dt="2023-03-20T06:42:04.813" v="11643" actId="20577"/>
-        <pc:sldMkLst>
-          <pc:docMk/>
-          <pc:sldMk cId="227383218" sldId="456"/>
-        </pc:sldMkLst>
-      </pc:sldChg>
-      <pc:sldChg chg="del">
-        <pc:chgData name="Matthieu De Mari" userId="dfb708c9-d8dc-439f-9a3b-c772bf4a311c" providerId="ADAL" clId="{A7A059E7-93C7-4781-9870-5EC88FF7F596}" dt="2023-03-15T08:57:19.715" v="64" actId="47"/>
-        <pc:sldMkLst>
-          <pc:docMk/>
-          <pc:sldMk cId="1474802136" sldId="456"/>
-        </pc:sldMkLst>
-      </pc:sldChg>
-      <pc:sldChg chg="modSp add mod">
-        <pc:chgData name="Matthieu De Mari" userId="dfb708c9-d8dc-439f-9a3b-c772bf4a311c" providerId="ADAL" clId="{A7A059E7-93C7-4781-9870-5EC88FF7F596}" dt="2023-03-18T07:19:06.788" v="9880" actId="20577"/>
-        <pc:sldMkLst>
-          <pc:docMk/>
-          <pc:sldMk cId="3521859159" sldId="457"/>
-        </pc:sldMkLst>
-      </pc:sldChg>
-      <pc:sldChg chg="del">
-        <pc:chgData name="Matthieu De Mari" userId="dfb708c9-d8dc-439f-9a3b-c772bf4a311c" providerId="ADAL" clId="{A7A059E7-93C7-4781-9870-5EC88FF7F596}" dt="2023-03-15T08:57:18.497" v="62" actId="47"/>
-        <pc:sldMkLst>
-          <pc:docMk/>
-          <pc:sldMk cId="3858745428" sldId="457"/>
-        </pc:sldMkLst>
-      </pc:sldChg>
-      <pc:sldChg chg="modSp add mod">
-        <pc:chgData name="Matthieu De Mari" userId="dfb708c9-d8dc-439f-9a3b-c772bf4a311c" providerId="ADAL" clId="{A7A059E7-93C7-4781-9870-5EC88FF7F596}" dt="2023-03-18T07:15:28.812" v="9773" actId="20577"/>
-        <pc:sldMkLst>
-          <pc:docMk/>
-          <pc:sldMk cId="1844132787" sldId="458"/>
-        </pc:sldMkLst>
-      </pc:sldChg>
-      <pc:sldChg chg="addSp delSp modSp new mod modClrScheme chgLayout">
-        <pc:chgData name="Matthieu De Mari" userId="dfb708c9-d8dc-439f-9a3b-c772bf4a311c" providerId="ADAL" clId="{A7A059E7-93C7-4781-9870-5EC88FF7F596}" dt="2023-03-20T06:44:02.848" v="11736" actId="20577"/>
+      <pc:sldChg chg="modSp mod">
+        <pc:chgData name="Matthieu De Mari" userId="dfb708c9-d8dc-439f-9a3b-c772bf4a311c" providerId="ADAL" clId="{81E9B007-0C2C-493E-9B93-55A62C9C1F12}" dt="2026-01-14T08:43:40.542" v="106" actId="20577"/>
         <pc:sldMkLst>
           <pc:docMk/>
           <pc:sldMk cId="146061813" sldId="459"/>
         </pc:sldMkLst>
+        <pc:spChg chg="mod">
+          <ac:chgData name="Matthieu De Mari" userId="dfb708c9-d8dc-439f-9a3b-c772bf4a311c" providerId="ADAL" clId="{81E9B007-0C2C-493E-9B93-55A62C9C1F12}" dt="2026-01-14T08:43:40.542" v="106" actId="20577"/>
+          <ac:spMkLst>
+            <pc:docMk/>
+            <pc:sldMk cId="146061813" sldId="459"/>
+            <ac:spMk id="5" creationId="{B3F89993-8E2D-39C7-D73F-D6F5D0507F8F}"/>
+          </ac:spMkLst>
+        </pc:spChg>
       </pc:sldChg>
-      <pc:sldChg chg="del">
-        <pc:chgData name="Matthieu De Mari" userId="dfb708c9-d8dc-439f-9a3b-c772bf4a311c" providerId="ADAL" clId="{A7A059E7-93C7-4781-9870-5EC88FF7F596}" dt="2023-03-15T08:57:18.497" v="62" actId="47"/>
-        <pc:sldMkLst>
-          <pc:docMk/>
-          <pc:sldMk cId="3624547080" sldId="459"/>
-        </pc:sldMkLst>
-      </pc:sldChg>
-      <pc:sldChg chg="del">
-        <pc:chgData name="Matthieu De Mari" userId="dfb708c9-d8dc-439f-9a3b-c772bf4a311c" providerId="ADAL" clId="{A7A059E7-93C7-4781-9870-5EC88FF7F596}" dt="2023-03-15T08:57:18.497" v="62" actId="47"/>
-        <pc:sldMkLst>
-          <pc:docMk/>
-          <pc:sldMk cId="727967492" sldId="460"/>
-        </pc:sldMkLst>
-      </pc:sldChg>
-      <pc:sldChg chg="addSp delSp modSp new mod modClrScheme chgLayout">
-        <pc:chgData name="Matthieu De Mari" userId="dfb708c9-d8dc-439f-9a3b-c772bf4a311c" providerId="ADAL" clId="{A7A059E7-93C7-4781-9870-5EC88FF7F596}" dt="2023-04-20T05:54:18.615" v="12056" actId="20577"/>
+      <pc:sldChg chg="modSp mod">
+        <pc:chgData name="Matthieu De Mari" userId="dfb708c9-d8dc-439f-9a3b-c772bf4a311c" providerId="ADAL" clId="{81E9B007-0C2C-493E-9B93-55A62C9C1F12}" dt="2026-01-14T08:43:58.855" v="107" actId="207"/>
         <pc:sldMkLst>
           <pc:docMk/>
           <pc:sldMk cId="2491784038" sldId="460"/>
         </pc:sldMkLst>
+        <pc:spChg chg="mod">
+          <ac:chgData name="Matthieu De Mari" userId="dfb708c9-d8dc-439f-9a3b-c772bf4a311c" providerId="ADAL" clId="{81E9B007-0C2C-493E-9B93-55A62C9C1F12}" dt="2026-01-14T08:43:58.855" v="107" actId="207"/>
+          <ac:spMkLst>
+            <pc:docMk/>
+            <pc:sldMk cId="2491784038" sldId="460"/>
+            <ac:spMk id="6" creationId="{9B6A00C8-E3FA-09B1-418B-292BC486CB87}"/>
+          </ac:spMkLst>
+        </pc:spChg>
       </pc:sldChg>
-      <pc:sldChg chg="del">
-        <pc:chgData name="Matthieu De Mari" userId="dfb708c9-d8dc-439f-9a3b-c772bf4a311c" providerId="ADAL" clId="{A7A059E7-93C7-4781-9870-5EC88FF7F596}" dt="2023-03-15T08:57:17.764" v="61" actId="47"/>
-        <pc:sldMkLst>
-          <pc:docMk/>
-          <pc:sldMk cId="813445278" sldId="461"/>
-        </pc:sldMkLst>
-      </pc:sldChg>
-      <pc:sldChg chg="addSp delSp modSp new mod">
-        <pc:chgData name="Matthieu De Mari" userId="dfb708c9-d8dc-439f-9a3b-c772bf4a311c" providerId="ADAL" clId="{A7A059E7-93C7-4781-9870-5EC88FF7F596}" dt="2023-03-20T06:44:21.138" v="11742" actId="207"/>
+      <pc:sldChg chg="modSp mod">
+        <pc:chgData name="Matthieu De Mari" userId="dfb708c9-d8dc-439f-9a3b-c772bf4a311c" providerId="ADAL" clId="{81E9B007-0C2C-493E-9B93-55A62C9C1F12}" dt="2026-01-14T08:44:29.252" v="108" actId="20577"/>
         <pc:sldMkLst>
           <pc:docMk/>
           <pc:sldMk cId="2636270797" sldId="461"/>
         </pc:sldMkLst>
+        <pc:spChg chg="mod">
+          <ac:chgData name="Matthieu De Mari" userId="dfb708c9-d8dc-439f-9a3b-c772bf4a311c" providerId="ADAL" clId="{81E9B007-0C2C-493E-9B93-55A62C9C1F12}" dt="2026-01-14T08:44:29.252" v="108" actId="20577"/>
+          <ac:spMkLst>
+            <pc:docMk/>
+            <pc:sldMk cId="2636270797" sldId="461"/>
+            <ac:spMk id="3" creationId="{8821F76F-B59B-FBFA-F2D2-1D9ABA97022B}"/>
+          </ac:spMkLst>
+        </pc:spChg>
       </pc:sldChg>
-      <pc:sldChg chg="modSp add mod">
-        <pc:chgData name="Matthieu De Mari" userId="dfb708c9-d8dc-439f-9a3b-c772bf4a311c" providerId="ADAL" clId="{A7A059E7-93C7-4781-9870-5EC88FF7F596}" dt="2023-03-20T06:44:31.733" v="11746" actId="207"/>
-        <pc:sldMkLst>
-          <pc:docMk/>
-          <pc:sldMk cId="1308959780" sldId="462"/>
-        </pc:sldMkLst>
-      </pc:sldChg>
-      <pc:sldChg chg="del">
-        <pc:chgData name="Matthieu De Mari" userId="dfb708c9-d8dc-439f-9a3b-c772bf4a311c" providerId="ADAL" clId="{A7A059E7-93C7-4781-9870-5EC88FF7F596}" dt="2023-03-15T08:57:18.497" v="62" actId="47"/>
-        <pc:sldMkLst>
-          <pc:docMk/>
-          <pc:sldMk cId="2989704858" sldId="462"/>
-        </pc:sldMkLst>
-      </pc:sldChg>
-      <pc:sldChg chg="addSp delSp modSp new mod modClrScheme chgLayout">
-        <pc:chgData name="Matthieu De Mari" userId="dfb708c9-d8dc-439f-9a3b-c772bf4a311c" providerId="ADAL" clId="{A7A059E7-93C7-4781-9870-5EC88FF7F596}" dt="2023-03-22T05:41:14.664" v="12055" actId="27636"/>
-        <pc:sldMkLst>
-          <pc:docMk/>
-          <pc:sldMk cId="3130766884" sldId="463"/>
-        </pc:sldMkLst>
-      </pc:sldChg>
-      <pc:sldChg chg="addSp modSp new mod modClrScheme chgLayout">
-        <pc:chgData name="Matthieu De Mari" userId="dfb708c9-d8dc-439f-9a3b-c772bf4a311c" providerId="ADAL" clId="{A7A059E7-93C7-4781-9870-5EC88FF7F596}" dt="2023-03-20T06:47:17.355" v="11837" actId="207"/>
+      <pc:sldChg chg="modSp mod">
+        <pc:chgData name="Matthieu De Mari" userId="dfb708c9-d8dc-439f-9a3b-c772bf4a311c" providerId="ADAL" clId="{81E9B007-0C2C-493E-9B93-55A62C9C1F12}" dt="2026-01-14T08:47:29.164" v="150" actId="20577"/>
         <pc:sldMkLst>
           <pc:docMk/>
           <pc:sldMk cId="2960715248" sldId="464"/>
         </pc:sldMkLst>
+        <pc:spChg chg="mod">
+          <ac:chgData name="Matthieu De Mari" userId="dfb708c9-d8dc-439f-9a3b-c772bf4a311c" providerId="ADAL" clId="{81E9B007-0C2C-493E-9B93-55A62C9C1F12}" dt="2026-01-14T08:47:29.164" v="150" actId="20577"/>
+          <ac:spMkLst>
+            <pc:docMk/>
+            <pc:sldMk cId="2960715248" sldId="464"/>
+            <ac:spMk id="4" creationId="{7A2AC50E-1465-5908-D118-3F008F99595A}"/>
+          </ac:spMkLst>
+        </pc:spChg>
       </pc:sldChg>
-      <pc:sldChg chg="modSp new mod">
-        <pc:chgData name="Matthieu De Mari" userId="dfb708c9-d8dc-439f-9a3b-c772bf4a311c" providerId="ADAL" clId="{A7A059E7-93C7-4781-9870-5EC88FF7F596}" dt="2023-03-20T06:45:10.443" v="11788" actId="20577"/>
-        <pc:sldMkLst>
-          <pc:docMk/>
-          <pc:sldMk cId="3142642375" sldId="465"/>
-        </pc:sldMkLst>
-      </pc:sldChg>
-      <pc:sldChg chg="modSp add mod">
-        <pc:chgData name="Matthieu De Mari" userId="dfb708c9-d8dc-439f-9a3b-c772bf4a311c" providerId="ADAL" clId="{A7A059E7-93C7-4781-9870-5EC88FF7F596}" dt="2023-03-22T05:08:14.149" v="11846" actId="113"/>
-        <pc:sldMkLst>
-          <pc:docMk/>
-          <pc:sldMk cId="2429451842" sldId="466"/>
-        </pc:sldMkLst>
-      </pc:sldChg>
-      <pc:sldChg chg="modSp add mod">
-        <pc:chgData name="Matthieu De Mari" userId="dfb708c9-d8dc-439f-9a3b-c772bf4a311c" providerId="ADAL" clId="{A7A059E7-93C7-4781-9870-5EC88FF7F596}" dt="2023-03-20T06:46:03.748" v="11824" actId="313"/>
-        <pc:sldMkLst>
-          <pc:docMk/>
-          <pc:sldMk cId="3997970781" sldId="467"/>
-        </pc:sldMkLst>
-      </pc:sldChg>
-      <pc:sldChg chg="modSp add mod">
-        <pc:chgData name="Matthieu De Mari" userId="dfb708c9-d8dc-439f-9a3b-c772bf4a311c" providerId="ADAL" clId="{A7A059E7-93C7-4781-9870-5EC88FF7F596}" dt="2023-03-20T06:45:57.491" v="11816" actId="313"/>
-        <pc:sldMkLst>
-          <pc:docMk/>
-          <pc:sldMk cId="11496944" sldId="468"/>
-        </pc:sldMkLst>
-      </pc:sldChg>
-      <pc:sldChg chg="addSp delSp modSp add mod">
-        <pc:chgData name="Matthieu De Mari" userId="dfb708c9-d8dc-439f-9a3b-c772bf4a311c" providerId="ADAL" clId="{A7A059E7-93C7-4781-9870-5EC88FF7F596}" dt="2023-03-20T06:45:49.639" v="11808" actId="313"/>
+      <pc:sldChg chg="modSp mod">
+        <pc:chgData name="Matthieu De Mari" userId="dfb708c9-d8dc-439f-9a3b-c772bf4a311c" providerId="ADAL" clId="{81E9B007-0C2C-493E-9B93-55A62C9C1F12}" dt="2026-01-14T08:45:47.602" v="114" actId="313"/>
         <pc:sldMkLst>
           <pc:docMk/>
           <pc:sldMk cId="1643155833" sldId="469"/>
         </pc:sldMkLst>
+        <pc:spChg chg="mod">
+          <ac:chgData name="Matthieu De Mari" userId="dfb708c9-d8dc-439f-9a3b-c772bf4a311c" providerId="ADAL" clId="{81E9B007-0C2C-493E-9B93-55A62C9C1F12}" dt="2026-01-14T08:45:47.602" v="114" actId="313"/>
+          <ac:spMkLst>
+            <pc:docMk/>
+            <pc:sldMk cId="1643155833" sldId="469"/>
+            <ac:spMk id="3" creationId="{C88E7E02-41CA-5502-EC81-CC1584EA1981}"/>
+          </ac:spMkLst>
+        </pc:spChg>
       </pc:sldChg>
-      <pc:sldChg chg="modSp add del mod">
-        <pc:chgData name="Matthieu De Mari" userId="dfb708c9-d8dc-439f-9a3b-c772bf4a311c" providerId="ADAL" clId="{A7A059E7-93C7-4781-9870-5EC88FF7F596}" dt="2023-03-20T06:46:15.884" v="11826" actId="47"/>
-        <pc:sldMkLst>
-          <pc:docMk/>
-          <pc:sldMk cId="1928676816" sldId="470"/>
-        </pc:sldMkLst>
-      </pc:sldChg>
-      <pc:sldChg chg="del">
-        <pc:chgData name="Matthieu De Mari" userId="dfb708c9-d8dc-439f-9a3b-c772bf4a311c" providerId="ADAL" clId="{A7A059E7-93C7-4781-9870-5EC88FF7F596}" dt="2023-03-15T08:57:19.715" v="64" actId="47"/>
-        <pc:sldMkLst>
-          <pc:docMk/>
-          <pc:sldMk cId="3221576718" sldId="471"/>
-        </pc:sldMkLst>
-      </pc:sldChg>
-      <pc:sldChg chg="modSp add mod ord">
-        <pc:chgData name="Matthieu De Mari" userId="dfb708c9-d8dc-439f-9a3b-c772bf4a311c" providerId="ADAL" clId="{A7A059E7-93C7-4781-9870-5EC88FF7F596}" dt="2023-03-18T07:39:29.400" v="10787" actId="20577"/>
-        <pc:sldMkLst>
-          <pc:docMk/>
-          <pc:sldMk cId="4117624913" sldId="471"/>
-        </pc:sldMkLst>
-      </pc:sldChg>
-      <pc:sldChg chg="modSp add mod">
-        <pc:chgData name="Matthieu De Mari" userId="dfb708c9-d8dc-439f-9a3b-c772bf4a311c" providerId="ADAL" clId="{A7A059E7-93C7-4781-9870-5EC88FF7F596}" dt="2023-03-18T07:39:37.595" v="10790" actId="207"/>
-        <pc:sldMkLst>
-          <pc:docMk/>
-          <pc:sldMk cId="4182897824" sldId="472"/>
-        </pc:sldMkLst>
-      </pc:sldChg>
-      <pc:sldChg chg="del">
-        <pc:chgData name="Matthieu De Mari" userId="dfb708c9-d8dc-439f-9a3b-c772bf4a311c" providerId="ADAL" clId="{A7A059E7-93C7-4781-9870-5EC88FF7F596}" dt="2023-03-15T08:57:18.497" v="62" actId="47"/>
-        <pc:sldMkLst>
-          <pc:docMk/>
-          <pc:sldMk cId="2053185467" sldId="473"/>
-        </pc:sldMkLst>
-      </pc:sldChg>
-      <pc:sldChg chg="addSp delSp modSp new mod modClrScheme chgLayout">
-        <pc:chgData name="Matthieu De Mari" userId="dfb708c9-d8dc-439f-9a3b-c772bf4a311c" providerId="ADAL" clId="{A7A059E7-93C7-4781-9870-5EC88FF7F596}" dt="2023-03-20T06:47:24.422" v="11838" actId="207"/>
-        <pc:sldMkLst>
-          <pc:docMk/>
-          <pc:sldMk cId="2726241820" sldId="473"/>
-        </pc:sldMkLst>
-      </pc:sldChg>
-      <pc:sldChg chg="new del">
-        <pc:chgData name="Matthieu De Mari" userId="dfb708c9-d8dc-439f-9a3b-c772bf4a311c" providerId="ADAL" clId="{A7A059E7-93C7-4781-9870-5EC88FF7F596}" dt="2023-03-18T08:13:09.266" v="10911" actId="47"/>
-        <pc:sldMkLst>
-          <pc:docMk/>
-          <pc:sldMk cId="3793183353" sldId="473"/>
-        </pc:sldMkLst>
-      </pc:sldChg>
-      <pc:sldChg chg="del">
-        <pc:chgData name="Matthieu De Mari" userId="dfb708c9-d8dc-439f-9a3b-c772bf4a311c" providerId="ADAL" clId="{A7A059E7-93C7-4781-9870-5EC88FF7F596}" dt="2023-03-15T08:57:15.514" v="58" actId="47"/>
-        <pc:sldMkLst>
-          <pc:docMk/>
-          <pc:sldMk cId="1094051178" sldId="474"/>
-        </pc:sldMkLst>
-      </pc:sldChg>
-      <pc:sldChg chg="modSp new mod">
-        <pc:chgData name="Matthieu De Mari" userId="dfb708c9-d8dc-439f-9a3b-c772bf4a311c" providerId="ADAL" clId="{A7A059E7-93C7-4781-9870-5EC88FF7F596}" dt="2023-03-20T06:47:36.683" v="11843" actId="207"/>
-        <pc:sldMkLst>
-          <pc:docMk/>
-          <pc:sldMk cId="2726235655" sldId="474"/>
-        </pc:sldMkLst>
-      </pc:sldChg>
-      <pc:sldChg chg="del">
-        <pc:chgData name="Matthieu De Mari" userId="dfb708c9-d8dc-439f-9a3b-c772bf4a311c" providerId="ADAL" clId="{A7A059E7-93C7-4781-9870-5EC88FF7F596}" dt="2023-03-15T08:57:16.272" v="59" actId="47"/>
-        <pc:sldMkLst>
-          <pc:docMk/>
-          <pc:sldMk cId="125150915" sldId="475"/>
-        </pc:sldMkLst>
-      </pc:sldChg>
-      <pc:sldChg chg="modSp new mod">
-        <pc:chgData name="Matthieu De Mari" userId="dfb708c9-d8dc-439f-9a3b-c772bf4a311c" providerId="ADAL" clId="{A7A059E7-93C7-4781-9870-5EC88FF7F596}" dt="2023-03-20T06:47:40.062" v="11844" actId="207"/>
-        <pc:sldMkLst>
-          <pc:docMk/>
-          <pc:sldMk cId="3838605298" sldId="475"/>
-        </pc:sldMkLst>
-      </pc:sldChg>
-      <pc:sldChg chg="addSp delSp new mod">
-        <pc:chgData name="Matthieu De Mari" userId="dfb708c9-d8dc-439f-9a3b-c772bf4a311c" providerId="ADAL" clId="{A7A059E7-93C7-4781-9870-5EC88FF7F596}" dt="2023-03-18T08:27:46.427" v="11317" actId="478"/>
-        <pc:sldMkLst>
-          <pc:docMk/>
-          <pc:sldMk cId="1312070940" sldId="476"/>
-        </pc:sldMkLst>
-      </pc:sldChg>
-      <pc:sldChg chg="del">
-        <pc:chgData name="Matthieu De Mari" userId="dfb708c9-d8dc-439f-9a3b-c772bf4a311c" providerId="ADAL" clId="{A7A059E7-93C7-4781-9870-5EC88FF7F596}" dt="2023-03-15T08:57:16.929" v="60" actId="47"/>
-        <pc:sldMkLst>
-          <pc:docMk/>
-          <pc:sldMk cId="3237795424" sldId="477"/>
-        </pc:sldMkLst>
-      </pc:sldChg>
-      <pc:sldChg chg="addSp delSp modSp add mod">
-        <pc:chgData name="Matthieu De Mari" userId="dfb708c9-d8dc-439f-9a3b-c772bf4a311c" providerId="ADAL" clId="{A7A059E7-93C7-4781-9870-5EC88FF7F596}" dt="2023-03-18T08:31:45.590" v="11571" actId="1076"/>
-        <pc:sldMkLst>
-          <pc:docMk/>
-          <pc:sldMk cId="3422929534" sldId="477"/>
-        </pc:sldMkLst>
-      </pc:sldChg>
-      <pc:sldChg chg="del">
-        <pc:chgData name="Matthieu De Mari" userId="dfb708c9-d8dc-439f-9a3b-c772bf4a311c" providerId="ADAL" clId="{A7A059E7-93C7-4781-9870-5EC88FF7F596}" dt="2023-03-15T08:57:15.514" v="58" actId="47"/>
-        <pc:sldMkLst>
-          <pc:docMk/>
-          <pc:sldMk cId="932509960" sldId="478"/>
-        </pc:sldMkLst>
-      </pc:sldChg>
-      <pc:sldChg chg="add del">
-        <pc:chgData name="Matthieu De Mari" userId="dfb708c9-d8dc-439f-9a3b-c772bf4a311c" providerId="ADAL" clId="{A7A059E7-93C7-4781-9870-5EC88FF7F596}" dt="2023-03-20T06:42:41.866" v="11645" actId="47"/>
-        <pc:sldMkLst>
-          <pc:docMk/>
-          <pc:sldMk cId="2649008631" sldId="478"/>
-        </pc:sldMkLst>
-      </pc:sldChg>
-      <pc:sldChg chg="modSp add mod">
-        <pc:chgData name="Matthieu De Mari" userId="dfb708c9-d8dc-439f-9a3b-c772bf4a311c" providerId="ADAL" clId="{A7A059E7-93C7-4781-9870-5EC88FF7F596}" dt="2023-03-20T06:46:19.462" v="11828" actId="207"/>
+      <pc:sldChg chg="modSp mod">
+        <pc:chgData name="Matthieu De Mari" userId="dfb708c9-d8dc-439f-9a3b-c772bf4a311c" providerId="ADAL" clId="{81E9B007-0C2C-493E-9B93-55A62C9C1F12}" dt="2026-01-14T08:45:41.017" v="111" actId="313"/>
         <pc:sldMkLst>
           <pc:docMk/>
           <pc:sldMk cId="3784750566" sldId="478"/>
         </pc:sldMkLst>
-      </pc:sldChg>
-      <pc:sldChg chg="del">
-        <pc:chgData name="Matthieu De Mari" userId="dfb708c9-d8dc-439f-9a3b-c772bf4a311c" providerId="ADAL" clId="{A7A059E7-93C7-4781-9870-5EC88FF7F596}" dt="2023-03-15T08:57:15.514" v="58" actId="47"/>
-        <pc:sldMkLst>
-          <pc:docMk/>
-          <pc:sldMk cId="1275862355" sldId="479"/>
-        </pc:sldMkLst>
-      </pc:sldChg>
-      <pc:sldChg chg="del">
-        <pc:chgData name="Matthieu De Mari" userId="dfb708c9-d8dc-439f-9a3b-c772bf4a311c" providerId="ADAL" clId="{A7A059E7-93C7-4781-9870-5EC88FF7F596}" dt="2023-03-15T08:57:15.514" v="58" actId="47"/>
-        <pc:sldMkLst>
-          <pc:docMk/>
-          <pc:sldMk cId="2239257233" sldId="480"/>
-        </pc:sldMkLst>
-      </pc:sldChg>
-      <pc:sldChg chg="del">
-        <pc:chgData name="Matthieu De Mari" userId="dfb708c9-d8dc-439f-9a3b-c772bf4a311c" providerId="ADAL" clId="{A7A059E7-93C7-4781-9870-5EC88FF7F596}" dt="2023-03-15T08:57:15.514" v="58" actId="47"/>
-        <pc:sldMkLst>
-          <pc:docMk/>
-          <pc:sldMk cId="2562768069" sldId="481"/>
-        </pc:sldMkLst>
-      </pc:sldChg>
-      <pc:sldChg chg="del">
-        <pc:chgData name="Matthieu De Mari" userId="dfb708c9-d8dc-439f-9a3b-c772bf4a311c" providerId="ADAL" clId="{A7A059E7-93C7-4781-9870-5EC88FF7F596}" dt="2023-03-15T08:57:15.514" v="58" actId="47"/>
-        <pc:sldMkLst>
-          <pc:docMk/>
-          <pc:sldMk cId="3541171842" sldId="482"/>
-        </pc:sldMkLst>
-      </pc:sldChg>
-      <pc:sldChg chg="del">
-        <pc:chgData name="Matthieu De Mari" userId="dfb708c9-d8dc-439f-9a3b-c772bf4a311c" providerId="ADAL" clId="{A7A059E7-93C7-4781-9870-5EC88FF7F596}" dt="2023-03-15T08:57:15.514" v="58" actId="47"/>
-        <pc:sldMkLst>
-          <pc:docMk/>
-          <pc:sldMk cId="199935466" sldId="484"/>
-        </pc:sldMkLst>
-      </pc:sldChg>
-      <pc:sldChg chg="del">
-        <pc:chgData name="Matthieu De Mari" userId="dfb708c9-d8dc-439f-9a3b-c772bf4a311c" providerId="ADAL" clId="{A7A059E7-93C7-4781-9870-5EC88FF7F596}" dt="2023-03-15T08:57:15.514" v="58" actId="47"/>
-        <pc:sldMkLst>
-          <pc:docMk/>
-          <pc:sldMk cId="3459688009" sldId="485"/>
-        </pc:sldMkLst>
-      </pc:sldChg>
-      <pc:sldChg chg="del">
-        <pc:chgData name="Matthieu De Mari" userId="dfb708c9-d8dc-439f-9a3b-c772bf4a311c" providerId="ADAL" clId="{A7A059E7-93C7-4781-9870-5EC88FF7F596}" dt="2023-03-15T08:57:15.514" v="58" actId="47"/>
-        <pc:sldMkLst>
-          <pc:docMk/>
-          <pc:sldMk cId="3530460312" sldId="486"/>
-        </pc:sldMkLst>
-      </pc:sldChg>
-      <pc:sldChg chg="del">
-        <pc:chgData name="Matthieu De Mari" userId="dfb708c9-d8dc-439f-9a3b-c772bf4a311c" providerId="ADAL" clId="{A7A059E7-93C7-4781-9870-5EC88FF7F596}" dt="2023-03-15T08:57:16.272" v="59" actId="47"/>
-        <pc:sldMkLst>
-          <pc:docMk/>
-          <pc:sldMk cId="1228659976" sldId="487"/>
-        </pc:sldMkLst>
-      </pc:sldChg>
-      <pc:sldChg chg="del">
-        <pc:chgData name="Matthieu De Mari" userId="dfb708c9-d8dc-439f-9a3b-c772bf4a311c" providerId="ADAL" clId="{A7A059E7-93C7-4781-9870-5EC88FF7F596}" dt="2023-03-15T08:57:16.272" v="59" actId="47"/>
-        <pc:sldMkLst>
-          <pc:docMk/>
-          <pc:sldMk cId="3872619914" sldId="488"/>
-        </pc:sldMkLst>
-      </pc:sldChg>
-      <pc:sldChg chg="del">
-        <pc:chgData name="Matthieu De Mari" userId="dfb708c9-d8dc-439f-9a3b-c772bf4a311c" providerId="ADAL" clId="{A7A059E7-93C7-4781-9870-5EC88FF7F596}" dt="2023-03-15T08:57:17.764" v="61" actId="47"/>
-        <pc:sldMkLst>
-          <pc:docMk/>
-          <pc:sldMk cId="3076288606" sldId="489"/>
-        </pc:sldMkLst>
-      </pc:sldChg>
-      <pc:sldChg chg="del">
-        <pc:chgData name="Matthieu De Mari" userId="dfb708c9-d8dc-439f-9a3b-c772bf4a311c" providerId="ADAL" clId="{A7A059E7-93C7-4781-9870-5EC88FF7F596}" dt="2023-03-15T08:57:19.131" v="63" actId="47"/>
-        <pc:sldMkLst>
-          <pc:docMk/>
-          <pc:sldMk cId="2543628540" sldId="490"/>
-        </pc:sldMkLst>
-      </pc:sldChg>
-      <pc:sldChg chg="del">
-        <pc:chgData name="Matthieu De Mari" userId="dfb708c9-d8dc-439f-9a3b-c772bf4a311c" providerId="ADAL" clId="{A7A059E7-93C7-4781-9870-5EC88FF7F596}" dt="2023-03-15T08:57:19.715" v="64" actId="47"/>
-        <pc:sldMkLst>
-          <pc:docMk/>
-          <pc:sldMk cId="3043047677" sldId="491"/>
-        </pc:sldMkLst>
-      </pc:sldChg>
-      <pc:sldChg chg="del">
-        <pc:chgData name="Matthieu De Mari" userId="dfb708c9-d8dc-439f-9a3b-c772bf4a311c" providerId="ADAL" clId="{A7A059E7-93C7-4781-9870-5EC88FF7F596}" dt="2023-03-15T08:57:19.715" v="64" actId="47"/>
-        <pc:sldMkLst>
-          <pc:docMk/>
-          <pc:sldMk cId="453310084" sldId="492"/>
-        </pc:sldMkLst>
-      </pc:sldChg>
-      <pc:sldChg chg="del">
-        <pc:chgData name="Matthieu De Mari" userId="dfb708c9-d8dc-439f-9a3b-c772bf4a311c" providerId="ADAL" clId="{A7A059E7-93C7-4781-9870-5EC88FF7F596}" dt="2023-03-15T08:57:19.715" v="64" actId="47"/>
-        <pc:sldMkLst>
-          <pc:docMk/>
-          <pc:sldMk cId="197640958" sldId="493"/>
-        </pc:sldMkLst>
-      </pc:sldChg>
-      <pc:sldChg chg="del">
-        <pc:chgData name="Matthieu De Mari" userId="dfb708c9-d8dc-439f-9a3b-c772bf4a311c" providerId="ADAL" clId="{A7A059E7-93C7-4781-9870-5EC88FF7F596}" dt="2023-03-15T08:57:19.131" v="63" actId="47"/>
-        <pc:sldMkLst>
-          <pc:docMk/>
-          <pc:sldMk cId="4277571336" sldId="494"/>
-        </pc:sldMkLst>
-      </pc:sldChg>
-      <pc:sldChg chg="del">
-        <pc:chgData name="Matthieu De Mari" userId="dfb708c9-d8dc-439f-9a3b-c772bf4a311c" providerId="ADAL" clId="{A7A059E7-93C7-4781-9870-5EC88FF7F596}" dt="2023-03-15T08:57:19.131" v="63" actId="47"/>
-        <pc:sldMkLst>
-          <pc:docMk/>
-          <pc:sldMk cId="4253433879" sldId="495"/>
-        </pc:sldMkLst>
-      </pc:sldChg>
-    </pc:docChg>
-  </pc:docChgLst>
-  <pc:docChgLst>
-    <pc:chgData name="Matthieu De Mari" userId="dfb708c9-d8dc-439f-9a3b-c772bf4a311c" providerId="ADAL" clId="{4B2E324F-031D-406D-9BE0-EC86736820C0}"/>
-    <pc:docChg chg="modSld">
-      <pc:chgData name="Matthieu De Mari" userId="dfb708c9-d8dc-439f-9a3b-c772bf4a311c" providerId="ADAL" clId="{4B2E324F-031D-406D-9BE0-EC86736820C0}" dt="2025-02-24T15:11:16.086" v="128" actId="20577"/>
-      <pc:docMkLst>
-        <pc:docMk/>
-      </pc:docMkLst>
-      <pc:sldChg chg="modSp mod">
-        <pc:chgData name="Matthieu De Mari" userId="dfb708c9-d8dc-439f-9a3b-c772bf4a311c" providerId="ADAL" clId="{4B2E324F-031D-406D-9BE0-EC86736820C0}" dt="2025-02-24T15:11:16.086" v="128" actId="20577"/>
-        <pc:sldMkLst>
-          <pc:docMk/>
-          <pc:sldMk cId="4226169062" sldId="423"/>
-        </pc:sldMkLst>
         <pc:spChg chg="mod">
-          <ac:chgData name="Matthieu De Mari" userId="dfb708c9-d8dc-439f-9a3b-c772bf4a311c" providerId="ADAL" clId="{4B2E324F-031D-406D-9BE0-EC86736820C0}" dt="2025-02-24T15:11:16.086" v="128" actId="20577"/>
+          <ac:chgData name="Matthieu De Mari" userId="dfb708c9-d8dc-439f-9a3b-c772bf4a311c" providerId="ADAL" clId="{81E9B007-0C2C-493E-9B93-55A62C9C1F12}" dt="2026-01-14T08:45:41.017" v="111" actId="313"/>
           <ac:spMkLst>
             <pc:docMk/>
-            <pc:sldMk cId="4226169062" sldId="423"/>
-            <ac:spMk id="3" creationId="{C51ADC3A-36BE-B86B-FA40-9DF3C5E68D0A}"/>
+            <pc:sldMk cId="3784750566" sldId="478"/>
+            <ac:spMk id="3" creationId="{C88E7E02-41CA-5502-EC81-CC1584EA1981}"/>
           </ac:spMkLst>
         </pc:spChg>
       </pc:sldChg>
       <pc:sldChg chg="modSp mod">
-        <pc:chgData name="Matthieu De Mari" userId="dfb708c9-d8dc-439f-9a3b-c772bf4a311c" providerId="ADAL" clId="{4B2E324F-031D-406D-9BE0-EC86736820C0}" dt="2025-02-24T06:55:43.627" v="110" actId="20577"/>
+        <pc:chgData name="Matthieu De Mari" userId="dfb708c9-d8dc-439f-9a3b-c772bf4a311c" providerId="ADAL" clId="{81E9B007-0C2C-493E-9B93-55A62C9C1F12}" dt="2026-01-14T08:48:42.334" v="155" actId="14100"/>
         <pc:sldMkLst>
           <pc:docMk/>
           <pc:sldMk cId="3878320393" sldId="482"/>
         </pc:sldMkLst>
         <pc:spChg chg="mod">
-          <ac:chgData name="Matthieu De Mari" userId="dfb708c9-d8dc-439f-9a3b-c772bf4a311c" providerId="ADAL" clId="{4B2E324F-031D-406D-9BE0-EC86736820C0}" dt="2025-02-24T06:55:43.627" v="110" actId="20577"/>
+          <ac:chgData name="Matthieu De Mari" userId="dfb708c9-d8dc-439f-9a3b-c772bf4a311c" providerId="ADAL" clId="{81E9B007-0C2C-493E-9B93-55A62C9C1F12}" dt="2026-01-14T08:48:42.334" v="155" actId="14100"/>
           <ac:spMkLst>
             <pc:docMk/>
             <pc:sldMk cId="3878320393" sldId="482"/>
@@ -1088,3245 +539,35 @@
           </ac:spMkLst>
         </pc:spChg>
       </pc:sldChg>
-    </pc:docChg>
-  </pc:docChgLst>
-  <pc:docChgLst>
-    <pc:chgData name="Matthieu De Mari" userId="dfb708c9-d8dc-439f-9a3b-c772bf4a311c" providerId="ADAL" clId="{9C56ED94-FF08-4311-A90D-5831E9560329}"/>
-    <pc:docChg chg="undo custSel addSld delSld modSld sldOrd addSection delSection modSection">
-      <pc:chgData name="Matthieu De Mari" userId="dfb708c9-d8dc-439f-9a3b-c772bf4a311c" providerId="ADAL" clId="{9C56ED94-FF08-4311-A90D-5831E9560329}" dt="2023-03-15T08:55:10.511" v="4302" actId="5793"/>
-      <pc:docMkLst>
-        <pc:docMk/>
-      </pc:docMkLst>
-      <pc:sldChg chg="del">
-        <pc:chgData name="Matthieu De Mari" userId="dfb708c9-d8dc-439f-9a3b-c772bf4a311c" providerId="ADAL" clId="{9C56ED94-FF08-4311-A90D-5831E9560329}" dt="2023-03-09T09:12:53.243" v="23" actId="47"/>
-        <pc:sldMkLst>
-          <pc:docMk/>
-          <pc:sldMk cId="3739270414" sldId="258"/>
-        </pc:sldMkLst>
-      </pc:sldChg>
-      <pc:sldChg chg="del">
-        <pc:chgData name="Matthieu De Mari" userId="dfb708c9-d8dc-439f-9a3b-c772bf4a311c" providerId="ADAL" clId="{9C56ED94-FF08-4311-A90D-5831E9560329}" dt="2023-03-09T09:12:53.243" v="23" actId="47"/>
-        <pc:sldMkLst>
-          <pc:docMk/>
-          <pc:sldMk cId="3115582948" sldId="259"/>
-        </pc:sldMkLst>
-      </pc:sldChg>
-      <pc:sldChg chg="del">
-        <pc:chgData name="Matthieu De Mari" userId="dfb708c9-d8dc-439f-9a3b-c772bf4a311c" providerId="ADAL" clId="{9C56ED94-FF08-4311-A90D-5831E9560329}" dt="2023-03-09T09:12:53.243" v="23" actId="47"/>
-        <pc:sldMkLst>
-          <pc:docMk/>
-          <pc:sldMk cId="2366002138" sldId="265"/>
-        </pc:sldMkLst>
-      </pc:sldChg>
-      <pc:sldChg chg="del">
-        <pc:chgData name="Matthieu De Mari" userId="dfb708c9-d8dc-439f-9a3b-c772bf4a311c" providerId="ADAL" clId="{9C56ED94-FF08-4311-A90D-5831E9560329}" dt="2023-03-09T09:12:53.243" v="23" actId="47"/>
-        <pc:sldMkLst>
-          <pc:docMk/>
-          <pc:sldMk cId="1944673108" sldId="268"/>
-        </pc:sldMkLst>
-      </pc:sldChg>
-      <pc:sldChg chg="del">
-        <pc:chgData name="Matthieu De Mari" userId="dfb708c9-d8dc-439f-9a3b-c772bf4a311c" providerId="ADAL" clId="{9C56ED94-FF08-4311-A90D-5831E9560329}" dt="2023-03-09T09:12:53.243" v="23" actId="47"/>
-        <pc:sldMkLst>
-          <pc:docMk/>
-          <pc:sldMk cId="16380507" sldId="270"/>
-        </pc:sldMkLst>
-      </pc:sldChg>
-      <pc:sldChg chg="del">
-        <pc:chgData name="Matthieu De Mari" userId="dfb708c9-d8dc-439f-9a3b-c772bf4a311c" providerId="ADAL" clId="{9C56ED94-FF08-4311-A90D-5831E9560329}" dt="2023-03-09T09:12:53.243" v="23" actId="47"/>
-        <pc:sldMkLst>
-          <pc:docMk/>
-          <pc:sldMk cId="483806848" sldId="271"/>
-        </pc:sldMkLst>
-      </pc:sldChg>
       <pc:sldChg chg="modSp mod">
-        <pc:chgData name="Matthieu De Mari" userId="dfb708c9-d8dc-439f-9a3b-c772bf4a311c" providerId="ADAL" clId="{9C56ED94-FF08-4311-A90D-5831E9560329}" dt="2023-03-15T07:24:59.772" v="120" actId="20577"/>
-        <pc:sldMkLst>
-          <pc:docMk/>
-          <pc:sldMk cId="1040156172" sldId="377"/>
-        </pc:sldMkLst>
-      </pc:sldChg>
-      <pc:sldChg chg="del">
-        <pc:chgData name="Matthieu De Mari" userId="dfb708c9-d8dc-439f-9a3b-c772bf4a311c" providerId="ADAL" clId="{9C56ED94-FF08-4311-A90D-5831E9560329}" dt="2023-03-09T09:12:53.243" v="23" actId="47"/>
-        <pc:sldMkLst>
-          <pc:docMk/>
-          <pc:sldMk cId="2105998534" sldId="379"/>
-        </pc:sldMkLst>
-      </pc:sldChg>
-      <pc:sldChg chg="del">
-        <pc:chgData name="Matthieu De Mari" userId="dfb708c9-d8dc-439f-9a3b-c772bf4a311c" providerId="ADAL" clId="{9C56ED94-FF08-4311-A90D-5831E9560329}" dt="2023-03-09T09:12:53.243" v="23" actId="47"/>
-        <pc:sldMkLst>
-          <pc:docMk/>
-          <pc:sldMk cId="1213996271" sldId="382"/>
-        </pc:sldMkLst>
-      </pc:sldChg>
-      <pc:sldChg chg="add del">
-        <pc:chgData name="Matthieu De Mari" userId="dfb708c9-d8dc-439f-9a3b-c772bf4a311c" providerId="ADAL" clId="{9C56ED94-FF08-4311-A90D-5831E9560329}" dt="2023-03-15T08:26:47.736" v="3032"/>
-        <pc:sldMkLst>
-          <pc:docMk/>
-          <pc:sldMk cId="4226169062" sldId="423"/>
-        </pc:sldMkLst>
-      </pc:sldChg>
-      <pc:sldChg chg="del">
-        <pc:chgData name="Matthieu De Mari" userId="dfb708c9-d8dc-439f-9a3b-c772bf4a311c" providerId="ADAL" clId="{9C56ED94-FF08-4311-A90D-5831E9560329}" dt="2023-03-09T09:13:01.286" v="30" actId="47"/>
-        <pc:sldMkLst>
-          <pc:docMk/>
-          <pc:sldMk cId="4050696508" sldId="424"/>
-        </pc:sldMkLst>
-      </pc:sldChg>
-      <pc:sldChg chg="add del">
-        <pc:chgData name="Matthieu De Mari" userId="dfb708c9-d8dc-439f-9a3b-c772bf4a311c" providerId="ADAL" clId="{9C56ED94-FF08-4311-A90D-5831E9560329}" dt="2023-03-15T08:26:47.736" v="3032"/>
-        <pc:sldMkLst>
-          <pc:docMk/>
-          <pc:sldMk cId="2244529904" sldId="425"/>
-        </pc:sldMkLst>
-      </pc:sldChg>
-      <pc:sldChg chg="add del">
-        <pc:chgData name="Matthieu De Mari" userId="dfb708c9-d8dc-439f-9a3b-c772bf4a311c" providerId="ADAL" clId="{9C56ED94-FF08-4311-A90D-5831E9560329}" dt="2023-03-15T08:54:36.658" v="4246"/>
-        <pc:sldMkLst>
-          <pc:docMk/>
-          <pc:sldMk cId="1586635455" sldId="427"/>
-        </pc:sldMkLst>
-      </pc:sldChg>
-      <pc:sldChg chg="del">
-        <pc:chgData name="Matthieu De Mari" userId="dfb708c9-d8dc-439f-9a3b-c772bf4a311c" providerId="ADAL" clId="{9C56ED94-FF08-4311-A90D-5831E9560329}" dt="2023-03-09T09:12:56.596" v="25" actId="47"/>
-        <pc:sldMkLst>
-          <pc:docMk/>
-          <pc:sldMk cId="76065098" sldId="429"/>
-        </pc:sldMkLst>
-      </pc:sldChg>
-      <pc:sldChg chg="del">
-        <pc:chgData name="Matthieu De Mari" userId="dfb708c9-d8dc-439f-9a3b-c772bf4a311c" providerId="ADAL" clId="{9C56ED94-FF08-4311-A90D-5831E9560329}" dt="2023-03-09T09:12:56.916" v="26" actId="47"/>
-        <pc:sldMkLst>
-          <pc:docMk/>
-          <pc:sldMk cId="600619302" sldId="430"/>
-        </pc:sldMkLst>
-      </pc:sldChg>
-      <pc:sldChg chg="del">
-        <pc:chgData name="Matthieu De Mari" userId="dfb708c9-d8dc-439f-9a3b-c772bf4a311c" providerId="ADAL" clId="{9C56ED94-FF08-4311-A90D-5831E9560329}" dt="2023-03-09T09:12:57.296" v="27" actId="47"/>
-        <pc:sldMkLst>
-          <pc:docMk/>
-          <pc:sldMk cId="2954873226" sldId="431"/>
-        </pc:sldMkLst>
-      </pc:sldChg>
-      <pc:sldChg chg="del">
-        <pc:chgData name="Matthieu De Mari" userId="dfb708c9-d8dc-439f-9a3b-c772bf4a311c" providerId="ADAL" clId="{9C56ED94-FF08-4311-A90D-5831E9560329}" dt="2023-03-09T09:12:58.368" v="28" actId="47"/>
-        <pc:sldMkLst>
-          <pc:docMk/>
-          <pc:sldMk cId="2366763698" sldId="432"/>
-        </pc:sldMkLst>
-      </pc:sldChg>
-      <pc:sldChg chg="del">
-        <pc:chgData name="Matthieu De Mari" userId="dfb708c9-d8dc-439f-9a3b-c772bf4a311c" providerId="ADAL" clId="{9C56ED94-FF08-4311-A90D-5831E9560329}" dt="2023-03-09T09:12:58.368" v="28" actId="47"/>
-        <pc:sldMkLst>
-          <pc:docMk/>
-          <pc:sldMk cId="1791834708" sldId="433"/>
-        </pc:sldMkLst>
-      </pc:sldChg>
-      <pc:sldChg chg="del">
-        <pc:chgData name="Matthieu De Mari" userId="dfb708c9-d8dc-439f-9a3b-c772bf4a311c" providerId="ADAL" clId="{9C56ED94-FF08-4311-A90D-5831E9560329}" dt="2023-03-09T09:12:58.368" v="28" actId="47"/>
-        <pc:sldMkLst>
-          <pc:docMk/>
-          <pc:sldMk cId="2266139316" sldId="434"/>
-        </pc:sldMkLst>
-      </pc:sldChg>
-      <pc:sldChg chg="del">
-        <pc:chgData name="Matthieu De Mari" userId="dfb708c9-d8dc-439f-9a3b-c772bf4a311c" providerId="ADAL" clId="{9C56ED94-FF08-4311-A90D-5831E9560329}" dt="2023-03-09T09:13:00.279" v="29" actId="47"/>
-        <pc:sldMkLst>
-          <pc:docMk/>
-          <pc:sldMk cId="282863324" sldId="437"/>
-        </pc:sldMkLst>
-      </pc:sldChg>
-      <pc:sldChg chg="del">
-        <pc:chgData name="Matthieu De Mari" userId="dfb708c9-d8dc-439f-9a3b-c772bf4a311c" providerId="ADAL" clId="{9C56ED94-FF08-4311-A90D-5831E9560329}" dt="2023-03-09T09:13:00.279" v="29" actId="47"/>
-        <pc:sldMkLst>
-          <pc:docMk/>
-          <pc:sldMk cId="1648531005" sldId="438"/>
-        </pc:sldMkLst>
-      </pc:sldChg>
-      <pc:sldChg chg="del">
-        <pc:chgData name="Matthieu De Mari" userId="dfb708c9-d8dc-439f-9a3b-c772bf4a311c" providerId="ADAL" clId="{9C56ED94-FF08-4311-A90D-5831E9560329}" dt="2023-03-09T09:13:00.279" v="29" actId="47"/>
-        <pc:sldMkLst>
-          <pc:docMk/>
-          <pc:sldMk cId="2577277130" sldId="439"/>
-        </pc:sldMkLst>
-      </pc:sldChg>
-      <pc:sldChg chg="del">
-        <pc:chgData name="Matthieu De Mari" userId="dfb708c9-d8dc-439f-9a3b-c772bf4a311c" providerId="ADAL" clId="{9C56ED94-FF08-4311-A90D-5831E9560329}" dt="2023-03-09T09:13:00.279" v="29" actId="47"/>
-        <pc:sldMkLst>
-          <pc:docMk/>
-          <pc:sldMk cId="2191919470" sldId="440"/>
-        </pc:sldMkLst>
-      </pc:sldChg>
-      <pc:sldChg chg="del">
-        <pc:chgData name="Matthieu De Mari" userId="dfb708c9-d8dc-439f-9a3b-c772bf4a311c" providerId="ADAL" clId="{9C56ED94-FF08-4311-A90D-5831E9560329}" dt="2023-03-09T09:13:00.279" v="29" actId="47"/>
-        <pc:sldMkLst>
-          <pc:docMk/>
-          <pc:sldMk cId="2257941384" sldId="441"/>
-        </pc:sldMkLst>
-      </pc:sldChg>
-      <pc:sldChg chg="del">
-        <pc:chgData name="Matthieu De Mari" userId="dfb708c9-d8dc-439f-9a3b-c772bf4a311c" providerId="ADAL" clId="{9C56ED94-FF08-4311-A90D-5831E9560329}" dt="2023-03-09T09:13:00.279" v="29" actId="47"/>
-        <pc:sldMkLst>
-          <pc:docMk/>
-          <pc:sldMk cId="3705292892" sldId="444"/>
-        </pc:sldMkLst>
-      </pc:sldChg>
-      <pc:sldChg chg="del">
-        <pc:chgData name="Matthieu De Mari" userId="dfb708c9-d8dc-439f-9a3b-c772bf4a311c" providerId="ADAL" clId="{9C56ED94-FF08-4311-A90D-5831E9560329}" dt="2023-03-09T09:13:01.286" v="30" actId="47"/>
-        <pc:sldMkLst>
-          <pc:docMk/>
-          <pc:sldMk cId="3585737502" sldId="445"/>
-        </pc:sldMkLst>
-      </pc:sldChg>
-      <pc:sldChg chg="del">
-        <pc:chgData name="Matthieu De Mari" userId="dfb708c9-d8dc-439f-9a3b-c772bf4a311c" providerId="ADAL" clId="{9C56ED94-FF08-4311-A90D-5831E9560329}" dt="2023-03-09T09:13:01.286" v="30" actId="47"/>
-        <pc:sldMkLst>
-          <pc:docMk/>
-          <pc:sldMk cId="1738845767" sldId="448"/>
-        </pc:sldMkLst>
-      </pc:sldChg>
-      <pc:sldChg chg="del">
-        <pc:chgData name="Matthieu De Mari" userId="dfb708c9-d8dc-439f-9a3b-c772bf4a311c" providerId="ADAL" clId="{9C56ED94-FF08-4311-A90D-5831E9560329}" dt="2023-03-09T09:13:08.399" v="31" actId="47"/>
-        <pc:sldMkLst>
-          <pc:docMk/>
-          <pc:sldMk cId="1242261096" sldId="451"/>
-        </pc:sldMkLst>
-      </pc:sldChg>
-      <pc:sldChg chg="del">
-        <pc:chgData name="Matthieu De Mari" userId="dfb708c9-d8dc-439f-9a3b-c772bf4a311c" providerId="ADAL" clId="{9C56ED94-FF08-4311-A90D-5831E9560329}" dt="2023-03-09T09:13:09.478" v="32" actId="47"/>
-        <pc:sldMkLst>
-          <pc:docMk/>
-          <pc:sldMk cId="3102642038" sldId="453"/>
-        </pc:sldMkLst>
-      </pc:sldChg>
-      <pc:sldChg chg="modSp add del mod">
-        <pc:chgData name="Matthieu De Mari" userId="dfb708c9-d8dc-439f-9a3b-c772bf4a311c" providerId="ADAL" clId="{9C56ED94-FF08-4311-A90D-5831E9560329}" dt="2023-03-15T07:34:48.554" v="547" actId="20577"/>
-        <pc:sldMkLst>
-          <pc:docMk/>
-          <pc:sldMk cId="4072425385" sldId="454"/>
-        </pc:sldMkLst>
-      </pc:sldChg>
-      <pc:sldChg chg="del">
-        <pc:chgData name="Matthieu De Mari" userId="dfb708c9-d8dc-439f-9a3b-c772bf4a311c" providerId="ADAL" clId="{9C56ED94-FF08-4311-A90D-5831E9560329}" dt="2023-03-09T09:12:56.076" v="24" actId="47"/>
-        <pc:sldMkLst>
-          <pc:docMk/>
-          <pc:sldMk cId="1628282840" sldId="455"/>
-        </pc:sldMkLst>
-      </pc:sldChg>
-      <pc:sldChg chg="add del ord">
-        <pc:chgData name="Matthieu De Mari" userId="dfb708c9-d8dc-439f-9a3b-c772bf4a311c" providerId="ADAL" clId="{9C56ED94-FF08-4311-A90D-5831E9560329}" dt="2023-03-15T08:54:40.966" v="4248"/>
-        <pc:sldMkLst>
-          <pc:docMk/>
-          <pc:sldMk cId="1474802136" sldId="456"/>
-        </pc:sldMkLst>
-      </pc:sldChg>
-      <pc:sldChg chg="ord">
-        <pc:chgData name="Matthieu De Mari" userId="dfb708c9-d8dc-439f-9a3b-c772bf4a311c" providerId="ADAL" clId="{9C56ED94-FF08-4311-A90D-5831E9560329}" dt="2023-03-15T07:25:11.614" v="122"/>
-        <pc:sldMkLst>
-          <pc:docMk/>
-          <pc:sldMk cId="3858745428" sldId="457"/>
-        </pc:sldMkLst>
-      </pc:sldChg>
-      <pc:sldChg chg="ord">
-        <pc:chgData name="Matthieu De Mari" userId="dfb708c9-d8dc-439f-9a3b-c772bf4a311c" providerId="ADAL" clId="{9C56ED94-FF08-4311-A90D-5831E9560329}" dt="2023-03-15T07:25:11.614" v="122"/>
-        <pc:sldMkLst>
-          <pc:docMk/>
-          <pc:sldMk cId="3624547080" sldId="459"/>
-        </pc:sldMkLst>
-      </pc:sldChg>
-      <pc:sldChg chg="add del ord">
-        <pc:chgData name="Matthieu De Mari" userId="dfb708c9-d8dc-439f-9a3b-c772bf4a311c" providerId="ADAL" clId="{9C56ED94-FF08-4311-A90D-5831E9560329}" dt="2023-03-15T07:25:11.614" v="122"/>
-        <pc:sldMkLst>
-          <pc:docMk/>
-          <pc:sldMk cId="727967492" sldId="460"/>
-        </pc:sldMkLst>
-      </pc:sldChg>
-      <pc:sldChg chg="delSp modSp add del mod">
-        <pc:chgData name="Matthieu De Mari" userId="dfb708c9-d8dc-439f-9a3b-c772bf4a311c" providerId="ADAL" clId="{9C56ED94-FF08-4311-A90D-5831E9560329}" dt="2023-03-15T08:33:25.545" v="3179"/>
-        <pc:sldMkLst>
-          <pc:docMk/>
-          <pc:sldMk cId="813445278" sldId="461"/>
-        </pc:sldMkLst>
-      </pc:sldChg>
-      <pc:sldChg chg="add del ord">
-        <pc:chgData name="Matthieu De Mari" userId="dfb708c9-d8dc-439f-9a3b-c772bf4a311c" providerId="ADAL" clId="{9C56ED94-FF08-4311-A90D-5831E9560329}" dt="2023-03-15T07:25:11.614" v="122"/>
-        <pc:sldMkLst>
-          <pc:docMk/>
-          <pc:sldMk cId="2989704858" sldId="462"/>
-        </pc:sldMkLst>
-      </pc:sldChg>
-      <pc:sldChg chg="del">
-        <pc:chgData name="Matthieu De Mari" userId="dfb708c9-d8dc-439f-9a3b-c772bf4a311c" providerId="ADAL" clId="{9C56ED94-FF08-4311-A90D-5831E9560329}" dt="2023-03-09T09:13:18.719" v="34" actId="47"/>
-        <pc:sldMkLst>
-          <pc:docMk/>
-          <pc:sldMk cId="3007767847" sldId="463"/>
-        </pc:sldMkLst>
-      </pc:sldChg>
-      <pc:sldChg chg="new del">
-        <pc:chgData name="Matthieu De Mari" userId="dfb708c9-d8dc-439f-9a3b-c772bf4a311c" providerId="ADAL" clId="{9C56ED94-FF08-4311-A90D-5831E9560329}" dt="2023-03-15T07:01:03.866" v="62" actId="47"/>
-        <pc:sldMkLst>
-          <pc:docMk/>
-          <pc:sldMk cId="4122694519" sldId="463"/>
-        </pc:sldMkLst>
-      </pc:sldChg>
-      <pc:sldChg chg="add del">
-        <pc:chgData name="Matthieu De Mari" userId="dfb708c9-d8dc-439f-9a3b-c772bf4a311c" providerId="ADAL" clId="{9C56ED94-FF08-4311-A90D-5831E9560329}" dt="2023-03-15T08:53:39.294" v="4245" actId="47"/>
-        <pc:sldMkLst>
-          <pc:docMk/>
-          <pc:sldMk cId="47889816" sldId="464"/>
-        </pc:sldMkLst>
-      </pc:sldChg>
-      <pc:sldChg chg="del">
-        <pc:chgData name="Matthieu De Mari" userId="dfb708c9-d8dc-439f-9a3b-c772bf4a311c" providerId="ADAL" clId="{9C56ED94-FF08-4311-A90D-5831E9560329}" dt="2023-03-09T09:13:21.335" v="36" actId="47"/>
-        <pc:sldMkLst>
-          <pc:docMk/>
-          <pc:sldMk cId="4050530474" sldId="465"/>
-        </pc:sldMkLst>
-      </pc:sldChg>
-      <pc:sldChg chg="del">
-        <pc:chgData name="Matthieu De Mari" userId="dfb708c9-d8dc-439f-9a3b-c772bf4a311c" providerId="ADAL" clId="{9C56ED94-FF08-4311-A90D-5831E9560329}" dt="2023-03-09T09:13:21.335" v="36" actId="47"/>
-        <pc:sldMkLst>
-          <pc:docMk/>
-          <pc:sldMk cId="4107990403" sldId="466"/>
-        </pc:sldMkLst>
-      </pc:sldChg>
-      <pc:sldChg chg="del">
-        <pc:chgData name="Matthieu De Mari" userId="dfb708c9-d8dc-439f-9a3b-c772bf4a311c" providerId="ADAL" clId="{9C56ED94-FF08-4311-A90D-5831E9560329}" dt="2023-03-09T09:13:21.335" v="36" actId="47"/>
-        <pc:sldMkLst>
-          <pc:docMk/>
-          <pc:sldMk cId="4111616225" sldId="467"/>
-        </pc:sldMkLst>
-      </pc:sldChg>
-      <pc:sldChg chg="del">
-        <pc:chgData name="Matthieu De Mari" userId="dfb708c9-d8dc-439f-9a3b-c772bf4a311c" providerId="ADAL" clId="{9C56ED94-FF08-4311-A90D-5831E9560329}" dt="2023-03-09T09:13:21.335" v="36" actId="47"/>
-        <pc:sldMkLst>
-          <pc:docMk/>
-          <pc:sldMk cId="1345006296" sldId="468"/>
-        </pc:sldMkLst>
-      </pc:sldChg>
-      <pc:sldChg chg="del">
-        <pc:chgData name="Matthieu De Mari" userId="dfb708c9-d8dc-439f-9a3b-c772bf4a311c" providerId="ADAL" clId="{9C56ED94-FF08-4311-A90D-5831E9560329}" dt="2023-03-09T09:13:21.335" v="36" actId="47"/>
-        <pc:sldMkLst>
-          <pc:docMk/>
-          <pc:sldMk cId="1003937956" sldId="469"/>
-        </pc:sldMkLst>
-      </pc:sldChg>
-      <pc:sldChg chg="del">
-        <pc:chgData name="Matthieu De Mari" userId="dfb708c9-d8dc-439f-9a3b-c772bf4a311c" providerId="ADAL" clId="{9C56ED94-FF08-4311-A90D-5831E9560329}" dt="2023-03-09T09:13:21.335" v="36" actId="47"/>
-        <pc:sldMkLst>
-          <pc:docMk/>
-          <pc:sldMk cId="1494991067" sldId="470"/>
-        </pc:sldMkLst>
-      </pc:sldChg>
-      <pc:sldChg chg="add del">
-        <pc:chgData name="Matthieu De Mari" userId="dfb708c9-d8dc-439f-9a3b-c772bf4a311c" providerId="ADAL" clId="{9C56ED94-FF08-4311-A90D-5831E9560329}" dt="2023-03-15T08:54:36.658" v="4246"/>
-        <pc:sldMkLst>
-          <pc:docMk/>
-          <pc:sldMk cId="3221576718" sldId="471"/>
-        </pc:sldMkLst>
-      </pc:sldChg>
-      <pc:sldChg chg="del">
-        <pc:chgData name="Matthieu De Mari" userId="dfb708c9-d8dc-439f-9a3b-c772bf4a311c" providerId="ADAL" clId="{9C56ED94-FF08-4311-A90D-5831E9560329}" dt="2023-03-09T09:13:22.605" v="37" actId="47"/>
-        <pc:sldMkLst>
-          <pc:docMk/>
-          <pc:sldMk cId="2469439250" sldId="472"/>
-        </pc:sldMkLst>
-      </pc:sldChg>
-      <pc:sldChg chg="add ord">
-        <pc:chgData name="Matthieu De Mari" userId="dfb708c9-d8dc-439f-9a3b-c772bf4a311c" providerId="ADAL" clId="{9C56ED94-FF08-4311-A90D-5831E9560329}" dt="2023-03-15T07:25:11.614" v="122"/>
-        <pc:sldMkLst>
-          <pc:docMk/>
-          <pc:sldMk cId="2053185467" sldId="473"/>
-        </pc:sldMkLst>
-      </pc:sldChg>
-      <pc:sldChg chg="addSp delSp modSp new mod">
-        <pc:chgData name="Matthieu De Mari" userId="dfb708c9-d8dc-439f-9a3b-c772bf4a311c" providerId="ADAL" clId="{9C56ED94-FF08-4311-A90D-5831E9560329}" dt="2023-03-15T07:35:50.258" v="664" actId="207"/>
-        <pc:sldMkLst>
-          <pc:docMk/>
-          <pc:sldMk cId="1094051178" sldId="474"/>
-        </pc:sldMkLst>
-      </pc:sldChg>
-      <pc:sldChg chg="addSp delSp modSp new mod">
-        <pc:chgData name="Matthieu De Mari" userId="dfb708c9-d8dc-439f-9a3b-c772bf4a311c" providerId="ADAL" clId="{9C56ED94-FF08-4311-A90D-5831E9560329}" dt="2023-03-15T08:02:03.444" v="2145" actId="5793"/>
-        <pc:sldMkLst>
-          <pc:docMk/>
-          <pc:sldMk cId="125150915" sldId="475"/>
-        </pc:sldMkLst>
-      </pc:sldChg>
-      <pc:sldChg chg="new del">
-        <pc:chgData name="Matthieu De Mari" userId="dfb708c9-d8dc-439f-9a3b-c772bf4a311c" providerId="ADAL" clId="{9C56ED94-FF08-4311-A90D-5831E9560329}" dt="2023-03-15T08:25:46.274" v="3025" actId="47"/>
-        <pc:sldMkLst>
-          <pc:docMk/>
-          <pc:sldMk cId="1973789673" sldId="476"/>
-        </pc:sldMkLst>
-      </pc:sldChg>
-      <pc:sldChg chg="addSp delSp modSp new mod modClrScheme chgLayout">
-        <pc:chgData name="Matthieu De Mari" userId="dfb708c9-d8dc-439f-9a3b-c772bf4a311c" providerId="ADAL" clId="{9C56ED94-FF08-4311-A90D-5831E9560329}" dt="2023-03-15T08:12:07.464" v="2680" actId="6549"/>
-        <pc:sldMkLst>
-          <pc:docMk/>
-          <pc:sldMk cId="3237795424" sldId="477"/>
-        </pc:sldMkLst>
-      </pc:sldChg>
-      <pc:sldChg chg="modSp add mod">
-        <pc:chgData name="Matthieu De Mari" userId="dfb708c9-d8dc-439f-9a3b-c772bf4a311c" providerId="ADAL" clId="{9C56ED94-FF08-4311-A90D-5831E9560329}" dt="2023-03-15T07:35:21.456" v="627" actId="20577"/>
-        <pc:sldMkLst>
-          <pc:docMk/>
-          <pc:sldMk cId="932509960" sldId="478"/>
-        </pc:sldMkLst>
-      </pc:sldChg>
-      <pc:sldChg chg="modSp new del mod">
-        <pc:chgData name="Matthieu De Mari" userId="dfb708c9-d8dc-439f-9a3b-c772bf4a311c" providerId="ADAL" clId="{9C56ED94-FF08-4311-A90D-5831E9560329}" dt="2023-03-15T07:34:40.126" v="536" actId="47"/>
-        <pc:sldMkLst>
-          <pc:docMk/>
-          <pc:sldMk cId="3161737942" sldId="478"/>
-        </pc:sldMkLst>
-      </pc:sldChg>
-      <pc:sldChg chg="modSp add mod">
-        <pc:chgData name="Matthieu De Mari" userId="dfb708c9-d8dc-439f-9a3b-c772bf4a311c" providerId="ADAL" clId="{9C56ED94-FF08-4311-A90D-5831E9560329}" dt="2023-03-15T07:39:15.899" v="959" actId="20577"/>
-        <pc:sldMkLst>
-          <pc:docMk/>
-          <pc:sldMk cId="1275862355" sldId="479"/>
-        </pc:sldMkLst>
-      </pc:sldChg>
-      <pc:sldChg chg="addSp delSp modSp add mod">
-        <pc:chgData name="Matthieu De Mari" userId="dfb708c9-d8dc-439f-9a3b-c772bf4a311c" providerId="ADAL" clId="{9C56ED94-FF08-4311-A90D-5831E9560329}" dt="2023-03-15T07:39:21.442" v="963" actId="20577"/>
-        <pc:sldMkLst>
-          <pc:docMk/>
-          <pc:sldMk cId="2239257233" sldId="480"/>
-        </pc:sldMkLst>
-      </pc:sldChg>
-      <pc:sldChg chg="addSp delSp modSp add mod">
-        <pc:chgData name="Matthieu De Mari" userId="dfb708c9-d8dc-439f-9a3b-c772bf4a311c" providerId="ADAL" clId="{9C56ED94-FF08-4311-A90D-5831E9560329}" dt="2023-03-15T07:40:48.087" v="1126" actId="27636"/>
-        <pc:sldMkLst>
-          <pc:docMk/>
-          <pc:sldMk cId="2562768069" sldId="481"/>
-        </pc:sldMkLst>
-      </pc:sldChg>
-      <pc:sldChg chg="addSp delSp modSp add mod">
-        <pc:chgData name="Matthieu De Mari" userId="dfb708c9-d8dc-439f-9a3b-c772bf4a311c" providerId="ADAL" clId="{9C56ED94-FF08-4311-A90D-5831E9560329}" dt="2023-03-15T07:43:27.385" v="1438" actId="20577"/>
-        <pc:sldMkLst>
-          <pc:docMk/>
-          <pc:sldMk cId="3541171842" sldId="482"/>
-        </pc:sldMkLst>
-      </pc:sldChg>
-      <pc:sldChg chg="new del">
-        <pc:chgData name="Matthieu De Mari" userId="dfb708c9-d8dc-439f-9a3b-c772bf4a311c" providerId="ADAL" clId="{9C56ED94-FF08-4311-A90D-5831E9560329}" dt="2023-03-15T07:46:27.128" v="1604" actId="47"/>
-        <pc:sldMkLst>
-          <pc:docMk/>
-          <pc:sldMk cId="2031272788" sldId="483"/>
-        </pc:sldMkLst>
-      </pc:sldChg>
-      <pc:sldChg chg="addSp delSp modSp add mod modClrScheme chgLayout">
-        <pc:chgData name="Matthieu De Mari" userId="dfb708c9-d8dc-439f-9a3b-c772bf4a311c" providerId="ADAL" clId="{9C56ED94-FF08-4311-A90D-5831E9560329}" dt="2023-03-15T07:45:04.987" v="1602" actId="700"/>
-        <pc:sldMkLst>
-          <pc:docMk/>
-          <pc:sldMk cId="199935466" sldId="484"/>
-        </pc:sldMkLst>
-      </pc:sldChg>
-      <pc:sldChg chg="addSp delSp modSp add mod">
-        <pc:chgData name="Matthieu De Mari" userId="dfb708c9-d8dc-439f-9a3b-c772bf4a311c" providerId="ADAL" clId="{9C56ED94-FF08-4311-A90D-5831E9560329}" dt="2023-03-15T07:49:26.059" v="1814" actId="20577"/>
-        <pc:sldMkLst>
-          <pc:docMk/>
-          <pc:sldMk cId="3459688009" sldId="485"/>
-        </pc:sldMkLst>
-      </pc:sldChg>
-      <pc:sldChg chg="addSp delSp modSp add mod">
-        <pc:chgData name="Matthieu De Mari" userId="dfb708c9-d8dc-439f-9a3b-c772bf4a311c" providerId="ADAL" clId="{9C56ED94-FF08-4311-A90D-5831E9560329}" dt="2023-03-15T08:00:49.814" v="1940" actId="20577"/>
-        <pc:sldMkLst>
-          <pc:docMk/>
-          <pc:sldMk cId="3530460312" sldId="486"/>
-        </pc:sldMkLst>
-      </pc:sldChg>
-      <pc:sldChg chg="addSp delSp modSp add mod modClrScheme chgLayout">
-        <pc:chgData name="Matthieu De Mari" userId="dfb708c9-d8dc-439f-9a3b-c772bf4a311c" providerId="ADAL" clId="{9C56ED94-FF08-4311-A90D-5831E9560329}" dt="2023-03-15T08:03:21.135" v="2300" actId="20577"/>
-        <pc:sldMkLst>
-          <pc:docMk/>
-          <pc:sldMk cId="1228659976" sldId="487"/>
-        </pc:sldMkLst>
-      </pc:sldChg>
-      <pc:sldChg chg="addSp delSp modSp add mod">
-        <pc:chgData name="Matthieu De Mari" userId="dfb708c9-d8dc-439f-9a3b-c772bf4a311c" providerId="ADAL" clId="{9C56ED94-FF08-4311-A90D-5831E9560329}" dt="2023-03-15T08:04:07.317" v="2362" actId="1076"/>
-        <pc:sldMkLst>
-          <pc:docMk/>
-          <pc:sldMk cId="3872619914" sldId="488"/>
-        </pc:sldMkLst>
-      </pc:sldChg>
-      <pc:sldChg chg="modSp add mod">
-        <pc:chgData name="Matthieu De Mari" userId="dfb708c9-d8dc-439f-9a3b-c772bf4a311c" providerId="ADAL" clId="{9C56ED94-FF08-4311-A90D-5831E9560329}" dt="2023-03-15T08:25:40.698" v="3024" actId="114"/>
-        <pc:sldMkLst>
-          <pc:docMk/>
-          <pc:sldMk cId="3076288606" sldId="489"/>
-        </pc:sldMkLst>
-      </pc:sldChg>
-      <pc:sldChg chg="addSp delSp modSp new mod">
-        <pc:chgData name="Matthieu De Mari" userId="dfb708c9-d8dc-439f-9a3b-c772bf4a311c" providerId="ADAL" clId="{9C56ED94-FF08-4311-A90D-5831E9560329}" dt="2023-03-15T08:37:04.723" v="3587" actId="20577"/>
-        <pc:sldMkLst>
-          <pc:docMk/>
-          <pc:sldMk cId="2543628540" sldId="490"/>
-        </pc:sldMkLst>
-      </pc:sldChg>
-      <pc:sldChg chg="addSp delSp modSp new mod modClrScheme chgLayout">
-        <pc:chgData name="Matthieu De Mari" userId="dfb708c9-d8dc-439f-9a3b-c772bf4a311c" providerId="ADAL" clId="{9C56ED94-FF08-4311-A90D-5831E9560329}" dt="2023-03-15T08:55:10.511" v="4302" actId="5793"/>
-        <pc:sldMkLst>
-          <pc:docMk/>
-          <pc:sldMk cId="3043047677" sldId="491"/>
-        </pc:sldMkLst>
-      </pc:sldChg>
-      <pc:sldChg chg="add ord">
-        <pc:chgData name="Matthieu De Mari" userId="dfb708c9-d8dc-439f-9a3b-c772bf4a311c" providerId="ADAL" clId="{9C56ED94-FF08-4311-A90D-5831E9560329}" dt="2023-03-15T08:54:44.451" v="4250"/>
-        <pc:sldMkLst>
-          <pc:docMk/>
-          <pc:sldMk cId="453310084" sldId="492"/>
-        </pc:sldMkLst>
-      </pc:sldChg>
-      <pc:sldChg chg="modSp add mod">
-        <pc:chgData name="Matthieu De Mari" userId="dfb708c9-d8dc-439f-9a3b-c772bf4a311c" providerId="ADAL" clId="{9C56ED94-FF08-4311-A90D-5831E9560329}" dt="2023-03-15T08:54:55.299" v="4253" actId="20577"/>
-        <pc:sldMkLst>
-          <pc:docMk/>
-          <pc:sldMk cId="197640958" sldId="493"/>
-        </pc:sldMkLst>
-      </pc:sldChg>
-      <pc:sldChg chg="delSp modSp add mod">
-        <pc:chgData name="Matthieu De Mari" userId="dfb708c9-d8dc-439f-9a3b-c772bf4a311c" providerId="ADAL" clId="{9C56ED94-FF08-4311-A90D-5831E9560329}" dt="2023-03-15T08:39:30.883" v="3980" actId="20577"/>
-        <pc:sldMkLst>
-          <pc:docMk/>
-          <pc:sldMk cId="4277571336" sldId="494"/>
-        </pc:sldMkLst>
-      </pc:sldChg>
-      <pc:sldChg chg="modSp add mod">
-        <pc:chgData name="Matthieu De Mari" userId="dfb708c9-d8dc-439f-9a3b-c772bf4a311c" providerId="ADAL" clId="{9C56ED94-FF08-4311-A90D-5831E9560329}" dt="2023-03-15T08:40:43.675" v="4244" actId="20577"/>
-        <pc:sldMkLst>
-          <pc:docMk/>
-          <pc:sldMk cId="4253433879" sldId="495"/>
-        </pc:sldMkLst>
-      </pc:sldChg>
-    </pc:docChg>
-  </pc:docChgLst>
-  <pc:docChgLst>
-    <pc:chgData name="Matthieu De Mari" userId="dfb708c9-d8dc-439f-9a3b-c772bf4a311c" providerId="ADAL" clId="{CF6A5140-9227-409F-9187-B98CCD837415}"/>
-    <pc:docChg chg="undo redo custSel addSld delSld modSld sldOrd addSection delSection modSection">
-      <pc:chgData name="Matthieu De Mari" userId="dfb708c9-d8dc-439f-9a3b-c772bf4a311c" providerId="ADAL" clId="{CF6A5140-9227-409F-9187-B98CCD837415}" dt="2023-03-09T08:45:37.083" v="10704" actId="20577"/>
-      <pc:docMkLst>
-        <pc:docMk/>
-      </pc:docMkLst>
-      <pc:sldChg chg="add">
-        <pc:chgData name="Matthieu De Mari" userId="dfb708c9-d8dc-439f-9a3b-c772bf4a311c" providerId="ADAL" clId="{CF6A5140-9227-409F-9187-B98CCD837415}" dt="2023-03-08T06:42:49.197" v="464"/>
-        <pc:sldMkLst>
-          <pc:docMk/>
-          <pc:sldMk cId="3739270414" sldId="258"/>
-        </pc:sldMkLst>
-      </pc:sldChg>
-      <pc:sldChg chg="modSp add mod">
-        <pc:chgData name="Matthieu De Mari" userId="dfb708c9-d8dc-439f-9a3b-c772bf4a311c" providerId="ADAL" clId="{CF6A5140-9227-409F-9187-B98CCD837415}" dt="2023-03-08T06:45:03.461" v="613" actId="20577"/>
-        <pc:sldMkLst>
-          <pc:docMk/>
-          <pc:sldMk cId="3115582948" sldId="259"/>
-        </pc:sldMkLst>
-      </pc:sldChg>
-      <pc:sldChg chg="add">
-        <pc:chgData name="Matthieu De Mari" userId="dfb708c9-d8dc-439f-9a3b-c772bf4a311c" providerId="ADAL" clId="{CF6A5140-9227-409F-9187-B98CCD837415}" dt="2023-03-08T06:42:49.197" v="464"/>
-        <pc:sldMkLst>
-          <pc:docMk/>
-          <pc:sldMk cId="2366002138" sldId="265"/>
-        </pc:sldMkLst>
-      </pc:sldChg>
-      <pc:sldChg chg="add">
-        <pc:chgData name="Matthieu De Mari" userId="dfb708c9-d8dc-439f-9a3b-c772bf4a311c" providerId="ADAL" clId="{CF6A5140-9227-409F-9187-B98CCD837415}" dt="2023-03-08T06:42:49.197" v="464"/>
-        <pc:sldMkLst>
-          <pc:docMk/>
-          <pc:sldMk cId="1944673108" sldId="268"/>
-        </pc:sldMkLst>
-      </pc:sldChg>
-      <pc:sldChg chg="modSp add mod">
-        <pc:chgData name="Matthieu De Mari" userId="dfb708c9-d8dc-439f-9a3b-c772bf4a311c" providerId="ADAL" clId="{CF6A5140-9227-409F-9187-B98CCD837415}" dt="2023-03-08T06:45:38.844" v="651" actId="20577"/>
-        <pc:sldMkLst>
-          <pc:docMk/>
-          <pc:sldMk cId="16380507" sldId="270"/>
-        </pc:sldMkLst>
-      </pc:sldChg>
-      <pc:sldChg chg="add">
-        <pc:chgData name="Matthieu De Mari" userId="dfb708c9-d8dc-439f-9a3b-c772bf4a311c" providerId="ADAL" clId="{CF6A5140-9227-409F-9187-B98CCD837415}" dt="2023-03-08T06:42:49.197" v="464"/>
-        <pc:sldMkLst>
-          <pc:docMk/>
-          <pc:sldMk cId="483806848" sldId="271"/>
-        </pc:sldMkLst>
-      </pc:sldChg>
-      <pc:sldChg chg="del">
-        <pc:chgData name="Matthieu De Mari" userId="dfb708c9-d8dc-439f-9a3b-c772bf4a311c" providerId="ADAL" clId="{CF6A5140-9227-409F-9187-B98CCD837415}" dt="2023-03-08T06:05:16.161" v="65" actId="47"/>
-        <pc:sldMkLst>
-          <pc:docMk/>
-          <pc:sldMk cId="1628130454" sldId="272"/>
-        </pc:sldMkLst>
-      </pc:sldChg>
-      <pc:sldChg chg="del">
-        <pc:chgData name="Matthieu De Mari" userId="dfb708c9-d8dc-439f-9a3b-c772bf4a311c" providerId="ADAL" clId="{CF6A5140-9227-409F-9187-B98CCD837415}" dt="2023-03-08T06:05:16.161" v="65" actId="47"/>
-        <pc:sldMkLst>
-          <pc:docMk/>
-          <pc:sldMk cId="3014069118" sldId="273"/>
-        </pc:sldMkLst>
-      </pc:sldChg>
-      <pc:sldChg chg="del">
-        <pc:chgData name="Matthieu De Mari" userId="dfb708c9-d8dc-439f-9a3b-c772bf4a311c" providerId="ADAL" clId="{CF6A5140-9227-409F-9187-B98CCD837415}" dt="2023-03-08T06:05:16.161" v="65" actId="47"/>
-        <pc:sldMkLst>
-          <pc:docMk/>
-          <pc:sldMk cId="1813455260" sldId="274"/>
-        </pc:sldMkLst>
-      </pc:sldChg>
-      <pc:sldChg chg="add del">
-        <pc:chgData name="Matthieu De Mari" userId="dfb708c9-d8dc-439f-9a3b-c772bf4a311c" providerId="ADAL" clId="{CF6A5140-9227-409F-9187-B98CCD837415}" dt="2023-03-09T08:09:47.699" v="10404" actId="47"/>
-        <pc:sldMkLst>
-          <pc:docMk/>
-          <pc:sldMk cId="4232115997" sldId="303"/>
-        </pc:sldMkLst>
-      </pc:sldChg>
-      <pc:sldChg chg="modSp del mod">
-        <pc:chgData name="Matthieu De Mari" userId="dfb708c9-d8dc-439f-9a3b-c772bf4a311c" providerId="ADAL" clId="{CF6A5140-9227-409F-9187-B98CCD837415}" dt="2023-03-09T08:10:07.550" v="10409" actId="47"/>
-        <pc:sldMkLst>
-          <pc:docMk/>
-          <pc:sldMk cId="2858358615" sldId="314"/>
-        </pc:sldMkLst>
-      </pc:sldChg>
-      <pc:sldChg chg="modSp mod">
-        <pc:chgData name="Matthieu De Mari" userId="dfb708c9-d8dc-439f-9a3b-c772bf4a311c" providerId="ADAL" clId="{CF6A5140-9227-409F-9187-B98CCD837415}" dt="2023-03-09T08:31:34.970" v="10417" actId="20577"/>
-        <pc:sldMkLst>
-          <pc:docMk/>
-          <pc:sldMk cId="1040156172" sldId="377"/>
-        </pc:sldMkLst>
-      </pc:sldChg>
-      <pc:sldChg chg="del">
-        <pc:chgData name="Matthieu De Mari" userId="dfb708c9-d8dc-439f-9a3b-c772bf4a311c" providerId="ADAL" clId="{CF6A5140-9227-409F-9187-B98CCD837415}" dt="2023-03-08T06:05:17.999" v="67" actId="47"/>
-        <pc:sldMkLst>
-          <pc:docMk/>
-          <pc:sldMk cId="820057187" sldId="378"/>
-        </pc:sldMkLst>
-      </pc:sldChg>
-      <pc:sldChg chg="del">
-        <pc:chgData name="Matthieu De Mari" userId="dfb708c9-d8dc-439f-9a3b-c772bf4a311c" providerId="ADAL" clId="{CF6A5140-9227-409F-9187-B98CCD837415}" dt="2023-03-08T06:05:24.214" v="74" actId="47"/>
-        <pc:sldMkLst>
-          <pc:docMk/>
-          <pc:sldMk cId="691565538" sldId="379"/>
-        </pc:sldMkLst>
-      </pc:sldChg>
-      <pc:sldChg chg="add">
-        <pc:chgData name="Matthieu De Mari" userId="dfb708c9-d8dc-439f-9a3b-c772bf4a311c" providerId="ADAL" clId="{CF6A5140-9227-409F-9187-B98CCD837415}" dt="2023-03-08T06:42:49.197" v="464"/>
-        <pc:sldMkLst>
-          <pc:docMk/>
-          <pc:sldMk cId="2105998534" sldId="379"/>
-        </pc:sldMkLst>
-      </pc:sldChg>
-      <pc:sldChg chg="del">
-        <pc:chgData name="Matthieu De Mari" userId="dfb708c9-d8dc-439f-9a3b-c772bf4a311c" providerId="ADAL" clId="{CF6A5140-9227-409F-9187-B98CCD837415}" dt="2023-03-08T06:05:17.054" v="66" actId="47"/>
-        <pc:sldMkLst>
-          <pc:docMk/>
-          <pc:sldMk cId="4217274173" sldId="380"/>
-        </pc:sldMkLst>
-      </pc:sldChg>
-      <pc:sldChg chg="del">
-        <pc:chgData name="Matthieu De Mari" userId="dfb708c9-d8dc-439f-9a3b-c772bf4a311c" providerId="ADAL" clId="{CF6A5140-9227-409F-9187-B98CCD837415}" dt="2023-03-08T06:05:21.493" v="71" actId="47"/>
-        <pc:sldMkLst>
-          <pc:docMk/>
-          <pc:sldMk cId="1253114987" sldId="381"/>
-        </pc:sldMkLst>
-      </pc:sldChg>
-      <pc:sldChg chg="del">
-        <pc:chgData name="Matthieu De Mari" userId="dfb708c9-d8dc-439f-9a3b-c772bf4a311c" providerId="ADAL" clId="{CF6A5140-9227-409F-9187-B98CCD837415}" dt="2023-03-08T06:05:18.882" v="68" actId="47"/>
-        <pc:sldMkLst>
-          <pc:docMk/>
-          <pc:sldMk cId="336152115" sldId="382"/>
-        </pc:sldMkLst>
-      </pc:sldChg>
-      <pc:sldChg chg="modSp add mod">
-        <pc:chgData name="Matthieu De Mari" userId="dfb708c9-d8dc-439f-9a3b-c772bf4a311c" providerId="ADAL" clId="{CF6A5140-9227-409F-9187-B98CCD837415}" dt="2023-03-08T06:44:39.947" v="606" actId="20577"/>
-        <pc:sldMkLst>
-          <pc:docMk/>
-          <pc:sldMk cId="1213996271" sldId="382"/>
-        </pc:sldMkLst>
-      </pc:sldChg>
-      <pc:sldChg chg="del">
-        <pc:chgData name="Matthieu De Mari" userId="dfb708c9-d8dc-439f-9a3b-c772bf4a311c" providerId="ADAL" clId="{CF6A5140-9227-409F-9187-B98CCD837415}" dt="2023-03-08T06:05:20.621" v="70" actId="47"/>
-        <pc:sldMkLst>
-          <pc:docMk/>
-          <pc:sldMk cId="1681210728" sldId="383"/>
-        </pc:sldMkLst>
-      </pc:sldChg>
-      <pc:sldChg chg="del">
-        <pc:chgData name="Matthieu De Mari" userId="dfb708c9-d8dc-439f-9a3b-c772bf4a311c" providerId="ADAL" clId="{CF6A5140-9227-409F-9187-B98CCD837415}" dt="2023-03-08T06:05:19.819" v="69" actId="47"/>
-        <pc:sldMkLst>
-          <pc:docMk/>
-          <pc:sldMk cId="1342602480" sldId="384"/>
-        </pc:sldMkLst>
-      </pc:sldChg>
-      <pc:sldChg chg="del">
-        <pc:chgData name="Matthieu De Mari" userId="dfb708c9-d8dc-439f-9a3b-c772bf4a311c" providerId="ADAL" clId="{CF6A5140-9227-409F-9187-B98CCD837415}" dt="2023-03-08T06:05:17.999" v="67" actId="47"/>
-        <pc:sldMkLst>
-          <pc:docMk/>
-          <pc:sldMk cId="3061177336" sldId="385"/>
-        </pc:sldMkLst>
-      </pc:sldChg>
-      <pc:sldChg chg="del">
-        <pc:chgData name="Matthieu De Mari" userId="dfb708c9-d8dc-439f-9a3b-c772bf4a311c" providerId="ADAL" clId="{CF6A5140-9227-409F-9187-B98CCD837415}" dt="2023-03-08T06:05:18.882" v="68" actId="47"/>
-        <pc:sldMkLst>
-          <pc:docMk/>
-          <pc:sldMk cId="1114751945" sldId="386"/>
-        </pc:sldMkLst>
-      </pc:sldChg>
-      <pc:sldChg chg="del">
-        <pc:chgData name="Matthieu De Mari" userId="dfb708c9-d8dc-439f-9a3b-c772bf4a311c" providerId="ADAL" clId="{CF6A5140-9227-409F-9187-B98CCD837415}" dt="2023-03-08T06:05:18.882" v="68" actId="47"/>
-        <pc:sldMkLst>
-          <pc:docMk/>
-          <pc:sldMk cId="881014307" sldId="387"/>
-        </pc:sldMkLst>
-      </pc:sldChg>
-      <pc:sldChg chg="del">
-        <pc:chgData name="Matthieu De Mari" userId="dfb708c9-d8dc-439f-9a3b-c772bf4a311c" providerId="ADAL" clId="{CF6A5140-9227-409F-9187-B98CCD837415}" dt="2023-03-08T06:05:18.882" v="68" actId="47"/>
-        <pc:sldMkLst>
-          <pc:docMk/>
-          <pc:sldMk cId="1359818059" sldId="389"/>
-        </pc:sldMkLst>
-      </pc:sldChg>
-      <pc:sldChg chg="del">
-        <pc:chgData name="Matthieu De Mari" userId="dfb708c9-d8dc-439f-9a3b-c772bf4a311c" providerId="ADAL" clId="{CF6A5140-9227-409F-9187-B98CCD837415}" dt="2023-03-08T06:05:18.882" v="68" actId="47"/>
-        <pc:sldMkLst>
-          <pc:docMk/>
-          <pc:sldMk cId="1233822438" sldId="390"/>
-        </pc:sldMkLst>
-      </pc:sldChg>
-      <pc:sldChg chg="del">
-        <pc:chgData name="Matthieu De Mari" userId="dfb708c9-d8dc-439f-9a3b-c772bf4a311c" providerId="ADAL" clId="{CF6A5140-9227-409F-9187-B98CCD837415}" dt="2023-03-08T06:05:18.882" v="68" actId="47"/>
-        <pc:sldMkLst>
-          <pc:docMk/>
-          <pc:sldMk cId="2406012581" sldId="391"/>
-        </pc:sldMkLst>
-      </pc:sldChg>
-      <pc:sldChg chg="del">
-        <pc:chgData name="Matthieu De Mari" userId="dfb708c9-d8dc-439f-9a3b-c772bf4a311c" providerId="ADAL" clId="{CF6A5140-9227-409F-9187-B98CCD837415}" dt="2023-03-08T06:05:18.882" v="68" actId="47"/>
-        <pc:sldMkLst>
-          <pc:docMk/>
-          <pc:sldMk cId="1269624659" sldId="392"/>
-        </pc:sldMkLst>
-      </pc:sldChg>
-      <pc:sldChg chg="del">
-        <pc:chgData name="Matthieu De Mari" userId="dfb708c9-d8dc-439f-9a3b-c772bf4a311c" providerId="ADAL" clId="{CF6A5140-9227-409F-9187-B98CCD837415}" dt="2023-03-08T06:05:19.819" v="69" actId="47"/>
-        <pc:sldMkLst>
-          <pc:docMk/>
-          <pc:sldMk cId="1060213588" sldId="393"/>
-        </pc:sldMkLst>
-      </pc:sldChg>
-      <pc:sldChg chg="del">
-        <pc:chgData name="Matthieu De Mari" userId="dfb708c9-d8dc-439f-9a3b-c772bf4a311c" providerId="ADAL" clId="{CF6A5140-9227-409F-9187-B98CCD837415}" dt="2023-03-08T06:05:19.819" v="69" actId="47"/>
-        <pc:sldMkLst>
-          <pc:docMk/>
-          <pc:sldMk cId="1215328976" sldId="394"/>
-        </pc:sldMkLst>
-      </pc:sldChg>
-      <pc:sldChg chg="del">
-        <pc:chgData name="Matthieu De Mari" userId="dfb708c9-d8dc-439f-9a3b-c772bf4a311c" providerId="ADAL" clId="{CF6A5140-9227-409F-9187-B98CCD837415}" dt="2023-03-08T06:05:19.819" v="69" actId="47"/>
-        <pc:sldMkLst>
-          <pc:docMk/>
-          <pc:sldMk cId="3544056403" sldId="395"/>
-        </pc:sldMkLst>
-      </pc:sldChg>
-      <pc:sldChg chg="del">
-        <pc:chgData name="Matthieu De Mari" userId="dfb708c9-d8dc-439f-9a3b-c772bf4a311c" providerId="ADAL" clId="{CF6A5140-9227-409F-9187-B98CCD837415}" dt="2023-03-08T06:05:19.819" v="69" actId="47"/>
-        <pc:sldMkLst>
-          <pc:docMk/>
-          <pc:sldMk cId="511100047" sldId="397"/>
-        </pc:sldMkLst>
-      </pc:sldChg>
-      <pc:sldChg chg="del">
-        <pc:chgData name="Matthieu De Mari" userId="dfb708c9-d8dc-439f-9a3b-c772bf4a311c" providerId="ADAL" clId="{CF6A5140-9227-409F-9187-B98CCD837415}" dt="2023-03-08T06:05:18.882" v="68" actId="47"/>
-        <pc:sldMkLst>
-          <pc:docMk/>
-          <pc:sldMk cId="2174133860" sldId="398"/>
-        </pc:sldMkLst>
-      </pc:sldChg>
-      <pc:sldChg chg="del">
-        <pc:chgData name="Matthieu De Mari" userId="dfb708c9-d8dc-439f-9a3b-c772bf4a311c" providerId="ADAL" clId="{CF6A5140-9227-409F-9187-B98CCD837415}" dt="2023-03-08T06:05:18.882" v="68" actId="47"/>
-        <pc:sldMkLst>
-          <pc:docMk/>
-          <pc:sldMk cId="1114255243" sldId="399"/>
-        </pc:sldMkLst>
-      </pc:sldChg>
-      <pc:sldChg chg="del">
-        <pc:chgData name="Matthieu De Mari" userId="dfb708c9-d8dc-439f-9a3b-c772bf4a311c" providerId="ADAL" clId="{CF6A5140-9227-409F-9187-B98CCD837415}" dt="2023-03-08T06:05:18.882" v="68" actId="47"/>
-        <pc:sldMkLst>
-          <pc:docMk/>
-          <pc:sldMk cId="3412258979" sldId="400"/>
-        </pc:sldMkLst>
-      </pc:sldChg>
-      <pc:sldChg chg="del">
-        <pc:chgData name="Matthieu De Mari" userId="dfb708c9-d8dc-439f-9a3b-c772bf4a311c" providerId="ADAL" clId="{CF6A5140-9227-409F-9187-B98CCD837415}" dt="2023-03-08T06:05:19.819" v="69" actId="47"/>
-        <pc:sldMkLst>
-          <pc:docMk/>
-          <pc:sldMk cId="2615177350" sldId="401"/>
-        </pc:sldMkLst>
-      </pc:sldChg>
-      <pc:sldChg chg="del">
-        <pc:chgData name="Matthieu De Mari" userId="dfb708c9-d8dc-439f-9a3b-c772bf4a311c" providerId="ADAL" clId="{CF6A5140-9227-409F-9187-B98CCD837415}" dt="2023-03-08T06:05:19.819" v="69" actId="47"/>
-        <pc:sldMkLst>
-          <pc:docMk/>
-          <pc:sldMk cId="792071299" sldId="402"/>
-        </pc:sldMkLst>
-      </pc:sldChg>
-      <pc:sldChg chg="del">
-        <pc:chgData name="Matthieu De Mari" userId="dfb708c9-d8dc-439f-9a3b-c772bf4a311c" providerId="ADAL" clId="{CF6A5140-9227-409F-9187-B98CCD837415}" dt="2023-03-08T06:05:19.819" v="69" actId="47"/>
-        <pc:sldMkLst>
-          <pc:docMk/>
-          <pc:sldMk cId="990763623" sldId="403"/>
-        </pc:sldMkLst>
-      </pc:sldChg>
-      <pc:sldChg chg="del">
-        <pc:chgData name="Matthieu De Mari" userId="dfb708c9-d8dc-439f-9a3b-c772bf4a311c" providerId="ADAL" clId="{CF6A5140-9227-409F-9187-B98CCD837415}" dt="2023-03-08T06:05:19.819" v="69" actId="47"/>
-        <pc:sldMkLst>
-          <pc:docMk/>
-          <pc:sldMk cId="3762706142" sldId="404"/>
-        </pc:sldMkLst>
-      </pc:sldChg>
-      <pc:sldChg chg="del">
-        <pc:chgData name="Matthieu De Mari" userId="dfb708c9-d8dc-439f-9a3b-c772bf4a311c" providerId="ADAL" clId="{CF6A5140-9227-409F-9187-B98CCD837415}" dt="2023-03-08T06:05:20.621" v="70" actId="47"/>
-        <pc:sldMkLst>
-          <pc:docMk/>
-          <pc:sldMk cId="4232193198" sldId="405"/>
-        </pc:sldMkLst>
-      </pc:sldChg>
-      <pc:sldChg chg="del">
-        <pc:chgData name="Matthieu De Mari" userId="dfb708c9-d8dc-439f-9a3b-c772bf4a311c" providerId="ADAL" clId="{CF6A5140-9227-409F-9187-B98CCD837415}" dt="2023-03-08T06:05:20.621" v="70" actId="47"/>
-        <pc:sldMkLst>
-          <pc:docMk/>
-          <pc:sldMk cId="1511321219" sldId="406"/>
-        </pc:sldMkLst>
-      </pc:sldChg>
-      <pc:sldChg chg="del">
-        <pc:chgData name="Matthieu De Mari" userId="dfb708c9-d8dc-439f-9a3b-c772bf4a311c" providerId="ADAL" clId="{CF6A5140-9227-409F-9187-B98CCD837415}" dt="2023-03-08T06:05:20.621" v="70" actId="47"/>
-        <pc:sldMkLst>
-          <pc:docMk/>
-          <pc:sldMk cId="3233841990" sldId="407"/>
-        </pc:sldMkLst>
-      </pc:sldChg>
-      <pc:sldChg chg="del">
-        <pc:chgData name="Matthieu De Mari" userId="dfb708c9-d8dc-439f-9a3b-c772bf4a311c" providerId="ADAL" clId="{CF6A5140-9227-409F-9187-B98CCD837415}" dt="2023-03-08T06:05:20.621" v="70" actId="47"/>
-        <pc:sldMkLst>
-          <pc:docMk/>
-          <pc:sldMk cId="1609989787" sldId="408"/>
-        </pc:sldMkLst>
-      </pc:sldChg>
-      <pc:sldChg chg="del">
-        <pc:chgData name="Matthieu De Mari" userId="dfb708c9-d8dc-439f-9a3b-c772bf4a311c" providerId="ADAL" clId="{CF6A5140-9227-409F-9187-B98CCD837415}" dt="2023-03-08T06:05:18.882" v="68" actId="47"/>
-        <pc:sldMkLst>
-          <pc:docMk/>
-          <pc:sldMk cId="3853734329" sldId="409"/>
-        </pc:sldMkLst>
-      </pc:sldChg>
-      <pc:sldChg chg="del">
-        <pc:chgData name="Matthieu De Mari" userId="dfb708c9-d8dc-439f-9a3b-c772bf4a311c" providerId="ADAL" clId="{CF6A5140-9227-409F-9187-B98CCD837415}" dt="2023-03-08T06:05:23.379" v="73" actId="47"/>
-        <pc:sldMkLst>
-          <pc:docMk/>
-          <pc:sldMk cId="4281175894" sldId="410"/>
-        </pc:sldMkLst>
-      </pc:sldChg>
-      <pc:sldChg chg="del">
-        <pc:chgData name="Matthieu De Mari" userId="dfb708c9-d8dc-439f-9a3b-c772bf4a311c" providerId="ADAL" clId="{CF6A5140-9227-409F-9187-B98CCD837415}" dt="2023-03-08T06:05:22.321" v="72" actId="47"/>
-        <pc:sldMkLst>
-          <pc:docMk/>
-          <pc:sldMk cId="3863789620" sldId="411"/>
-        </pc:sldMkLst>
-      </pc:sldChg>
-      <pc:sldChg chg="del">
-        <pc:chgData name="Matthieu De Mari" userId="dfb708c9-d8dc-439f-9a3b-c772bf4a311c" providerId="ADAL" clId="{CF6A5140-9227-409F-9187-B98CCD837415}" dt="2023-03-08T06:05:22.321" v="72" actId="47"/>
-        <pc:sldMkLst>
-          <pc:docMk/>
-          <pc:sldMk cId="3522054596" sldId="412"/>
-        </pc:sldMkLst>
-      </pc:sldChg>
-      <pc:sldChg chg="del">
-        <pc:chgData name="Matthieu De Mari" userId="dfb708c9-d8dc-439f-9a3b-c772bf4a311c" providerId="ADAL" clId="{CF6A5140-9227-409F-9187-B98CCD837415}" dt="2023-03-08T06:05:24.214" v="74" actId="47"/>
-        <pc:sldMkLst>
-          <pc:docMk/>
-          <pc:sldMk cId="2221766967" sldId="413"/>
-        </pc:sldMkLst>
-      </pc:sldChg>
-      <pc:sldChg chg="del">
-        <pc:chgData name="Matthieu De Mari" userId="dfb708c9-d8dc-439f-9a3b-c772bf4a311c" providerId="ADAL" clId="{CF6A5140-9227-409F-9187-B98CCD837415}" dt="2023-03-08T06:05:24.214" v="74" actId="47"/>
-        <pc:sldMkLst>
-          <pc:docMk/>
-          <pc:sldMk cId="912972080" sldId="414"/>
-        </pc:sldMkLst>
-      </pc:sldChg>
-      <pc:sldChg chg="del">
-        <pc:chgData name="Matthieu De Mari" userId="dfb708c9-d8dc-439f-9a3b-c772bf4a311c" providerId="ADAL" clId="{CF6A5140-9227-409F-9187-B98CCD837415}" dt="2023-03-08T06:05:24.214" v="74" actId="47"/>
-        <pc:sldMkLst>
-          <pc:docMk/>
-          <pc:sldMk cId="71985707" sldId="415"/>
-        </pc:sldMkLst>
-      </pc:sldChg>
-      <pc:sldChg chg="del">
-        <pc:chgData name="Matthieu De Mari" userId="dfb708c9-d8dc-439f-9a3b-c772bf4a311c" providerId="ADAL" clId="{CF6A5140-9227-409F-9187-B98CCD837415}" dt="2023-03-08T06:05:24.214" v="74" actId="47"/>
-        <pc:sldMkLst>
-          <pc:docMk/>
-          <pc:sldMk cId="1311368978" sldId="416"/>
-        </pc:sldMkLst>
-      </pc:sldChg>
-      <pc:sldChg chg="del">
-        <pc:chgData name="Matthieu De Mari" userId="dfb708c9-d8dc-439f-9a3b-c772bf4a311c" providerId="ADAL" clId="{CF6A5140-9227-409F-9187-B98CCD837415}" dt="2023-03-08T06:05:22.321" v="72" actId="47"/>
-        <pc:sldMkLst>
-          <pc:docMk/>
-          <pc:sldMk cId="3072427418" sldId="417"/>
-        </pc:sldMkLst>
-      </pc:sldChg>
-      <pc:sldChg chg="del">
-        <pc:chgData name="Matthieu De Mari" userId="dfb708c9-d8dc-439f-9a3b-c772bf4a311c" providerId="ADAL" clId="{CF6A5140-9227-409F-9187-B98CCD837415}" dt="2023-03-08T06:05:22.321" v="72" actId="47"/>
-        <pc:sldMkLst>
-          <pc:docMk/>
-          <pc:sldMk cId="298499389" sldId="418"/>
-        </pc:sldMkLst>
-      </pc:sldChg>
-      <pc:sldChg chg="del">
-        <pc:chgData name="Matthieu De Mari" userId="dfb708c9-d8dc-439f-9a3b-c772bf4a311c" providerId="ADAL" clId="{CF6A5140-9227-409F-9187-B98CCD837415}" dt="2023-03-08T06:05:22.321" v="72" actId="47"/>
-        <pc:sldMkLst>
-          <pc:docMk/>
-          <pc:sldMk cId="3069423319" sldId="419"/>
-        </pc:sldMkLst>
-      </pc:sldChg>
-      <pc:sldChg chg="add del">
-        <pc:chgData name="Matthieu De Mari" userId="dfb708c9-d8dc-439f-9a3b-c772bf4a311c" providerId="ADAL" clId="{CF6A5140-9227-409F-9187-B98CCD837415}" dt="2023-03-08T06:05:53.727" v="81" actId="47"/>
-        <pc:sldMkLst>
-          <pc:docMk/>
-          <pc:sldMk cId="485649805" sldId="420"/>
-        </pc:sldMkLst>
-      </pc:sldChg>
-      <pc:sldChg chg="add del">
-        <pc:chgData name="Matthieu De Mari" userId="dfb708c9-d8dc-439f-9a3b-c772bf4a311c" providerId="ADAL" clId="{CF6A5140-9227-409F-9187-B98CCD837415}" dt="2023-03-09T08:09:47.699" v="10404" actId="47"/>
-        <pc:sldMkLst>
-          <pc:docMk/>
-          <pc:sldMk cId="3351792085" sldId="421"/>
-        </pc:sldMkLst>
-      </pc:sldChg>
-      <pc:sldChg chg="modSp new mod">
-        <pc:chgData name="Matthieu De Mari" userId="dfb708c9-d8dc-439f-9a3b-c772bf4a311c" providerId="ADAL" clId="{CF6A5140-9227-409F-9187-B98CCD837415}" dt="2023-03-08T06:44:09.169" v="552" actId="113"/>
-        <pc:sldMkLst>
-          <pc:docMk/>
-          <pc:sldMk cId="1161233365" sldId="422"/>
-        </pc:sldMkLst>
-      </pc:sldChg>
-      <pc:sldChg chg="add del">
-        <pc:chgData name="Matthieu De Mari" userId="dfb708c9-d8dc-439f-9a3b-c772bf4a311c" providerId="ADAL" clId="{CF6A5140-9227-409F-9187-B98CCD837415}" dt="2023-03-08T06:05:56.432" v="84" actId="47"/>
-        <pc:sldMkLst>
-          <pc:docMk/>
-          <pc:sldMk cId="3421583851" sldId="423"/>
-        </pc:sldMkLst>
-      </pc:sldChg>
-      <pc:sldChg chg="modSp new mod ord">
-        <pc:chgData name="Matthieu De Mari" userId="dfb708c9-d8dc-439f-9a3b-c772bf4a311c" providerId="ADAL" clId="{CF6A5140-9227-409F-9187-B98CCD837415}" dt="2023-03-09T07:32:17.764" v="6693" actId="27636"/>
-        <pc:sldMkLst>
-          <pc:docMk/>
-          <pc:sldMk cId="4226169062" sldId="423"/>
-        </pc:sldMkLst>
-      </pc:sldChg>
-      <pc:sldChg chg="add del">
-        <pc:chgData name="Matthieu De Mari" userId="dfb708c9-d8dc-439f-9a3b-c772bf4a311c" providerId="ADAL" clId="{CF6A5140-9227-409F-9187-B98CCD837415}" dt="2023-03-08T06:05:57.037" v="85" actId="47"/>
-        <pc:sldMkLst>
-          <pc:docMk/>
-          <pc:sldMk cId="2106229472" sldId="424"/>
-        </pc:sldMkLst>
-      </pc:sldChg>
-      <pc:sldChg chg="addSp delSp modSp new mod modClrScheme chgLayout">
-        <pc:chgData name="Matthieu De Mari" userId="dfb708c9-d8dc-439f-9a3b-c772bf4a311c" providerId="ADAL" clId="{CF6A5140-9227-409F-9187-B98CCD837415}" dt="2023-03-08T10:26:23.292" v="3939" actId="313"/>
-        <pc:sldMkLst>
-          <pc:docMk/>
-          <pc:sldMk cId="4050696508" sldId="424"/>
-        </pc:sldMkLst>
-      </pc:sldChg>
-      <pc:sldChg chg="add del">
-        <pc:chgData name="Matthieu De Mari" userId="dfb708c9-d8dc-439f-9a3b-c772bf4a311c" providerId="ADAL" clId="{CF6A5140-9227-409F-9187-B98CCD837415}" dt="2023-03-08T06:05:55.165" v="82" actId="47"/>
-        <pc:sldMkLst>
-          <pc:docMk/>
-          <pc:sldMk cId="833550183" sldId="425"/>
-        </pc:sldMkLst>
-      </pc:sldChg>
-      <pc:sldChg chg="modSp new mod ord">
-        <pc:chgData name="Matthieu De Mari" userId="dfb708c9-d8dc-439f-9a3b-c772bf4a311c" providerId="ADAL" clId="{CF6A5140-9227-409F-9187-B98CCD837415}" dt="2023-03-09T07:46:53.901" v="8162" actId="20577"/>
-        <pc:sldMkLst>
-          <pc:docMk/>
-          <pc:sldMk cId="2244529904" sldId="425"/>
-        </pc:sldMkLst>
-      </pc:sldChg>
-      <pc:sldChg chg="new del">
-        <pc:chgData name="Matthieu De Mari" userId="dfb708c9-d8dc-439f-9a3b-c772bf4a311c" providerId="ADAL" clId="{CF6A5140-9227-409F-9187-B98CCD837415}" dt="2023-03-09T07:46:49.192" v="8160" actId="47"/>
-        <pc:sldMkLst>
-          <pc:docMk/>
-          <pc:sldMk cId="316413211" sldId="426"/>
-        </pc:sldMkLst>
-      </pc:sldChg>
-      <pc:sldChg chg="add del">
-        <pc:chgData name="Matthieu De Mari" userId="dfb708c9-d8dc-439f-9a3b-c772bf4a311c" providerId="ADAL" clId="{CF6A5140-9227-409F-9187-B98CCD837415}" dt="2023-03-08T06:05:55.848" v="83" actId="47"/>
-        <pc:sldMkLst>
-          <pc:docMk/>
-          <pc:sldMk cId="1650955281" sldId="426"/>
-        </pc:sldMkLst>
-      </pc:sldChg>
-      <pc:sldChg chg="del">
-        <pc:chgData name="Matthieu De Mari" userId="dfb708c9-d8dc-439f-9a3b-c772bf4a311c" providerId="ADAL" clId="{CF6A5140-9227-409F-9187-B98CCD837415}" dt="2023-03-08T06:05:18.882" v="68" actId="47"/>
-        <pc:sldMkLst>
-          <pc:docMk/>
-          <pc:sldMk cId="25607758" sldId="427"/>
-        </pc:sldMkLst>
-      </pc:sldChg>
-      <pc:sldChg chg="addSp modSp new mod modClrScheme chgLayout">
-        <pc:chgData name="Matthieu De Mari" userId="dfb708c9-d8dc-439f-9a3b-c772bf4a311c" providerId="ADAL" clId="{CF6A5140-9227-409F-9187-B98CCD837415}" dt="2023-03-09T08:02:24.370" v="9484" actId="20577"/>
-        <pc:sldMkLst>
-          <pc:docMk/>
-          <pc:sldMk cId="1586635455" sldId="427"/>
-        </pc:sldMkLst>
-      </pc:sldChg>
-      <pc:sldChg chg="new del ord">
-        <pc:chgData name="Matthieu De Mari" userId="dfb708c9-d8dc-439f-9a3b-c772bf4a311c" providerId="ADAL" clId="{CF6A5140-9227-409F-9187-B98CCD837415}" dt="2023-03-09T08:09:50.895" v="10405" actId="47"/>
-        <pc:sldMkLst>
-          <pc:docMk/>
-          <pc:sldMk cId="1021753143" sldId="428"/>
-        </pc:sldMkLst>
-      </pc:sldChg>
-      <pc:sldChg chg="add del">
-        <pc:chgData name="Matthieu De Mari" userId="dfb708c9-d8dc-439f-9a3b-c772bf4a311c" providerId="ADAL" clId="{CF6A5140-9227-409F-9187-B98CCD837415}" dt="2023-03-08T06:05:52.107" v="80" actId="47"/>
-        <pc:sldMkLst>
-          <pc:docMk/>
-          <pc:sldMk cId="2580070337" sldId="428"/>
-        </pc:sldMkLst>
-      </pc:sldChg>
-      <pc:sldChg chg="addSp delSp modSp new mod ord modClrScheme chgLayout">
-        <pc:chgData name="Matthieu De Mari" userId="dfb708c9-d8dc-439f-9a3b-c772bf4a311c" providerId="ADAL" clId="{CF6A5140-9227-409F-9187-B98CCD837415}" dt="2023-03-09T07:13:51.803" v="5418" actId="20577"/>
-        <pc:sldMkLst>
-          <pc:docMk/>
-          <pc:sldMk cId="76065098" sldId="429"/>
-        </pc:sldMkLst>
-      </pc:sldChg>
-      <pc:sldChg chg="add del">
-        <pc:chgData name="Matthieu De Mari" userId="dfb708c9-d8dc-439f-9a3b-c772bf4a311c" providerId="ADAL" clId="{CF6A5140-9227-409F-9187-B98CCD837415}" dt="2023-03-08T06:05:57.672" v="86" actId="47"/>
-        <pc:sldMkLst>
-          <pc:docMk/>
-          <pc:sldMk cId="2609747574" sldId="429"/>
-        </pc:sldMkLst>
-      </pc:sldChg>
-      <pc:sldChg chg="addSp modSp add mod">
-        <pc:chgData name="Matthieu De Mari" userId="dfb708c9-d8dc-439f-9a3b-c772bf4a311c" providerId="ADAL" clId="{CF6A5140-9227-409F-9187-B98CCD837415}" dt="2023-03-08T06:54:24.985" v="1279"/>
-        <pc:sldMkLst>
-          <pc:docMk/>
-          <pc:sldMk cId="600619302" sldId="430"/>
-        </pc:sldMkLst>
-      </pc:sldChg>
-      <pc:sldChg chg="add del">
-        <pc:chgData name="Matthieu De Mari" userId="dfb708c9-d8dc-439f-9a3b-c772bf4a311c" providerId="ADAL" clId="{CF6A5140-9227-409F-9187-B98CCD837415}" dt="2023-03-08T06:05:58.319" v="87" actId="47"/>
-        <pc:sldMkLst>
-          <pc:docMk/>
-          <pc:sldMk cId="1298953197" sldId="430"/>
-        </pc:sldMkLst>
-      </pc:sldChg>
-      <pc:sldChg chg="new del">
-        <pc:chgData name="Matthieu De Mari" userId="dfb708c9-d8dc-439f-9a3b-c772bf4a311c" providerId="ADAL" clId="{CF6A5140-9227-409F-9187-B98CCD837415}" dt="2023-03-08T06:45:49.355" v="652" actId="47"/>
-        <pc:sldMkLst>
-          <pc:docMk/>
-          <pc:sldMk cId="4142767097" sldId="430"/>
-        </pc:sldMkLst>
-      </pc:sldChg>
-      <pc:sldChg chg="add del">
-        <pc:chgData name="Matthieu De Mari" userId="dfb708c9-d8dc-439f-9a3b-c772bf4a311c" providerId="ADAL" clId="{CF6A5140-9227-409F-9187-B98CCD837415}" dt="2023-03-08T06:05:49.339" v="78" actId="47"/>
-        <pc:sldMkLst>
-          <pc:docMk/>
-          <pc:sldMk cId="349686524" sldId="431"/>
-        </pc:sldMkLst>
-      </pc:sldChg>
-      <pc:sldChg chg="addSp delSp modSp add mod">
-        <pc:chgData name="Matthieu De Mari" userId="dfb708c9-d8dc-439f-9a3b-c772bf4a311c" providerId="ADAL" clId="{CF6A5140-9227-409F-9187-B98CCD837415}" dt="2023-03-09T07:14:00.657" v="5421" actId="114"/>
-        <pc:sldMkLst>
-          <pc:docMk/>
-          <pc:sldMk cId="2954873226" sldId="431"/>
-        </pc:sldMkLst>
-      </pc:sldChg>
-      <pc:sldChg chg="addSp modSp add mod">
-        <pc:chgData name="Matthieu De Mari" userId="dfb708c9-d8dc-439f-9a3b-c772bf4a311c" providerId="ADAL" clId="{CF6A5140-9227-409F-9187-B98CCD837415}" dt="2023-03-08T07:14:41.818" v="2737" actId="207"/>
-        <pc:sldMkLst>
-          <pc:docMk/>
-          <pc:sldMk cId="2366763698" sldId="432"/>
-        </pc:sldMkLst>
-      </pc:sldChg>
-      <pc:sldChg chg="add del">
-        <pc:chgData name="Matthieu De Mari" userId="dfb708c9-d8dc-439f-9a3b-c772bf4a311c" providerId="ADAL" clId="{CF6A5140-9227-409F-9187-B98CCD837415}" dt="2023-03-08T06:05:50.083" v="79" actId="47"/>
-        <pc:sldMkLst>
-          <pc:docMk/>
-          <pc:sldMk cId="3417944735" sldId="432"/>
-        </pc:sldMkLst>
-      </pc:sldChg>
-      <pc:sldChg chg="add del">
-        <pc:chgData name="Matthieu De Mari" userId="dfb708c9-d8dc-439f-9a3b-c772bf4a311c" providerId="ADAL" clId="{CF6A5140-9227-409F-9187-B98CCD837415}" dt="2023-03-08T06:58:06.054" v="1587" actId="47"/>
-        <pc:sldMkLst>
-          <pc:docMk/>
-          <pc:sldMk cId="576554638" sldId="433"/>
-        </pc:sldMkLst>
-      </pc:sldChg>
-      <pc:sldChg chg="modSp add mod">
-        <pc:chgData name="Matthieu De Mari" userId="dfb708c9-d8dc-439f-9a3b-c772bf4a311c" providerId="ADAL" clId="{CF6A5140-9227-409F-9187-B98CCD837415}" dt="2023-03-08T07:14:48.710" v="2750" actId="20577"/>
-        <pc:sldMkLst>
-          <pc:docMk/>
-          <pc:sldMk cId="1791834708" sldId="433"/>
-        </pc:sldMkLst>
-      </pc:sldChg>
-      <pc:sldChg chg="add del">
-        <pc:chgData name="Matthieu De Mari" userId="dfb708c9-d8dc-439f-9a3b-c772bf4a311c" providerId="ADAL" clId="{CF6A5140-9227-409F-9187-B98CCD837415}" dt="2023-03-08T06:05:48.218" v="77" actId="47"/>
-        <pc:sldMkLst>
-          <pc:docMk/>
-          <pc:sldMk cId="2653152999" sldId="433"/>
-        </pc:sldMkLst>
-      </pc:sldChg>
-      <pc:sldChg chg="addSp modSp add mod">
-        <pc:chgData name="Matthieu De Mari" userId="dfb708c9-d8dc-439f-9a3b-c772bf4a311c" providerId="ADAL" clId="{CF6A5140-9227-409F-9187-B98CCD837415}" dt="2023-03-09T07:14:13.158" v="5422" actId="20577"/>
-        <pc:sldMkLst>
-          <pc:docMk/>
-          <pc:sldMk cId="2266139316" sldId="434"/>
-        </pc:sldMkLst>
-      </pc:sldChg>
-      <pc:sldChg chg="add del">
-        <pc:chgData name="Matthieu De Mari" userId="dfb708c9-d8dc-439f-9a3b-c772bf4a311c" providerId="ADAL" clId="{CF6A5140-9227-409F-9187-B98CCD837415}" dt="2023-03-08T06:05:48.218" v="77" actId="47"/>
-        <pc:sldMkLst>
-          <pc:docMk/>
-          <pc:sldMk cId="2305199698" sldId="434"/>
-        </pc:sldMkLst>
-      </pc:sldChg>
-      <pc:sldChg chg="add del">
-        <pc:chgData name="Matthieu De Mari" userId="dfb708c9-d8dc-439f-9a3b-c772bf4a311c" providerId="ADAL" clId="{CF6A5140-9227-409F-9187-B98CCD837415}" dt="2023-03-08T06:05:48.218" v="77" actId="47"/>
-        <pc:sldMkLst>
-          <pc:docMk/>
-          <pc:sldMk cId="2095478576" sldId="435"/>
-        </pc:sldMkLst>
-      </pc:sldChg>
-      <pc:sldChg chg="new del">
-        <pc:chgData name="Matthieu De Mari" userId="dfb708c9-d8dc-439f-9a3b-c772bf4a311c" providerId="ADAL" clId="{CF6A5140-9227-409F-9187-B98CCD837415}" dt="2023-03-08T10:36:29.111" v="4632" actId="47"/>
-        <pc:sldMkLst>
-          <pc:docMk/>
-          <pc:sldMk cId="3544061180" sldId="435"/>
-        </pc:sldMkLst>
-      </pc:sldChg>
-      <pc:sldChg chg="add del">
-        <pc:chgData name="Matthieu De Mari" userId="dfb708c9-d8dc-439f-9a3b-c772bf4a311c" providerId="ADAL" clId="{CF6A5140-9227-409F-9187-B98CCD837415}" dt="2023-03-08T06:05:48.218" v="77" actId="47"/>
-        <pc:sldMkLst>
-          <pc:docMk/>
-          <pc:sldMk cId="2087017446" sldId="436"/>
-        </pc:sldMkLst>
-      </pc:sldChg>
-      <pc:sldChg chg="modSp add del mod ord">
-        <pc:chgData name="Matthieu De Mari" userId="dfb708c9-d8dc-439f-9a3b-c772bf4a311c" providerId="ADAL" clId="{CF6A5140-9227-409F-9187-B98CCD837415}" dt="2023-03-08T07:09:45.301" v="2382" actId="47"/>
-        <pc:sldMkLst>
-          <pc:docMk/>
-          <pc:sldMk cId="4002996775" sldId="436"/>
-        </pc:sldMkLst>
-      </pc:sldChg>
-      <pc:sldChg chg="modSp add mod">
-        <pc:chgData name="Matthieu De Mari" userId="dfb708c9-d8dc-439f-9a3b-c772bf4a311c" providerId="ADAL" clId="{CF6A5140-9227-409F-9187-B98CCD837415}" dt="2023-03-08T07:11:01.712" v="2477" actId="207"/>
-        <pc:sldMkLst>
-          <pc:docMk/>
-          <pc:sldMk cId="282863324" sldId="437"/>
-        </pc:sldMkLst>
-      </pc:sldChg>
-      <pc:sldChg chg="add del">
-        <pc:chgData name="Matthieu De Mari" userId="dfb708c9-d8dc-439f-9a3b-c772bf4a311c" providerId="ADAL" clId="{CF6A5140-9227-409F-9187-B98CCD837415}" dt="2023-03-08T06:05:48.218" v="77" actId="47"/>
-        <pc:sldMkLst>
-          <pc:docMk/>
-          <pc:sldMk cId="2927953506" sldId="437"/>
-        </pc:sldMkLst>
-      </pc:sldChg>
-      <pc:sldChg chg="modSp add mod">
-        <pc:chgData name="Matthieu De Mari" userId="dfb708c9-d8dc-439f-9a3b-c772bf4a311c" providerId="ADAL" clId="{CF6A5140-9227-409F-9187-B98CCD837415}" dt="2023-03-08T07:11:06.553" v="2478" actId="207"/>
-        <pc:sldMkLst>
-          <pc:docMk/>
-          <pc:sldMk cId="1648531005" sldId="438"/>
-        </pc:sldMkLst>
-      </pc:sldChg>
-      <pc:sldChg chg="modSp add mod">
-        <pc:chgData name="Matthieu De Mari" userId="dfb708c9-d8dc-439f-9a3b-c772bf4a311c" providerId="ADAL" clId="{CF6A5140-9227-409F-9187-B98CCD837415}" dt="2023-03-08T07:12:30.112" v="2535" actId="20577"/>
-        <pc:sldMkLst>
-          <pc:docMk/>
-          <pc:sldMk cId="2577277130" sldId="439"/>
-        </pc:sldMkLst>
-      </pc:sldChg>
-      <pc:sldChg chg="modSp add mod">
-        <pc:chgData name="Matthieu De Mari" userId="dfb708c9-d8dc-439f-9a3b-c772bf4a311c" providerId="ADAL" clId="{CF6A5140-9227-409F-9187-B98CCD837415}" dt="2023-03-08T07:17:23.864" v="2958" actId="20577"/>
-        <pc:sldMkLst>
-          <pc:docMk/>
-          <pc:sldMk cId="2191919470" sldId="440"/>
-        </pc:sldMkLst>
-      </pc:sldChg>
-      <pc:sldChg chg="modSp add mod">
-        <pc:chgData name="Matthieu De Mari" userId="dfb708c9-d8dc-439f-9a3b-c772bf4a311c" providerId="ADAL" clId="{CF6A5140-9227-409F-9187-B98CCD837415}" dt="2023-03-09T07:37:08.037" v="7042" actId="20577"/>
-        <pc:sldMkLst>
-          <pc:docMk/>
-          <pc:sldMk cId="2257941384" sldId="441"/>
-        </pc:sldMkLst>
-      </pc:sldChg>
-      <pc:sldChg chg="add del">
-        <pc:chgData name="Matthieu De Mari" userId="dfb708c9-d8dc-439f-9a3b-c772bf4a311c" providerId="ADAL" clId="{CF6A5140-9227-409F-9187-B98CCD837415}" dt="2023-03-09T07:37:39.854" v="7046" actId="47"/>
-        <pc:sldMkLst>
-          <pc:docMk/>
-          <pc:sldMk cId="1481206085" sldId="442"/>
-        </pc:sldMkLst>
-      </pc:sldChg>
-      <pc:sldChg chg="new del">
-        <pc:chgData name="Matthieu De Mari" userId="dfb708c9-d8dc-439f-9a3b-c772bf4a311c" providerId="ADAL" clId="{CF6A5140-9227-409F-9187-B98CCD837415}" dt="2023-03-08T10:12:58.043" v="3162" actId="47"/>
-        <pc:sldMkLst>
-          <pc:docMk/>
-          <pc:sldMk cId="2699636064" sldId="443"/>
-        </pc:sldMkLst>
-      </pc:sldChg>
-      <pc:sldChg chg="addSp modSp add mod">
-        <pc:chgData name="Matthieu De Mari" userId="dfb708c9-d8dc-439f-9a3b-c772bf4a311c" providerId="ADAL" clId="{CF6A5140-9227-409F-9187-B98CCD837415}" dt="2023-03-08T10:26:38.681" v="3947" actId="1076"/>
-        <pc:sldMkLst>
-          <pc:docMk/>
-          <pc:sldMk cId="3705292892" sldId="444"/>
-        </pc:sldMkLst>
-      </pc:sldChg>
-      <pc:sldChg chg="addSp delSp modSp add mod">
-        <pc:chgData name="Matthieu De Mari" userId="dfb708c9-d8dc-439f-9a3b-c772bf4a311c" providerId="ADAL" clId="{CF6A5140-9227-409F-9187-B98CCD837415}" dt="2023-03-08T10:28:53.636" v="4097" actId="1036"/>
-        <pc:sldMkLst>
-          <pc:docMk/>
-          <pc:sldMk cId="3585737502" sldId="445"/>
-        </pc:sldMkLst>
-      </pc:sldChg>
-      <pc:sldChg chg="new del">
-        <pc:chgData name="Matthieu De Mari" userId="dfb708c9-d8dc-439f-9a3b-c772bf4a311c" providerId="ADAL" clId="{CF6A5140-9227-409F-9187-B98CCD837415}" dt="2023-03-08T10:38:28.282" v="4951" actId="47"/>
-        <pc:sldMkLst>
-          <pc:docMk/>
-          <pc:sldMk cId="2236602308" sldId="446"/>
-        </pc:sldMkLst>
-      </pc:sldChg>
-      <pc:sldChg chg="new del">
-        <pc:chgData name="Matthieu De Mari" userId="dfb708c9-d8dc-439f-9a3b-c772bf4a311c" providerId="ADAL" clId="{CF6A5140-9227-409F-9187-B98CCD837415}" dt="2023-03-08T10:30:25.245" v="4107" actId="47"/>
-        <pc:sldMkLst>
-          <pc:docMk/>
-          <pc:sldMk cId="4140690872" sldId="447"/>
-        </pc:sldMkLst>
-      </pc:sldChg>
-      <pc:sldChg chg="modSp add mod">
-        <pc:chgData name="Matthieu De Mari" userId="dfb708c9-d8dc-439f-9a3b-c772bf4a311c" providerId="ADAL" clId="{CF6A5140-9227-409F-9187-B98CCD837415}" dt="2023-03-08T10:31:27.605" v="4223" actId="20577"/>
-        <pc:sldMkLst>
-          <pc:docMk/>
-          <pc:sldMk cId="1738845767" sldId="448"/>
-        </pc:sldMkLst>
-      </pc:sldChg>
-      <pc:sldChg chg="addSp delSp modSp add mod">
-        <pc:chgData name="Matthieu De Mari" userId="dfb708c9-d8dc-439f-9a3b-c772bf4a311c" providerId="ADAL" clId="{CF6A5140-9227-409F-9187-B98CCD837415}" dt="2023-03-08T10:33:37.218" v="4438" actId="207"/>
-        <pc:sldMkLst>
-          <pc:docMk/>
-          <pc:sldMk cId="3149159304" sldId="449"/>
-        </pc:sldMkLst>
-      </pc:sldChg>
-      <pc:sldChg chg="modSp add mod">
-        <pc:chgData name="Matthieu De Mari" userId="dfb708c9-d8dc-439f-9a3b-c772bf4a311c" providerId="ADAL" clId="{CF6A5140-9227-409F-9187-B98CCD837415}" dt="2023-03-08T10:36:08.637" v="4631" actId="20577"/>
-        <pc:sldMkLst>
-          <pc:docMk/>
-          <pc:sldMk cId="2020760118" sldId="450"/>
-        </pc:sldMkLst>
-      </pc:sldChg>
-      <pc:sldChg chg="modSp add mod ord">
-        <pc:chgData name="Matthieu De Mari" userId="dfb708c9-d8dc-439f-9a3b-c772bf4a311c" providerId="ADAL" clId="{CF6A5140-9227-409F-9187-B98CCD837415}" dt="2023-03-09T07:15:07.649" v="5433" actId="20577"/>
-        <pc:sldMkLst>
-          <pc:docMk/>
-          <pc:sldMk cId="1242261096" sldId="451"/>
-        </pc:sldMkLst>
-      </pc:sldChg>
-      <pc:sldChg chg="add del">
-        <pc:chgData name="Matthieu De Mari" userId="dfb708c9-d8dc-439f-9a3b-c772bf4a311c" providerId="ADAL" clId="{CF6A5140-9227-409F-9187-B98CCD837415}" dt="2023-03-08T10:38:34.488" v="4952" actId="2696"/>
-        <pc:sldMkLst>
-          <pc:docMk/>
-          <pc:sldMk cId="2550081157" sldId="452"/>
-        </pc:sldMkLst>
-      </pc:sldChg>
-      <pc:sldChg chg="new del">
-        <pc:chgData name="Matthieu De Mari" userId="dfb708c9-d8dc-439f-9a3b-c772bf4a311c" providerId="ADAL" clId="{CF6A5140-9227-409F-9187-B98CCD837415}" dt="2023-03-08T10:40:23.119" v="5298" actId="47"/>
-        <pc:sldMkLst>
-          <pc:docMk/>
-          <pc:sldMk cId="3361891129" sldId="452"/>
-        </pc:sldMkLst>
-      </pc:sldChg>
-      <pc:sldChg chg="modSp add mod">
-        <pc:chgData name="Matthieu De Mari" userId="dfb708c9-d8dc-439f-9a3b-c772bf4a311c" providerId="ADAL" clId="{CF6A5140-9227-409F-9187-B98CCD837415}" dt="2023-03-09T07:15:16.543" v="5435"/>
-        <pc:sldMkLst>
-          <pc:docMk/>
-          <pc:sldMk cId="3102642038" sldId="453"/>
-        </pc:sldMkLst>
-      </pc:sldChg>
-      <pc:sldChg chg="add del">
-        <pc:chgData name="Matthieu De Mari" userId="dfb708c9-d8dc-439f-9a3b-c772bf4a311c" providerId="ADAL" clId="{CF6A5140-9227-409F-9187-B98CCD837415}" dt="2023-03-08T10:38:34.488" v="4952" actId="2696"/>
-        <pc:sldMkLst>
-          <pc:docMk/>
-          <pc:sldMk cId="3145888360" sldId="453"/>
-        </pc:sldMkLst>
-      </pc:sldChg>
-      <pc:sldChg chg="modSp add mod">
-        <pc:chgData name="Matthieu De Mari" userId="dfb708c9-d8dc-439f-9a3b-c772bf4a311c" providerId="ADAL" clId="{CF6A5140-9227-409F-9187-B98CCD837415}" dt="2023-03-09T07:15:11.396" v="5434"/>
-        <pc:sldMkLst>
-          <pc:docMk/>
-          <pc:sldMk cId="4072425385" sldId="454"/>
-        </pc:sldMkLst>
-      </pc:sldChg>
-      <pc:sldChg chg="modSp add mod">
-        <pc:chgData name="Matthieu De Mari" userId="dfb708c9-d8dc-439f-9a3b-c772bf4a311c" providerId="ADAL" clId="{CF6A5140-9227-409F-9187-B98CCD837415}" dt="2023-03-09T07:08:43.528" v="5311" actId="20577"/>
-        <pc:sldMkLst>
-          <pc:docMk/>
-          <pc:sldMk cId="1628282840" sldId="455"/>
-        </pc:sldMkLst>
-      </pc:sldChg>
-      <pc:sldChg chg="modSp add mod">
-        <pc:chgData name="Matthieu De Mari" userId="dfb708c9-d8dc-439f-9a3b-c772bf4a311c" providerId="ADAL" clId="{CF6A5140-9227-409F-9187-B98CCD837415}" dt="2023-03-09T07:46:56.471" v="8164" actId="20577"/>
-        <pc:sldMkLst>
-          <pc:docMk/>
-          <pc:sldMk cId="1474802136" sldId="456"/>
-        </pc:sldMkLst>
-      </pc:sldChg>
-      <pc:sldChg chg="modSp new del mod">
-        <pc:chgData name="Matthieu De Mari" userId="dfb708c9-d8dc-439f-9a3b-c772bf4a311c" providerId="ADAL" clId="{CF6A5140-9227-409F-9187-B98CCD837415}" dt="2023-03-09T07:10:26.032" v="5340" actId="47"/>
-        <pc:sldMkLst>
-          <pc:docMk/>
-          <pc:sldMk cId="1747564226" sldId="456"/>
-        </pc:sldMkLst>
-      </pc:sldChg>
-      <pc:sldChg chg="modSp add mod">
-        <pc:chgData name="Matthieu De Mari" userId="dfb708c9-d8dc-439f-9a3b-c772bf4a311c" providerId="ADAL" clId="{CF6A5140-9227-409F-9187-B98CCD837415}" dt="2023-03-09T07:30:09.207" v="6594" actId="113"/>
-        <pc:sldMkLst>
-          <pc:docMk/>
-          <pc:sldMk cId="3858745428" sldId="457"/>
-        </pc:sldMkLst>
-      </pc:sldChg>
-      <pc:sldChg chg="add del">
-        <pc:chgData name="Matthieu De Mari" userId="dfb708c9-d8dc-439f-9a3b-c772bf4a311c" providerId="ADAL" clId="{CF6A5140-9227-409F-9187-B98CCD837415}" dt="2023-03-09T07:28:59.004" v="6288" actId="47"/>
-        <pc:sldMkLst>
-          <pc:docMk/>
-          <pc:sldMk cId="3308586578" sldId="458"/>
-        </pc:sldMkLst>
-      </pc:sldChg>
-      <pc:sldChg chg="modSp add mod">
-        <pc:chgData name="Matthieu De Mari" userId="dfb708c9-d8dc-439f-9a3b-c772bf4a311c" providerId="ADAL" clId="{CF6A5140-9227-409F-9187-B98CCD837415}" dt="2023-03-09T07:34:47.515" v="6856" actId="20577"/>
-        <pc:sldMkLst>
-          <pc:docMk/>
-          <pc:sldMk cId="3624547080" sldId="459"/>
-        </pc:sldMkLst>
-      </pc:sldChg>
-      <pc:sldChg chg="modSp add mod">
-        <pc:chgData name="Matthieu De Mari" userId="dfb708c9-d8dc-439f-9a3b-c772bf4a311c" providerId="ADAL" clId="{CF6A5140-9227-409F-9187-B98CCD837415}" dt="2023-03-09T07:38:31.942" v="7116" actId="114"/>
-        <pc:sldMkLst>
-          <pc:docMk/>
-          <pc:sldMk cId="727967492" sldId="460"/>
-        </pc:sldMkLst>
-      </pc:sldChg>
-      <pc:sldChg chg="modSp add mod">
-        <pc:chgData name="Matthieu De Mari" userId="dfb708c9-d8dc-439f-9a3b-c772bf4a311c" providerId="ADAL" clId="{CF6A5140-9227-409F-9187-B98CCD837415}" dt="2023-03-09T07:46:59.325" v="8166" actId="20577"/>
-        <pc:sldMkLst>
-          <pc:docMk/>
-          <pc:sldMk cId="813445278" sldId="461"/>
-        </pc:sldMkLst>
-      </pc:sldChg>
-      <pc:sldChg chg="addSp delSp modSp add mod">
-        <pc:chgData name="Matthieu De Mari" userId="dfb708c9-d8dc-439f-9a3b-c772bf4a311c" providerId="ADAL" clId="{CF6A5140-9227-409F-9187-B98CCD837415}" dt="2023-03-09T07:42:40.760" v="7446" actId="1582"/>
-        <pc:sldMkLst>
-          <pc:docMk/>
-          <pc:sldMk cId="2989704858" sldId="462"/>
-        </pc:sldMkLst>
-      </pc:sldChg>
-      <pc:sldChg chg="modSp add mod">
-        <pc:chgData name="Matthieu De Mari" userId="dfb708c9-d8dc-439f-9a3b-c772bf4a311c" providerId="ADAL" clId="{CF6A5140-9227-409F-9187-B98CCD837415}" dt="2023-03-09T07:45:07.795" v="7919" actId="20577"/>
-        <pc:sldMkLst>
-          <pc:docMk/>
-          <pc:sldMk cId="3007767847" sldId="463"/>
-        </pc:sldMkLst>
-      </pc:sldChg>
-      <pc:sldChg chg="modSp add mod">
-        <pc:chgData name="Matthieu De Mari" userId="dfb708c9-d8dc-439f-9a3b-c772bf4a311c" providerId="ADAL" clId="{CF6A5140-9227-409F-9187-B98CCD837415}" dt="2023-03-09T07:46:43.776" v="8159" actId="20577"/>
-        <pc:sldMkLst>
-          <pc:docMk/>
-          <pc:sldMk cId="47889816" sldId="464"/>
-        </pc:sldMkLst>
-      </pc:sldChg>
-      <pc:sldChg chg="addSp delSp modSp new mod">
-        <pc:chgData name="Matthieu De Mari" userId="dfb708c9-d8dc-439f-9a3b-c772bf4a311c" providerId="ADAL" clId="{CF6A5140-9227-409F-9187-B98CCD837415}" dt="2023-03-09T07:51:15.835" v="8554" actId="5793"/>
-        <pc:sldMkLst>
-          <pc:docMk/>
-          <pc:sldMk cId="4050530474" sldId="465"/>
-        </pc:sldMkLst>
-      </pc:sldChg>
-      <pc:sldChg chg="addSp delSp modSp add mod modClrScheme chgLayout">
-        <pc:chgData name="Matthieu De Mari" userId="dfb708c9-d8dc-439f-9a3b-c772bf4a311c" providerId="ADAL" clId="{CF6A5140-9227-409F-9187-B98CCD837415}" dt="2023-03-09T07:53:36" v="8647" actId="20577"/>
-        <pc:sldMkLst>
-          <pc:docMk/>
-          <pc:sldMk cId="4107990403" sldId="466"/>
-        </pc:sldMkLst>
-      </pc:sldChg>
-      <pc:sldChg chg="modSp add mod">
-        <pc:chgData name="Matthieu De Mari" userId="dfb708c9-d8dc-439f-9a3b-c772bf4a311c" providerId="ADAL" clId="{CF6A5140-9227-409F-9187-B98CCD837415}" dt="2023-03-09T07:54:53.992" v="8766" actId="20577"/>
-        <pc:sldMkLst>
-          <pc:docMk/>
-          <pc:sldMk cId="4111616225" sldId="467"/>
-        </pc:sldMkLst>
-      </pc:sldChg>
-      <pc:sldChg chg="modSp add mod">
-        <pc:chgData name="Matthieu De Mari" userId="dfb708c9-d8dc-439f-9a3b-c772bf4a311c" providerId="ADAL" clId="{CF6A5140-9227-409F-9187-B98CCD837415}" dt="2023-03-09T07:50:34.790" v="8460" actId="12"/>
-        <pc:sldMkLst>
-          <pc:docMk/>
-          <pc:sldMk cId="1345006296" sldId="468"/>
-        </pc:sldMkLst>
-      </pc:sldChg>
-      <pc:sldChg chg="modSp add mod">
-        <pc:chgData name="Matthieu De Mari" userId="dfb708c9-d8dc-439f-9a3b-c772bf4a311c" providerId="ADAL" clId="{CF6A5140-9227-409F-9187-B98CCD837415}" dt="2023-03-09T08:09:33.176" v="10403" actId="20577"/>
-        <pc:sldMkLst>
-          <pc:docMk/>
-          <pc:sldMk cId="1003937956" sldId="469"/>
-        </pc:sldMkLst>
-      </pc:sldChg>
-      <pc:sldChg chg="modSp add mod">
-        <pc:chgData name="Matthieu De Mari" userId="dfb708c9-d8dc-439f-9a3b-c772bf4a311c" providerId="ADAL" clId="{CF6A5140-9227-409F-9187-B98CCD837415}" dt="2023-03-09T07:59:32.806" v="9051" actId="20577"/>
-        <pc:sldMkLst>
-          <pc:docMk/>
-          <pc:sldMk cId="1494991067" sldId="470"/>
-        </pc:sldMkLst>
-      </pc:sldChg>
-      <pc:sldChg chg="delSp modSp add mod modClrScheme chgLayout">
-        <pc:chgData name="Matthieu De Mari" userId="dfb708c9-d8dc-439f-9a3b-c772bf4a311c" providerId="ADAL" clId="{CF6A5140-9227-409F-9187-B98CCD837415}" dt="2023-03-09T08:07:31.497" v="10354" actId="20577"/>
-        <pc:sldMkLst>
-          <pc:docMk/>
-          <pc:sldMk cId="3221576718" sldId="471"/>
-        </pc:sldMkLst>
-      </pc:sldChg>
-      <pc:sldChg chg="modSp add mod">
-        <pc:chgData name="Matthieu De Mari" userId="dfb708c9-d8dc-439f-9a3b-c772bf4a311c" providerId="ADAL" clId="{CF6A5140-9227-409F-9187-B98CCD837415}" dt="2023-03-09T08:45:37.083" v="10704" actId="20577"/>
-        <pc:sldMkLst>
-          <pc:docMk/>
-          <pc:sldMk cId="2469439250" sldId="472"/>
-        </pc:sldMkLst>
-      </pc:sldChg>
-      <pc:sldChg chg="modSp add del mod">
-        <pc:chgData name="Matthieu De Mari" userId="dfb708c9-d8dc-439f-9a3b-c772bf4a311c" providerId="ADAL" clId="{CF6A5140-9227-409F-9187-B98CCD837415}" dt="2023-03-09T08:07:37.150" v="10355" actId="47"/>
-        <pc:sldMkLst>
-          <pc:docMk/>
-          <pc:sldMk cId="2634163908" sldId="472"/>
-        </pc:sldMkLst>
-      </pc:sldChg>
-    </pc:docChg>
-  </pc:docChgLst>
-  <pc:docChgLst>
-    <pc:chgData name="Matthieu De Mari" userId="dfb708c9-d8dc-439f-9a3b-c772bf4a311c" providerId="ADAL" clId="{5AF9E225-0E3D-4808-B523-40F6E9A1D59D}"/>
-    <pc:docChg chg="undo custSel mod addSld delSld modSld sldOrd modMainMaster addSection modSection">
-      <pc:chgData name="Matthieu De Mari" userId="dfb708c9-d8dc-439f-9a3b-c772bf4a311c" providerId="ADAL" clId="{5AF9E225-0E3D-4808-B523-40F6E9A1D59D}" dt="2023-03-02T09:21:50.474" v="4687" actId="17846"/>
-      <pc:docMkLst>
-        <pc:docMk/>
-      </pc:docMkLst>
-      <pc:sldChg chg="modSp add del mod">
-        <pc:chgData name="Matthieu De Mari" userId="dfb708c9-d8dc-439f-9a3b-c772bf4a311c" providerId="ADAL" clId="{5AF9E225-0E3D-4808-B523-40F6E9A1D59D}" dt="2023-03-02T09:21:44.969" v="4686" actId="47"/>
-        <pc:sldMkLst>
-          <pc:docMk/>
-          <pc:sldMk cId="901767542" sldId="256"/>
-        </pc:sldMkLst>
-      </pc:sldChg>
-      <pc:sldChg chg="addSp delSp modSp add mod chgLayout">
-        <pc:chgData name="Matthieu De Mari" userId="dfb708c9-d8dc-439f-9a3b-c772bf4a311c" providerId="ADAL" clId="{5AF9E225-0E3D-4808-B523-40F6E9A1D59D}" dt="2023-03-02T07:05:19.188" v="526" actId="20577"/>
-        <pc:sldMkLst>
-          <pc:docMk/>
-          <pc:sldMk cId="3239548726" sldId="257"/>
-        </pc:sldMkLst>
-      </pc:sldChg>
-      <pc:sldChg chg="modSp add mod">
-        <pc:chgData name="Matthieu De Mari" userId="dfb708c9-d8dc-439f-9a3b-c772bf4a311c" providerId="ADAL" clId="{5AF9E225-0E3D-4808-B523-40F6E9A1D59D}" dt="2023-03-02T07:01:55.363" v="524" actId="20577"/>
-        <pc:sldMkLst>
-          <pc:docMk/>
-          <pc:sldMk cId="1495819743" sldId="258"/>
-        </pc:sldMkLst>
-      </pc:sldChg>
-      <pc:sldChg chg="addSp modSp add mod modClrScheme chgLayout">
-        <pc:chgData name="Matthieu De Mari" userId="dfb708c9-d8dc-439f-9a3b-c772bf4a311c" providerId="ADAL" clId="{5AF9E225-0E3D-4808-B523-40F6E9A1D59D}" dt="2023-03-02T07:07:22.195" v="628" actId="20577"/>
-        <pc:sldMkLst>
-          <pc:docMk/>
-          <pc:sldMk cId="609186567" sldId="259"/>
-        </pc:sldMkLst>
-      </pc:sldChg>
-      <pc:sldChg chg="modSp add mod">
-        <pc:chgData name="Matthieu De Mari" userId="dfb708c9-d8dc-439f-9a3b-c772bf4a311c" providerId="ADAL" clId="{5AF9E225-0E3D-4808-B523-40F6E9A1D59D}" dt="2023-03-02T07:05:58.205" v="582" actId="20577"/>
-        <pc:sldMkLst>
-          <pc:docMk/>
-          <pc:sldMk cId="1812694891" sldId="260"/>
-        </pc:sldMkLst>
-      </pc:sldChg>
-      <pc:sldChg chg="modSp add mod">
-        <pc:chgData name="Matthieu De Mari" userId="dfb708c9-d8dc-439f-9a3b-c772bf4a311c" providerId="ADAL" clId="{5AF9E225-0E3D-4808-B523-40F6E9A1D59D}" dt="2023-03-02T07:08:41.284" v="667" actId="20577"/>
-        <pc:sldMkLst>
-          <pc:docMk/>
-          <pc:sldMk cId="2172647381" sldId="261"/>
-        </pc:sldMkLst>
-      </pc:sldChg>
-      <pc:sldChg chg="modSp add mod">
-        <pc:chgData name="Matthieu De Mari" userId="dfb708c9-d8dc-439f-9a3b-c772bf4a311c" providerId="ADAL" clId="{5AF9E225-0E3D-4808-B523-40F6E9A1D59D}" dt="2023-03-02T07:09:13.009" v="690" actId="20577"/>
-        <pc:sldMkLst>
-          <pc:docMk/>
-          <pc:sldMk cId="3166947328" sldId="262"/>
-        </pc:sldMkLst>
-      </pc:sldChg>
-      <pc:sldChg chg="modSp add mod">
-        <pc:chgData name="Matthieu De Mari" userId="dfb708c9-d8dc-439f-9a3b-c772bf4a311c" providerId="ADAL" clId="{5AF9E225-0E3D-4808-B523-40F6E9A1D59D}" dt="2023-03-02T07:09:44.442" v="694" actId="20577"/>
-        <pc:sldMkLst>
-          <pc:docMk/>
-          <pc:sldMk cId="2723458640" sldId="263"/>
-        </pc:sldMkLst>
-      </pc:sldChg>
-      <pc:sldChg chg="add">
-        <pc:chgData name="Matthieu De Mari" userId="dfb708c9-d8dc-439f-9a3b-c772bf4a311c" providerId="ADAL" clId="{5AF9E225-0E3D-4808-B523-40F6E9A1D59D}" dt="2023-03-02T06:54:29.623" v="2"/>
-        <pc:sldMkLst>
-          <pc:docMk/>
-          <pc:sldMk cId="649892368" sldId="264"/>
-        </pc:sldMkLst>
-      </pc:sldChg>
-      <pc:sldChg chg="add">
-        <pc:chgData name="Matthieu De Mari" userId="dfb708c9-d8dc-439f-9a3b-c772bf4a311c" providerId="ADAL" clId="{5AF9E225-0E3D-4808-B523-40F6E9A1D59D}" dt="2023-03-02T06:54:29.623" v="2"/>
-        <pc:sldMkLst>
-          <pc:docMk/>
-          <pc:sldMk cId="4127898596" sldId="265"/>
-        </pc:sldMkLst>
-      </pc:sldChg>
-      <pc:sldChg chg="addSp delSp modSp add mod modClrScheme chgLayout">
-        <pc:chgData name="Matthieu De Mari" userId="dfb708c9-d8dc-439f-9a3b-c772bf4a311c" providerId="ADAL" clId="{5AF9E225-0E3D-4808-B523-40F6E9A1D59D}" dt="2023-03-02T08:47:11.979" v="3217" actId="20577"/>
-        <pc:sldMkLst>
-          <pc:docMk/>
-          <pc:sldMk cId="256269341" sldId="266"/>
-        </pc:sldMkLst>
-      </pc:sldChg>
-      <pc:sldChg chg="modSp add mod">
-        <pc:chgData name="Matthieu De Mari" userId="dfb708c9-d8dc-439f-9a3b-c772bf4a311c" providerId="ADAL" clId="{5AF9E225-0E3D-4808-B523-40F6E9A1D59D}" dt="2023-03-02T07:01:21.208" v="484" actId="115"/>
-        <pc:sldMkLst>
-          <pc:docMk/>
-          <pc:sldMk cId="2566504203" sldId="267"/>
-        </pc:sldMkLst>
-      </pc:sldChg>
-      <pc:sldChg chg="addSp delSp modSp add mod chgLayout">
-        <pc:chgData name="Matthieu De Mari" userId="dfb708c9-d8dc-439f-9a3b-c772bf4a311c" providerId="ADAL" clId="{5AF9E225-0E3D-4808-B523-40F6E9A1D59D}" dt="2023-03-02T07:00:12.794" v="471" actId="115"/>
-        <pc:sldMkLst>
-          <pc:docMk/>
-          <pc:sldMk cId="1205920737" sldId="268"/>
-        </pc:sldMkLst>
-      </pc:sldChg>
-      <pc:sldChg chg="delSp modSp add mod modClrScheme chgLayout">
-        <pc:chgData name="Matthieu De Mari" userId="dfb708c9-d8dc-439f-9a3b-c772bf4a311c" providerId="ADAL" clId="{5AF9E225-0E3D-4808-B523-40F6E9A1D59D}" dt="2023-03-02T07:13:38.493" v="793" actId="114"/>
-        <pc:sldMkLst>
-          <pc:docMk/>
-          <pc:sldMk cId="4188287311" sldId="269"/>
-        </pc:sldMkLst>
-      </pc:sldChg>
-      <pc:sldChg chg="modSp add mod">
-        <pc:chgData name="Matthieu De Mari" userId="dfb708c9-d8dc-439f-9a3b-c772bf4a311c" providerId="ADAL" clId="{5AF9E225-0E3D-4808-B523-40F6E9A1D59D}" dt="2023-03-02T07:25:33.827" v="1288" actId="1076"/>
-        <pc:sldMkLst>
-          <pc:docMk/>
-          <pc:sldMk cId="997896339" sldId="270"/>
-        </pc:sldMkLst>
-      </pc:sldChg>
-      <pc:sldChg chg="modSp add mod">
-        <pc:chgData name="Matthieu De Mari" userId="dfb708c9-d8dc-439f-9a3b-c772bf4a311c" providerId="ADAL" clId="{5AF9E225-0E3D-4808-B523-40F6E9A1D59D}" dt="2023-03-02T07:23:39.008" v="1244" actId="113"/>
-        <pc:sldMkLst>
-          <pc:docMk/>
-          <pc:sldMk cId="961845771" sldId="271"/>
-        </pc:sldMkLst>
-      </pc:sldChg>
-      <pc:sldChg chg="addSp delSp modSp new mod ord modClrScheme chgLayout">
-        <pc:chgData name="Matthieu De Mari" userId="dfb708c9-d8dc-439f-9a3b-c772bf4a311c" providerId="ADAL" clId="{5AF9E225-0E3D-4808-B523-40F6E9A1D59D}" dt="2023-03-02T07:31:21.011" v="1491" actId="20577"/>
-        <pc:sldMkLst>
-          <pc:docMk/>
-          <pc:sldMk cId="1628130454" sldId="272"/>
-        </pc:sldMkLst>
-      </pc:sldChg>
-      <pc:sldChg chg="addSp delSp modSp add mod modClrScheme chgLayout">
-        <pc:chgData name="Matthieu De Mari" userId="dfb708c9-d8dc-439f-9a3b-c772bf4a311c" providerId="ADAL" clId="{5AF9E225-0E3D-4808-B523-40F6E9A1D59D}" dt="2023-03-02T07:30:59.874" v="1470" actId="1076"/>
-        <pc:sldMkLst>
-          <pc:docMk/>
-          <pc:sldMk cId="3014069118" sldId="273"/>
-        </pc:sldMkLst>
-      </pc:sldChg>
-      <pc:sldChg chg="addSp delSp modSp new mod modClrScheme chgLayout">
-        <pc:chgData name="Matthieu De Mari" userId="dfb708c9-d8dc-439f-9a3b-c772bf4a311c" providerId="ADAL" clId="{5AF9E225-0E3D-4808-B523-40F6E9A1D59D}" dt="2023-03-02T09:06:53.193" v="4236" actId="20577"/>
-        <pc:sldMkLst>
-          <pc:docMk/>
-          <pc:sldMk cId="1813455260" sldId="274"/>
-        </pc:sldMkLst>
-      </pc:sldChg>
-      <pc:sldChg chg="addSp modSp add mod modClrScheme chgLayout">
-        <pc:chgData name="Matthieu De Mari" userId="dfb708c9-d8dc-439f-9a3b-c772bf4a311c" providerId="ADAL" clId="{5AF9E225-0E3D-4808-B523-40F6E9A1D59D}" dt="2023-03-02T08:43:42.183" v="3020" actId="13822"/>
-        <pc:sldMkLst>
-          <pc:docMk/>
-          <pc:sldMk cId="144954399" sldId="275"/>
-        </pc:sldMkLst>
-      </pc:sldChg>
-      <pc:sldChg chg="modSp add mod modClrScheme chgLayout">
-        <pc:chgData name="Matthieu De Mari" userId="dfb708c9-d8dc-439f-9a3b-c772bf4a311c" providerId="ADAL" clId="{5AF9E225-0E3D-4808-B523-40F6E9A1D59D}" dt="2023-03-02T08:31:32.489" v="2596" actId="20577"/>
-        <pc:sldMkLst>
-          <pc:docMk/>
-          <pc:sldMk cId="4217769597" sldId="276"/>
-        </pc:sldMkLst>
-      </pc:sldChg>
-      <pc:sldChg chg="modSp add mod modClrScheme chgLayout">
-        <pc:chgData name="Matthieu De Mari" userId="dfb708c9-d8dc-439f-9a3b-c772bf4a311c" providerId="ADAL" clId="{5AF9E225-0E3D-4808-B523-40F6E9A1D59D}" dt="2023-03-02T09:05:04.931" v="4179" actId="207"/>
-        <pc:sldMkLst>
-          <pc:docMk/>
-          <pc:sldMk cId="1233188664" sldId="277"/>
-        </pc:sldMkLst>
-      </pc:sldChg>
-      <pc:sldChg chg="addSp modSp add mod chgLayout">
-        <pc:chgData name="Matthieu De Mari" userId="dfb708c9-d8dc-439f-9a3b-c772bf4a311c" providerId="ADAL" clId="{5AF9E225-0E3D-4808-B523-40F6E9A1D59D}" dt="2023-03-02T07:40:29.138" v="1964" actId="20577"/>
-        <pc:sldMkLst>
-          <pc:docMk/>
-          <pc:sldMk cId="885607022" sldId="278"/>
-        </pc:sldMkLst>
-      </pc:sldChg>
-      <pc:sldChg chg="modSp add mod">
-        <pc:chgData name="Matthieu De Mari" userId="dfb708c9-d8dc-439f-9a3b-c772bf4a311c" providerId="ADAL" clId="{5AF9E225-0E3D-4808-B523-40F6E9A1D59D}" dt="2023-03-02T07:41:39.244" v="2020" actId="27636"/>
-        <pc:sldMkLst>
-          <pc:docMk/>
-          <pc:sldMk cId="3941141626" sldId="279"/>
-        </pc:sldMkLst>
-      </pc:sldChg>
-      <pc:sldChg chg="modSp add mod">
-        <pc:chgData name="Matthieu De Mari" userId="dfb708c9-d8dc-439f-9a3b-c772bf4a311c" providerId="ADAL" clId="{5AF9E225-0E3D-4808-B523-40F6E9A1D59D}" dt="2023-03-02T07:42:09.869" v="2043" actId="14100"/>
-        <pc:sldMkLst>
-          <pc:docMk/>
-          <pc:sldMk cId="2409304258" sldId="280"/>
-        </pc:sldMkLst>
-      </pc:sldChg>
-      <pc:sldChg chg="modSp add mod">
-        <pc:chgData name="Matthieu De Mari" userId="dfb708c9-d8dc-439f-9a3b-c772bf4a311c" providerId="ADAL" clId="{5AF9E225-0E3D-4808-B523-40F6E9A1D59D}" dt="2023-03-02T07:43:05.203" v="2098" actId="27636"/>
-        <pc:sldMkLst>
-          <pc:docMk/>
-          <pc:sldMk cId="2949375831" sldId="281"/>
-        </pc:sldMkLst>
-      </pc:sldChg>
-      <pc:sldChg chg="addSp delSp modSp add mod modClrScheme chgLayout">
-        <pc:chgData name="Matthieu De Mari" userId="dfb708c9-d8dc-439f-9a3b-c772bf4a311c" providerId="ADAL" clId="{5AF9E225-0E3D-4808-B523-40F6E9A1D59D}" dt="2023-03-02T08:43:47.428" v="3024"/>
-        <pc:sldMkLst>
-          <pc:docMk/>
-          <pc:sldMk cId="2432782764" sldId="282"/>
-        </pc:sldMkLst>
-      </pc:sldChg>
-      <pc:sldChg chg="modSp add del mod modClrScheme chgLayout">
-        <pc:chgData name="Matthieu De Mari" userId="dfb708c9-d8dc-439f-9a3b-c772bf4a311c" providerId="ADAL" clId="{5AF9E225-0E3D-4808-B523-40F6E9A1D59D}" dt="2023-03-02T07:50:30.713" v="2314" actId="47"/>
-        <pc:sldMkLst>
-          <pc:docMk/>
-          <pc:sldMk cId="3346743662" sldId="283"/>
-        </pc:sldMkLst>
-      </pc:sldChg>
-      <pc:sldChg chg="modSp add mod">
-        <pc:chgData name="Matthieu De Mari" userId="dfb708c9-d8dc-439f-9a3b-c772bf4a311c" providerId="ADAL" clId="{5AF9E225-0E3D-4808-B523-40F6E9A1D59D}" dt="2023-03-02T08:49:01.268" v="3268" actId="20577"/>
-        <pc:sldMkLst>
-          <pc:docMk/>
-          <pc:sldMk cId="3869391851" sldId="284"/>
-        </pc:sldMkLst>
-      </pc:sldChg>
-      <pc:sldChg chg="modSp add mod ord">
-        <pc:chgData name="Matthieu De Mari" userId="dfb708c9-d8dc-439f-9a3b-c772bf4a311c" providerId="ADAL" clId="{5AF9E225-0E3D-4808-B523-40F6E9A1D59D}" dt="2023-03-02T08:47:17.468" v="3221" actId="20577"/>
-        <pc:sldMkLst>
-          <pc:docMk/>
-          <pc:sldMk cId="1567445271" sldId="285"/>
-        </pc:sldMkLst>
-      </pc:sldChg>
-      <pc:sldChg chg="new del">
-        <pc:chgData name="Matthieu De Mari" userId="dfb708c9-d8dc-439f-9a3b-c772bf4a311c" providerId="ADAL" clId="{5AF9E225-0E3D-4808-B523-40F6E9A1D59D}" dt="2023-03-02T09:20:57.277" v="4650" actId="47"/>
-        <pc:sldMkLst>
-          <pc:docMk/>
-          <pc:sldMk cId="1786940851" sldId="286"/>
-        </pc:sldMkLst>
-      </pc:sldChg>
-      <pc:sldChg chg="addSp delSp modSp add del mod">
-        <pc:chgData name="Matthieu De Mari" userId="dfb708c9-d8dc-439f-9a3b-c772bf4a311c" providerId="ADAL" clId="{5AF9E225-0E3D-4808-B523-40F6E9A1D59D}" dt="2023-03-02T07:52:04.495" v="2352" actId="47"/>
-        <pc:sldMkLst>
-          <pc:docMk/>
-          <pc:sldMk cId="2521085326" sldId="286"/>
-        </pc:sldMkLst>
-      </pc:sldChg>
-      <pc:sldChg chg="add">
-        <pc:chgData name="Matthieu De Mari" userId="dfb708c9-d8dc-439f-9a3b-c772bf4a311c" providerId="ADAL" clId="{5AF9E225-0E3D-4808-B523-40F6E9A1D59D}" dt="2023-03-02T08:31:29.223" v="2595" actId="2890"/>
-        <pc:sldMkLst>
-          <pc:docMk/>
-          <pc:sldMk cId="2870852187" sldId="287"/>
-        </pc:sldMkLst>
-      </pc:sldChg>
-      <pc:sldChg chg="addSp delSp modSp new mod modClrScheme chgLayout">
-        <pc:chgData name="Matthieu De Mari" userId="dfb708c9-d8dc-439f-9a3b-c772bf4a311c" providerId="ADAL" clId="{5AF9E225-0E3D-4808-B523-40F6E9A1D59D}" dt="2023-03-02T08:35:16.091" v="2758" actId="20577"/>
-        <pc:sldMkLst>
-          <pc:docMk/>
-          <pc:sldMk cId="3486387661" sldId="288"/>
-        </pc:sldMkLst>
-      </pc:sldChg>
-      <pc:sldChg chg="addSp delSp modSp add mod">
-        <pc:chgData name="Matthieu De Mari" userId="dfb708c9-d8dc-439f-9a3b-c772bf4a311c" providerId="ADAL" clId="{5AF9E225-0E3D-4808-B523-40F6E9A1D59D}" dt="2023-03-02T08:38:16.072" v="2894" actId="113"/>
-        <pc:sldMkLst>
-          <pc:docMk/>
-          <pc:sldMk cId="2118681498" sldId="289"/>
-        </pc:sldMkLst>
-      </pc:sldChg>
-      <pc:sldChg chg="addSp delSp modSp new mod modClrScheme chgLayout">
-        <pc:chgData name="Matthieu De Mari" userId="dfb708c9-d8dc-439f-9a3b-c772bf4a311c" providerId="ADAL" clId="{5AF9E225-0E3D-4808-B523-40F6E9A1D59D}" dt="2023-03-02T08:44:18.884" v="3062" actId="1036"/>
-        <pc:sldMkLst>
-          <pc:docMk/>
-          <pc:sldMk cId="2562857934" sldId="290"/>
-        </pc:sldMkLst>
-      </pc:sldChg>
-      <pc:sldChg chg="delSp modSp add mod">
-        <pc:chgData name="Matthieu De Mari" userId="dfb708c9-d8dc-439f-9a3b-c772bf4a311c" providerId="ADAL" clId="{5AF9E225-0E3D-4808-B523-40F6E9A1D59D}" dt="2023-03-02T08:47:27.886" v="3225" actId="20577"/>
-        <pc:sldMkLst>
-          <pc:docMk/>
-          <pc:sldMk cId="3292482358" sldId="291"/>
-        </pc:sldMkLst>
-      </pc:sldChg>
-      <pc:sldChg chg="addSp delSp modSp add mod">
-        <pc:chgData name="Matthieu De Mari" userId="dfb708c9-d8dc-439f-9a3b-c772bf4a311c" providerId="ADAL" clId="{5AF9E225-0E3D-4808-B523-40F6E9A1D59D}" dt="2023-03-02T08:44:21.897" v="3064"/>
-        <pc:sldMkLst>
-          <pc:docMk/>
-          <pc:sldMk cId="3520355124" sldId="292"/>
-        </pc:sldMkLst>
-      </pc:sldChg>
-      <pc:sldChg chg="modSp new mod">
-        <pc:chgData name="Matthieu De Mari" userId="dfb708c9-d8dc-439f-9a3b-c772bf4a311c" providerId="ADAL" clId="{5AF9E225-0E3D-4808-B523-40F6E9A1D59D}" dt="2023-03-02T08:47:53.024" v="3226" actId="114"/>
-        <pc:sldMkLst>
-          <pc:docMk/>
-          <pc:sldMk cId="3046349634" sldId="293"/>
-        </pc:sldMkLst>
-      </pc:sldChg>
-      <pc:sldChg chg="modSp add mod">
-        <pc:chgData name="Matthieu De Mari" userId="dfb708c9-d8dc-439f-9a3b-c772bf4a311c" providerId="ADAL" clId="{5AF9E225-0E3D-4808-B523-40F6E9A1D59D}" dt="2023-03-02T09:04:46.904" v="4174" actId="27636"/>
-        <pc:sldMkLst>
-          <pc:docMk/>
-          <pc:sldMk cId="427136966" sldId="294"/>
-        </pc:sldMkLst>
-      </pc:sldChg>
-      <pc:sldChg chg="addSp delSp modSp new mod modClrScheme chgLayout">
-        <pc:chgData name="Matthieu De Mari" userId="dfb708c9-d8dc-439f-9a3b-c772bf4a311c" providerId="ADAL" clId="{5AF9E225-0E3D-4808-B523-40F6E9A1D59D}" dt="2023-03-02T09:05:33.864" v="4216" actId="20577"/>
-        <pc:sldMkLst>
-          <pc:docMk/>
-          <pc:sldMk cId="323951598" sldId="295"/>
-        </pc:sldMkLst>
-      </pc:sldChg>
-      <pc:sldChg chg="addSp delSp modSp new mod modClrScheme chgLayout">
-        <pc:chgData name="Matthieu De Mari" userId="dfb708c9-d8dc-439f-9a3b-c772bf4a311c" providerId="ADAL" clId="{5AF9E225-0E3D-4808-B523-40F6E9A1D59D}" dt="2023-03-02T09:06:28.328" v="4228" actId="20577"/>
-        <pc:sldMkLst>
-          <pc:docMk/>
-          <pc:sldMk cId="1855779909" sldId="296"/>
-        </pc:sldMkLst>
-      </pc:sldChg>
-      <pc:sldChg chg="modSp add mod">
-        <pc:chgData name="Matthieu De Mari" userId="dfb708c9-d8dc-439f-9a3b-c772bf4a311c" providerId="ADAL" clId="{5AF9E225-0E3D-4808-B523-40F6E9A1D59D}" dt="2023-03-02T08:56:04.515" v="3607" actId="20577"/>
-        <pc:sldMkLst>
-          <pc:docMk/>
-          <pc:sldMk cId="1514077654" sldId="297"/>
-        </pc:sldMkLst>
-      </pc:sldChg>
-      <pc:sldChg chg="modSp new mod">
-        <pc:chgData name="Matthieu De Mari" userId="dfb708c9-d8dc-439f-9a3b-c772bf4a311c" providerId="ADAL" clId="{5AF9E225-0E3D-4808-B523-40F6E9A1D59D}" dt="2023-03-02T08:56:36.889" v="3652" actId="14100"/>
-        <pc:sldMkLst>
-          <pc:docMk/>
-          <pc:sldMk cId="2514894683" sldId="298"/>
-        </pc:sldMkLst>
-      </pc:sldChg>
-      <pc:sldChg chg="addSp delSp modSp new mod">
-        <pc:chgData name="Matthieu De Mari" userId="dfb708c9-d8dc-439f-9a3b-c772bf4a311c" providerId="ADAL" clId="{5AF9E225-0E3D-4808-B523-40F6E9A1D59D}" dt="2023-03-02T08:59:30.392" v="3889" actId="21"/>
-        <pc:sldMkLst>
-          <pc:docMk/>
-          <pc:sldMk cId="1452574487" sldId="299"/>
-        </pc:sldMkLst>
-      </pc:sldChg>
-      <pc:sldChg chg="addSp delSp modSp add mod modClrScheme chgLayout">
-        <pc:chgData name="Matthieu De Mari" userId="dfb708c9-d8dc-439f-9a3b-c772bf4a311c" providerId="ADAL" clId="{5AF9E225-0E3D-4808-B523-40F6E9A1D59D}" dt="2023-03-02T09:03:33.636" v="4087" actId="20577"/>
-        <pc:sldMkLst>
-          <pc:docMk/>
-          <pc:sldMk cId="1699114457" sldId="300"/>
-        </pc:sldMkLst>
-      </pc:sldChg>
-      <pc:sldChg chg="addSp delSp modSp add mod modClrScheme chgLayout">
-        <pc:chgData name="Matthieu De Mari" userId="dfb708c9-d8dc-439f-9a3b-c772bf4a311c" providerId="ADAL" clId="{5AF9E225-0E3D-4808-B523-40F6E9A1D59D}" dt="2023-03-02T09:03:43.897" v="4104" actId="20577"/>
-        <pc:sldMkLst>
-          <pc:docMk/>
-          <pc:sldMk cId="1276239023" sldId="301"/>
-        </pc:sldMkLst>
-      </pc:sldChg>
-      <pc:sldChg chg="addSp delSp modSp add mod modClrScheme chgLayout">
-        <pc:chgData name="Matthieu De Mari" userId="dfb708c9-d8dc-439f-9a3b-c772bf4a311c" providerId="ADAL" clId="{5AF9E225-0E3D-4808-B523-40F6E9A1D59D}" dt="2023-03-02T09:04:08.494" v="4134" actId="20577"/>
-        <pc:sldMkLst>
-          <pc:docMk/>
-          <pc:sldMk cId="3968924669" sldId="302"/>
-        </pc:sldMkLst>
-      </pc:sldChg>
-      <pc:sldChg chg="modSp new mod">
-        <pc:chgData name="Matthieu De Mari" userId="dfb708c9-d8dc-439f-9a3b-c772bf4a311c" providerId="ADAL" clId="{5AF9E225-0E3D-4808-B523-40F6E9A1D59D}" dt="2023-03-02T09:09:23.148" v="4269" actId="113"/>
-        <pc:sldMkLst>
-          <pc:docMk/>
-          <pc:sldMk cId="4232115997" sldId="303"/>
-        </pc:sldMkLst>
-      </pc:sldChg>
-      <pc:sldChg chg="modSp add mod">
-        <pc:chgData name="Matthieu De Mari" userId="dfb708c9-d8dc-439f-9a3b-c772bf4a311c" providerId="ADAL" clId="{5AF9E225-0E3D-4808-B523-40F6E9A1D59D}" dt="2023-03-02T09:06:47.611" v="4234" actId="20577"/>
-        <pc:sldMkLst>
-          <pc:docMk/>
-          <pc:sldMk cId="354883896" sldId="304"/>
-        </pc:sldMkLst>
-      </pc:sldChg>
-      <pc:sldChg chg="modSp add mod">
-        <pc:chgData name="Matthieu De Mari" userId="dfb708c9-d8dc-439f-9a3b-c772bf4a311c" providerId="ADAL" clId="{5AF9E225-0E3D-4808-B523-40F6E9A1D59D}" dt="2023-03-02T09:10:35.361" v="4304" actId="27636"/>
-        <pc:sldMkLst>
-          <pc:docMk/>
-          <pc:sldMk cId="4099824996" sldId="305"/>
-        </pc:sldMkLst>
-      </pc:sldChg>
-      <pc:sldChg chg="modSp add mod">
-        <pc:chgData name="Matthieu De Mari" userId="dfb708c9-d8dc-439f-9a3b-c772bf4a311c" providerId="ADAL" clId="{5AF9E225-0E3D-4808-B523-40F6E9A1D59D}" dt="2023-03-02T09:09:27.720" v="4270" actId="207"/>
-        <pc:sldMkLst>
-          <pc:docMk/>
-          <pc:sldMk cId="4051912021" sldId="306"/>
-        </pc:sldMkLst>
-      </pc:sldChg>
-      <pc:sldChg chg="modSp add mod">
-        <pc:chgData name="Matthieu De Mari" userId="dfb708c9-d8dc-439f-9a3b-c772bf4a311c" providerId="ADAL" clId="{5AF9E225-0E3D-4808-B523-40F6E9A1D59D}" dt="2023-03-02T09:11:43.126" v="4415" actId="20577"/>
-        <pc:sldMkLst>
-          <pc:docMk/>
-          <pc:sldMk cId="2900176786" sldId="307"/>
-        </pc:sldMkLst>
-      </pc:sldChg>
-      <pc:sldChg chg="modSp add mod">
-        <pc:chgData name="Matthieu De Mari" userId="dfb708c9-d8dc-439f-9a3b-c772bf4a311c" providerId="ADAL" clId="{5AF9E225-0E3D-4808-B523-40F6E9A1D59D}" dt="2023-03-02T09:10:43.209" v="4307" actId="207"/>
-        <pc:sldMkLst>
-          <pc:docMk/>
-          <pc:sldMk cId="1601297533" sldId="308"/>
-        </pc:sldMkLst>
-      </pc:sldChg>
-      <pc:sldChg chg="modSp add mod ord">
-        <pc:chgData name="Matthieu De Mari" userId="dfb708c9-d8dc-439f-9a3b-c772bf4a311c" providerId="ADAL" clId="{5AF9E225-0E3D-4808-B523-40F6E9A1D59D}" dt="2023-03-02T09:20:16.513" v="4645"/>
-        <pc:sldMkLst>
-          <pc:docMk/>
-          <pc:sldMk cId="3331075550" sldId="309"/>
-        </pc:sldMkLst>
-      </pc:sldChg>
-      <pc:sldChg chg="modSp add mod">
-        <pc:chgData name="Matthieu De Mari" userId="dfb708c9-d8dc-439f-9a3b-c772bf4a311c" providerId="ADAL" clId="{5AF9E225-0E3D-4808-B523-40F6E9A1D59D}" dt="2023-03-02T09:13:28.270" v="4475" actId="20577"/>
-        <pc:sldMkLst>
-          <pc:docMk/>
-          <pc:sldMk cId="4251184714" sldId="310"/>
-        </pc:sldMkLst>
-      </pc:sldChg>
-      <pc:sldChg chg="modSp add mod ord">
-        <pc:chgData name="Matthieu De Mari" userId="dfb708c9-d8dc-439f-9a3b-c772bf4a311c" providerId="ADAL" clId="{5AF9E225-0E3D-4808-B523-40F6E9A1D59D}" dt="2023-03-02T09:20:16.513" v="4645"/>
-        <pc:sldMkLst>
-          <pc:docMk/>
-          <pc:sldMk cId="3629183510" sldId="311"/>
-        </pc:sldMkLst>
-      </pc:sldChg>
-      <pc:sldChg chg="modSp add mod">
-        <pc:chgData name="Matthieu De Mari" userId="dfb708c9-d8dc-439f-9a3b-c772bf4a311c" providerId="ADAL" clId="{5AF9E225-0E3D-4808-B523-40F6E9A1D59D}" dt="2023-03-02T09:14:09.472" v="4486" actId="207"/>
-        <pc:sldMkLst>
-          <pc:docMk/>
-          <pc:sldMk cId="7996884" sldId="312"/>
-        </pc:sldMkLst>
-      </pc:sldChg>
-      <pc:sldChg chg="add">
-        <pc:chgData name="Matthieu De Mari" userId="dfb708c9-d8dc-439f-9a3b-c772bf4a311c" providerId="ADAL" clId="{5AF9E225-0E3D-4808-B523-40F6E9A1D59D}" dt="2023-03-02T09:14:04.028" v="4484" actId="2890"/>
-        <pc:sldMkLst>
-          <pc:docMk/>
-          <pc:sldMk cId="1140638742" sldId="313"/>
-        </pc:sldMkLst>
-      </pc:sldChg>
-      <pc:sldChg chg="modSp new mod">
-        <pc:chgData name="Matthieu De Mari" userId="dfb708c9-d8dc-439f-9a3b-c772bf4a311c" providerId="ADAL" clId="{5AF9E225-0E3D-4808-B523-40F6E9A1D59D}" dt="2023-03-02T09:19:43.572" v="4643" actId="20577"/>
-        <pc:sldMkLst>
-          <pc:docMk/>
-          <pc:sldMk cId="2858358615" sldId="314"/>
-        </pc:sldMkLst>
-      </pc:sldChg>
-      <pc:sldChg chg="modSp add mod ord">
-        <pc:chgData name="Matthieu De Mari" userId="dfb708c9-d8dc-439f-9a3b-c772bf4a311c" providerId="ADAL" clId="{5AF9E225-0E3D-4808-B523-40F6E9A1D59D}" dt="2023-03-02T09:21:38.413" v="4685" actId="20577"/>
-        <pc:sldMkLst>
-          <pc:docMk/>
-          <pc:sldMk cId="1040156172" sldId="377"/>
-        </pc:sldMkLst>
-      </pc:sldChg>
-      <pc:sldChg chg="add ord">
-        <pc:chgData name="Matthieu De Mari" userId="dfb708c9-d8dc-439f-9a3b-c772bf4a311c" providerId="ADAL" clId="{5AF9E225-0E3D-4808-B523-40F6E9A1D59D}" dt="2023-03-02T09:20:56.065" v="4649" actId="20578"/>
-        <pc:sldMkLst>
-          <pc:docMk/>
-          <pc:sldMk cId="3338565690" sldId="378"/>
-        </pc:sldMkLst>
-      </pc:sldChg>
-      <pc:sldMasterChg chg="addSp mod">
-        <pc:chgData name="Matthieu De Mari" userId="dfb708c9-d8dc-439f-9a3b-c772bf4a311c" providerId="ADAL" clId="{5AF9E225-0E3D-4808-B523-40F6E9A1D59D}" dt="2023-03-02T06:54:28.184" v="0" actId="33475"/>
-        <pc:sldMasterMkLst>
-          <pc:docMk/>
-          <pc:sldMasterMk cId="1162895350" sldId="2147483648"/>
-        </pc:sldMasterMkLst>
-      </pc:sldMasterChg>
-    </pc:docChg>
-  </pc:docChgLst>
-  <pc:docChgLst>
-    <pc:chgData name="Matthieu De Mari" userId="dfb708c9-d8dc-439f-9a3b-c772bf4a311c" providerId="ADAL" clId="{960F866D-2398-466A-BE2D-9F9F92E8A1F3}"/>
-    <pc:docChg chg="modSld">
-      <pc:chgData name="Matthieu De Mari" userId="dfb708c9-d8dc-439f-9a3b-c772bf4a311c" providerId="ADAL" clId="{960F866D-2398-466A-BE2D-9F9F92E8A1F3}" dt="2024-12-07T17:53:20.262" v="1" actId="20577"/>
-      <pc:docMkLst>
-        <pc:docMk/>
-      </pc:docMkLst>
-      <pc:sldChg chg="modSp mod">
-        <pc:chgData name="Matthieu De Mari" userId="dfb708c9-d8dc-439f-9a3b-c772bf4a311c" providerId="ADAL" clId="{960F866D-2398-466A-BE2D-9F9F92E8A1F3}" dt="2024-12-07T17:53:20.262" v="1" actId="20577"/>
-        <pc:sldMkLst>
-          <pc:docMk/>
-          <pc:sldMk cId="1040156172" sldId="377"/>
-        </pc:sldMkLst>
-        <pc:spChg chg="mod">
-          <ac:chgData name="Matthieu De Mari" userId="dfb708c9-d8dc-439f-9a3b-c772bf4a311c" providerId="ADAL" clId="{960F866D-2398-466A-BE2D-9F9F92E8A1F3}" dt="2024-12-07T17:53:20.262" v="1" actId="20577"/>
-          <ac:spMkLst>
-            <pc:docMk/>
-            <pc:sldMk cId="1040156172" sldId="377"/>
-            <ac:spMk id="2" creationId="{080CEB46-CC16-4D19-8C2C-AEE9471D8168}"/>
-          </ac:spMkLst>
-        </pc:spChg>
-      </pc:sldChg>
-    </pc:docChg>
-  </pc:docChgLst>
-  <pc:docChgLst>
-    <pc:chgData name="Matthieu De Mari" userId="dfb708c9-d8dc-439f-9a3b-c772bf4a311c" providerId="ADAL" clId="{351A8279-968F-4E90-B7B9-1213B04AD13F}"/>
-    <pc:docChg chg="undo custSel addSld delSld modSld sldOrd addSection modSection">
-      <pc:chgData name="Matthieu De Mari" userId="dfb708c9-d8dc-439f-9a3b-c772bf4a311c" providerId="ADAL" clId="{351A8279-968F-4E90-B7B9-1213B04AD13F}" dt="2024-03-14T06:20:15.478" v="4657" actId="20577"/>
-      <pc:docMkLst>
-        <pc:docMk/>
-      </pc:docMkLst>
-      <pc:sldChg chg="modSp mod">
-        <pc:chgData name="Matthieu De Mari" userId="dfb708c9-d8dc-439f-9a3b-c772bf4a311c" providerId="ADAL" clId="{351A8279-968F-4E90-B7B9-1213B04AD13F}" dt="2023-10-19T07:13:03.650" v="1" actId="20577"/>
-        <pc:sldMkLst>
-          <pc:docMk/>
-          <pc:sldMk cId="1040156172" sldId="377"/>
-        </pc:sldMkLst>
-      </pc:sldChg>
-      <pc:sldChg chg="modSp mod">
-        <pc:chgData name="Matthieu De Mari" userId="dfb708c9-d8dc-439f-9a3b-c772bf4a311c" providerId="ADAL" clId="{351A8279-968F-4E90-B7B9-1213B04AD13F}" dt="2024-02-13T04:28:43.999" v="294" actId="20577"/>
-        <pc:sldMkLst>
-          <pc:docMk/>
-          <pc:sldMk cId="3431685878" sldId="378"/>
-        </pc:sldMkLst>
-      </pc:sldChg>
-      <pc:sldChg chg="modSp mod">
-        <pc:chgData name="Matthieu De Mari" userId="dfb708c9-d8dc-439f-9a3b-c772bf4a311c" providerId="ADAL" clId="{351A8279-968F-4E90-B7B9-1213B04AD13F}" dt="2024-02-13T04:30:59.885" v="625" actId="20577"/>
-        <pc:sldMkLst>
-          <pc:docMk/>
-          <pc:sldMk cId="2656047251" sldId="379"/>
-        </pc:sldMkLst>
-      </pc:sldChg>
-      <pc:sldChg chg="modSp mod">
-        <pc:chgData name="Matthieu De Mari" userId="dfb708c9-d8dc-439f-9a3b-c772bf4a311c" providerId="ADAL" clId="{351A8279-968F-4E90-B7B9-1213B04AD13F}" dt="2024-03-14T06:02:55.848" v="3724" actId="20577"/>
-        <pc:sldMkLst>
-          <pc:docMk/>
-          <pc:sldMk cId="3478712926" sldId="380"/>
-        </pc:sldMkLst>
-      </pc:sldChg>
-      <pc:sldChg chg="modSp mod">
-        <pc:chgData name="Matthieu De Mari" userId="dfb708c9-d8dc-439f-9a3b-c772bf4a311c" providerId="ADAL" clId="{351A8279-968F-4E90-B7B9-1213B04AD13F}" dt="2024-03-14T06:06:45.337" v="3974" actId="20577"/>
-        <pc:sldMkLst>
-          <pc:docMk/>
-          <pc:sldMk cId="687323073" sldId="381"/>
-        </pc:sldMkLst>
-      </pc:sldChg>
-      <pc:sldChg chg="modSp mod">
-        <pc:chgData name="Matthieu De Mari" userId="dfb708c9-d8dc-439f-9a3b-c772bf4a311c" providerId="ADAL" clId="{351A8279-968F-4E90-B7B9-1213B04AD13F}" dt="2024-02-16T01:45:17.802" v="2432" actId="14100"/>
-        <pc:sldMkLst>
-          <pc:docMk/>
-          <pc:sldMk cId="3718139832" sldId="383"/>
-        </pc:sldMkLst>
-      </pc:sldChg>
-      <pc:sldChg chg="modSp mod">
-        <pc:chgData name="Matthieu De Mari" userId="dfb708c9-d8dc-439f-9a3b-c772bf4a311c" providerId="ADAL" clId="{351A8279-968F-4E90-B7B9-1213B04AD13F}" dt="2024-03-14T06:14:42.160" v="4438" actId="20577"/>
-        <pc:sldMkLst>
-          <pc:docMk/>
-          <pc:sldMk cId="3649959589" sldId="384"/>
-        </pc:sldMkLst>
-      </pc:sldChg>
-      <pc:sldChg chg="modSp mod">
-        <pc:chgData name="Matthieu De Mari" userId="dfb708c9-d8dc-439f-9a3b-c772bf4a311c" providerId="ADAL" clId="{351A8279-968F-4E90-B7B9-1213B04AD13F}" dt="2024-03-14T06:19:18.633" v="4642" actId="20577"/>
-        <pc:sldMkLst>
-          <pc:docMk/>
-          <pc:sldMk cId="3174082147" sldId="385"/>
-        </pc:sldMkLst>
-      </pc:sldChg>
-      <pc:sldChg chg="modSp mod">
-        <pc:chgData name="Matthieu De Mari" userId="dfb708c9-d8dc-439f-9a3b-c772bf4a311c" providerId="ADAL" clId="{351A8279-968F-4E90-B7B9-1213B04AD13F}" dt="2024-03-14T05:58:43.571" v="3447" actId="20577"/>
-        <pc:sldMkLst>
-          <pc:docMk/>
-          <pc:sldMk cId="4226169062" sldId="423"/>
-        </pc:sldMkLst>
-      </pc:sldChg>
-      <pc:sldChg chg="modSp mod">
-        <pc:chgData name="Matthieu De Mari" userId="dfb708c9-d8dc-439f-9a3b-c772bf4a311c" providerId="ADAL" clId="{351A8279-968F-4E90-B7B9-1213B04AD13F}" dt="2024-03-14T05:59:35.880" v="3497" actId="114"/>
-        <pc:sldMkLst>
-          <pc:docMk/>
-          <pc:sldMk cId="1794465962" sldId="424"/>
-        </pc:sldMkLst>
-      </pc:sldChg>
-      <pc:sldChg chg="modSp mod">
-        <pc:chgData name="Matthieu De Mari" userId="dfb708c9-d8dc-439f-9a3b-c772bf4a311c" providerId="ADAL" clId="{351A8279-968F-4E90-B7B9-1213B04AD13F}" dt="2024-02-13T04:32:25.098" v="707" actId="6549"/>
-        <pc:sldMkLst>
-          <pc:docMk/>
-          <pc:sldMk cId="730515734" sldId="426"/>
-        </pc:sldMkLst>
-      </pc:sldChg>
-      <pc:sldChg chg="ord">
-        <pc:chgData name="Matthieu De Mari" userId="dfb708c9-d8dc-439f-9a3b-c772bf4a311c" providerId="ADAL" clId="{351A8279-968F-4E90-B7B9-1213B04AD13F}" dt="2024-02-16T01:39:15.238" v="2142"/>
-        <pc:sldMkLst>
-          <pc:docMk/>
-          <pc:sldMk cId="1865957258" sldId="427"/>
-        </pc:sldMkLst>
-      </pc:sldChg>
-      <pc:sldChg chg="modSp mod">
-        <pc:chgData name="Matthieu De Mari" userId="dfb708c9-d8dc-439f-9a3b-c772bf4a311c" providerId="ADAL" clId="{351A8279-968F-4E90-B7B9-1213B04AD13F}" dt="2024-03-14T06:00:17.548" v="3509" actId="20577"/>
-        <pc:sldMkLst>
-          <pc:docMk/>
-          <pc:sldMk cId="1549216935" sldId="429"/>
-        </pc:sldMkLst>
-      </pc:sldChg>
-      <pc:sldChg chg="modSp mod">
-        <pc:chgData name="Matthieu De Mari" userId="dfb708c9-d8dc-439f-9a3b-c772bf4a311c" providerId="ADAL" clId="{351A8279-968F-4E90-B7B9-1213B04AD13F}" dt="2024-03-14T06:03:32.195" v="3737" actId="20577"/>
-        <pc:sldMkLst>
-          <pc:docMk/>
-          <pc:sldMk cId="2376719029" sldId="430"/>
-        </pc:sldMkLst>
-      </pc:sldChg>
-      <pc:sldChg chg="modSp mod">
-        <pc:chgData name="Matthieu De Mari" userId="dfb708c9-d8dc-439f-9a3b-c772bf4a311c" providerId="ADAL" clId="{351A8279-968F-4E90-B7B9-1213B04AD13F}" dt="2024-03-14T06:03:37.494" v="3738"/>
-        <pc:sldMkLst>
-          <pc:docMk/>
-          <pc:sldMk cId="133940590" sldId="431"/>
-        </pc:sldMkLst>
-      </pc:sldChg>
-      <pc:sldChg chg="modSp mod">
-        <pc:chgData name="Matthieu De Mari" userId="dfb708c9-d8dc-439f-9a3b-c772bf4a311c" providerId="ADAL" clId="{351A8279-968F-4E90-B7B9-1213B04AD13F}" dt="2024-03-14T06:03:54.532" v="3756" actId="20577"/>
-        <pc:sldMkLst>
-          <pc:docMk/>
-          <pc:sldMk cId="1769846722" sldId="433"/>
-        </pc:sldMkLst>
-      </pc:sldChg>
-      <pc:sldChg chg="addSp delSp modSp mod">
-        <pc:chgData name="Matthieu De Mari" userId="dfb708c9-d8dc-439f-9a3b-c772bf4a311c" providerId="ADAL" clId="{351A8279-968F-4E90-B7B9-1213B04AD13F}" dt="2024-03-14T06:04:21.643" v="3811" actId="20577"/>
-        <pc:sldMkLst>
-          <pc:docMk/>
-          <pc:sldMk cId="3094800006" sldId="434"/>
-        </pc:sldMkLst>
-      </pc:sldChg>
-      <pc:sldChg chg="modSp mod">
-        <pc:chgData name="Matthieu De Mari" userId="dfb708c9-d8dc-439f-9a3b-c772bf4a311c" providerId="ADAL" clId="{351A8279-968F-4E90-B7B9-1213B04AD13F}" dt="2024-02-13T04:36:57.543" v="946" actId="207"/>
-        <pc:sldMkLst>
-          <pc:docMk/>
-          <pc:sldMk cId="861916422" sldId="437"/>
-        </pc:sldMkLst>
-      </pc:sldChg>
-      <pc:sldChg chg="modSp mod">
-        <pc:chgData name="Matthieu De Mari" userId="dfb708c9-d8dc-439f-9a3b-c772bf4a311c" providerId="ADAL" clId="{351A8279-968F-4E90-B7B9-1213B04AD13F}" dt="2024-02-13T09:09:53.506" v="1600" actId="20577"/>
-        <pc:sldMkLst>
-          <pc:docMk/>
-          <pc:sldMk cId="2955466283" sldId="440"/>
-        </pc:sldMkLst>
-      </pc:sldChg>
-      <pc:sldChg chg="modSp mod">
-        <pc:chgData name="Matthieu De Mari" userId="dfb708c9-d8dc-439f-9a3b-c772bf4a311c" providerId="ADAL" clId="{351A8279-968F-4E90-B7B9-1213B04AD13F}" dt="2024-03-14T06:15:27.156" v="4457" actId="20577"/>
-        <pc:sldMkLst>
-          <pc:docMk/>
-          <pc:sldMk cId="1448790682" sldId="441"/>
-        </pc:sldMkLst>
-      </pc:sldChg>
-      <pc:sldChg chg="addSp delSp modSp del mod">
-        <pc:chgData name="Matthieu De Mari" userId="dfb708c9-d8dc-439f-9a3b-c772bf4a311c" providerId="ADAL" clId="{351A8279-968F-4E90-B7B9-1213B04AD13F}" dt="2024-02-16T01:50:50.249" v="2800" actId="47"/>
-        <pc:sldMkLst>
-          <pc:docMk/>
-          <pc:sldMk cId="75594367" sldId="442"/>
-        </pc:sldMkLst>
-      </pc:sldChg>
-      <pc:sldChg chg="modSp mod">
-        <pc:chgData name="Matthieu De Mari" userId="dfb708c9-d8dc-439f-9a3b-c772bf4a311c" providerId="ADAL" clId="{351A8279-968F-4E90-B7B9-1213B04AD13F}" dt="2024-03-14T06:15:35.669" v="4463" actId="20577"/>
-        <pc:sldMkLst>
-          <pc:docMk/>
-          <pc:sldMk cId="110232736" sldId="443"/>
-        </pc:sldMkLst>
-      </pc:sldChg>
-      <pc:sldChg chg="modSp mod">
-        <pc:chgData name="Matthieu De Mari" userId="dfb708c9-d8dc-439f-9a3b-c772bf4a311c" providerId="ADAL" clId="{351A8279-968F-4E90-B7B9-1213B04AD13F}" dt="2024-03-14T06:16:12.440" v="4509" actId="20577"/>
-        <pc:sldMkLst>
-          <pc:docMk/>
-          <pc:sldMk cId="4016554108" sldId="448"/>
-        </pc:sldMkLst>
-      </pc:sldChg>
-      <pc:sldChg chg="modSp mod">
-        <pc:chgData name="Matthieu De Mari" userId="dfb708c9-d8dc-439f-9a3b-c772bf4a311c" providerId="ADAL" clId="{351A8279-968F-4E90-B7B9-1213B04AD13F}" dt="2024-02-16T01:54:38.028" v="3125" actId="20577"/>
-        <pc:sldMkLst>
-          <pc:docMk/>
-          <pc:sldMk cId="512281156" sldId="449"/>
-        </pc:sldMkLst>
-      </pc:sldChg>
-      <pc:sldChg chg="modSp mod">
-        <pc:chgData name="Matthieu De Mari" userId="dfb708c9-d8dc-439f-9a3b-c772bf4a311c" providerId="ADAL" clId="{351A8279-968F-4E90-B7B9-1213B04AD13F}" dt="2023-10-19T07:19:33.963" v="243" actId="207"/>
-        <pc:sldMkLst>
-          <pc:docMk/>
-          <pc:sldMk cId="3938870733" sldId="450"/>
-        </pc:sldMkLst>
-      </pc:sldChg>
-      <pc:sldChg chg="modSp mod">
-        <pc:chgData name="Matthieu De Mari" userId="dfb708c9-d8dc-439f-9a3b-c772bf4a311c" providerId="ADAL" clId="{351A8279-968F-4E90-B7B9-1213B04AD13F}" dt="2023-10-19T07:19:26.363" v="239" actId="113"/>
-        <pc:sldMkLst>
-          <pc:docMk/>
-          <pc:sldMk cId="3522887232" sldId="451"/>
-        </pc:sldMkLst>
-      </pc:sldChg>
-      <pc:sldChg chg="modSp mod">
-        <pc:chgData name="Matthieu De Mari" userId="dfb708c9-d8dc-439f-9a3b-c772bf4a311c" providerId="ADAL" clId="{351A8279-968F-4E90-B7B9-1213B04AD13F}" dt="2024-02-13T04:33:20.334" v="731" actId="20577"/>
-        <pc:sldMkLst>
-          <pc:docMk/>
-          <pc:sldMk cId="216138188" sldId="452"/>
-        </pc:sldMkLst>
-      </pc:sldChg>
-      <pc:sldChg chg="modSp mod">
-        <pc:chgData name="Matthieu De Mari" userId="dfb708c9-d8dc-439f-9a3b-c772bf4a311c" providerId="ADAL" clId="{351A8279-968F-4E90-B7B9-1213B04AD13F}" dt="2024-02-13T04:38:35.785" v="962" actId="20577"/>
-        <pc:sldMkLst>
-          <pc:docMk/>
-          <pc:sldMk cId="3824911825" sldId="453"/>
-        </pc:sldMkLst>
-      </pc:sldChg>
-      <pc:sldChg chg="addSp delSp modSp mod">
-        <pc:chgData name="Matthieu De Mari" userId="dfb708c9-d8dc-439f-9a3b-c772bf4a311c" providerId="ADAL" clId="{351A8279-968F-4E90-B7B9-1213B04AD13F}" dt="2024-02-16T01:29:38.550" v="1734" actId="20577"/>
-        <pc:sldMkLst>
-          <pc:docMk/>
-          <pc:sldMk cId="55300730" sldId="454"/>
-        </pc:sldMkLst>
-      </pc:sldChg>
-      <pc:sldChg chg="addSp modSp del mod">
-        <pc:chgData name="Matthieu De Mari" userId="dfb708c9-d8dc-439f-9a3b-c772bf4a311c" providerId="ADAL" clId="{351A8279-968F-4E90-B7B9-1213B04AD13F}" dt="2024-02-16T01:28:14.373" v="1640" actId="47"/>
-        <pc:sldMkLst>
-          <pc:docMk/>
-          <pc:sldMk cId="2415983017" sldId="455"/>
-        </pc:sldMkLst>
-      </pc:sldChg>
-      <pc:sldChg chg="del">
-        <pc:chgData name="Matthieu De Mari" userId="dfb708c9-d8dc-439f-9a3b-c772bf4a311c" providerId="ADAL" clId="{351A8279-968F-4E90-B7B9-1213B04AD13F}" dt="2024-02-13T04:38:59.373" v="963" actId="47"/>
-        <pc:sldMkLst>
-          <pc:docMk/>
-          <pc:sldMk cId="227383218" sldId="456"/>
-        </pc:sldMkLst>
-      </pc:sldChg>
-      <pc:sldChg chg="modSp mod">
-        <pc:chgData name="Matthieu De Mari" userId="dfb708c9-d8dc-439f-9a3b-c772bf4a311c" providerId="ADAL" clId="{351A8279-968F-4E90-B7B9-1213B04AD13F}" dt="2024-02-16T01:59:34.499" v="3293" actId="20577"/>
-        <pc:sldMkLst>
-          <pc:docMk/>
-          <pc:sldMk cId="3521859159" sldId="457"/>
-        </pc:sldMkLst>
-      </pc:sldChg>
-      <pc:sldChg chg="modSp mod">
-        <pc:chgData name="Matthieu De Mari" userId="dfb708c9-d8dc-439f-9a3b-c772bf4a311c" providerId="ADAL" clId="{351A8279-968F-4E90-B7B9-1213B04AD13F}" dt="2024-02-16T02:00:24.702" v="3351" actId="207"/>
-        <pc:sldMkLst>
-          <pc:docMk/>
-          <pc:sldMk cId="1844132787" sldId="458"/>
-        </pc:sldMkLst>
-      </pc:sldChg>
-      <pc:sldChg chg="add del ord">
-        <pc:chgData name="Matthieu De Mari" userId="dfb708c9-d8dc-439f-9a3b-c772bf4a311c" providerId="ADAL" clId="{351A8279-968F-4E90-B7B9-1213B04AD13F}" dt="2024-02-16T01:53:55.938" v="3110"/>
-        <pc:sldMkLst>
-          <pc:docMk/>
-          <pc:sldMk cId="2491784038" sldId="460"/>
-        </pc:sldMkLst>
-      </pc:sldChg>
-      <pc:sldChg chg="modSp add del mod ord">
-        <pc:chgData name="Matthieu De Mari" userId="dfb708c9-d8dc-439f-9a3b-c772bf4a311c" providerId="ADAL" clId="{351A8279-968F-4E90-B7B9-1213B04AD13F}" dt="2024-03-14T06:12:55.677" v="4375" actId="20577"/>
-        <pc:sldMkLst>
-          <pc:docMk/>
-          <pc:sldMk cId="3130766884" sldId="463"/>
-        </pc:sldMkLst>
-      </pc:sldChg>
-      <pc:sldChg chg="ord">
-        <pc:chgData name="Matthieu De Mari" userId="dfb708c9-d8dc-439f-9a3b-c772bf4a311c" providerId="ADAL" clId="{351A8279-968F-4E90-B7B9-1213B04AD13F}" dt="2023-10-19T07:21:13.270" v="251"/>
-        <pc:sldMkLst>
-          <pc:docMk/>
-          <pc:sldMk cId="2960715248" sldId="464"/>
-        </pc:sldMkLst>
-      </pc:sldChg>
-      <pc:sldChg chg="modSp mod">
-        <pc:chgData name="Matthieu De Mari" userId="dfb708c9-d8dc-439f-9a3b-c772bf4a311c" providerId="ADAL" clId="{351A8279-968F-4E90-B7B9-1213B04AD13F}" dt="2024-03-14T06:16:53.877" v="4524" actId="20577"/>
-        <pc:sldMkLst>
-          <pc:docMk/>
-          <pc:sldMk cId="3142642375" sldId="465"/>
-        </pc:sldMkLst>
-      </pc:sldChg>
-      <pc:sldChg chg="modSp mod">
-        <pc:chgData name="Matthieu De Mari" userId="dfb708c9-d8dc-439f-9a3b-c772bf4a311c" providerId="ADAL" clId="{351A8279-968F-4E90-B7B9-1213B04AD13F}" dt="2024-03-14T06:16:58.422" v="4526"/>
-        <pc:sldMkLst>
-          <pc:docMk/>
-          <pc:sldMk cId="2429451842" sldId="466"/>
-        </pc:sldMkLst>
-      </pc:sldChg>
-      <pc:sldChg chg="modSp mod">
-        <pc:chgData name="Matthieu De Mari" userId="dfb708c9-d8dc-439f-9a3b-c772bf4a311c" providerId="ADAL" clId="{351A8279-968F-4E90-B7B9-1213B04AD13F}" dt="2024-02-13T04:51:21.665" v="1164" actId="114"/>
-        <pc:sldMkLst>
-          <pc:docMk/>
-          <pc:sldMk cId="1643155833" sldId="469"/>
-        </pc:sldMkLst>
-      </pc:sldChg>
-      <pc:sldChg chg="modSp mod">
-        <pc:chgData name="Matthieu De Mari" userId="dfb708c9-d8dc-439f-9a3b-c772bf4a311c" providerId="ADAL" clId="{351A8279-968F-4E90-B7B9-1213B04AD13F}" dt="2024-02-16T01:57:07.972" v="3191" actId="20577"/>
-        <pc:sldMkLst>
-          <pc:docMk/>
-          <pc:sldMk cId="4117624913" sldId="471"/>
-        </pc:sldMkLst>
-      </pc:sldChg>
-      <pc:sldChg chg="modSp mod">
-        <pc:chgData name="Matthieu De Mari" userId="dfb708c9-d8dc-439f-9a3b-c772bf4a311c" providerId="ADAL" clId="{351A8279-968F-4E90-B7B9-1213B04AD13F}" dt="2024-02-16T01:57:10.468" v="3192" actId="20577"/>
-        <pc:sldMkLst>
-          <pc:docMk/>
-          <pc:sldMk cId="4182897824" sldId="472"/>
-        </pc:sldMkLst>
-      </pc:sldChg>
-      <pc:sldChg chg="modSp add del mod ord">
-        <pc:chgData name="Matthieu De Mari" userId="dfb708c9-d8dc-439f-9a3b-c772bf4a311c" providerId="ADAL" clId="{351A8279-968F-4E90-B7B9-1213B04AD13F}" dt="2024-02-13T04:55:09.175" v="1210" actId="20577"/>
-        <pc:sldMkLst>
-          <pc:docMk/>
-          <pc:sldMk cId="2726241820" sldId="473"/>
-        </pc:sldMkLst>
-      </pc:sldChg>
-      <pc:sldChg chg="modSp del mod ord">
-        <pc:chgData name="Matthieu De Mari" userId="dfb708c9-d8dc-439f-9a3b-c772bf4a311c" providerId="ADAL" clId="{351A8279-968F-4E90-B7B9-1213B04AD13F}" dt="2024-02-16T02:05:45.154" v="3432" actId="47"/>
-        <pc:sldMkLst>
-          <pc:docMk/>
-          <pc:sldMk cId="2726235655" sldId="474"/>
-        </pc:sldMkLst>
-      </pc:sldChg>
-      <pc:sldChg chg="del ord">
-        <pc:chgData name="Matthieu De Mari" userId="dfb708c9-d8dc-439f-9a3b-c772bf4a311c" providerId="ADAL" clId="{351A8279-968F-4E90-B7B9-1213B04AD13F}" dt="2024-02-16T02:05:45.877" v="3433" actId="47"/>
-        <pc:sldMkLst>
-          <pc:docMk/>
-          <pc:sldMk cId="3838605298" sldId="475"/>
-        </pc:sldMkLst>
-      </pc:sldChg>
-      <pc:sldChg chg="addSp delSp modSp mod">
-        <pc:chgData name="Matthieu De Mari" userId="dfb708c9-d8dc-439f-9a3b-c772bf4a311c" providerId="ADAL" clId="{351A8279-968F-4E90-B7B9-1213B04AD13F}" dt="2024-03-14T06:19:43.798" v="4648"/>
-        <pc:sldMkLst>
-          <pc:docMk/>
-          <pc:sldMk cId="3422929534" sldId="477"/>
-        </pc:sldMkLst>
-      </pc:sldChg>
-      <pc:sldChg chg="modSp mod">
-        <pc:chgData name="Matthieu De Mari" userId="dfb708c9-d8dc-439f-9a3b-c772bf4a311c" providerId="ADAL" clId="{351A8279-968F-4E90-B7B9-1213B04AD13F}" dt="2024-02-16T01:56:27.391" v="3156" actId="114"/>
-        <pc:sldMkLst>
-          <pc:docMk/>
-          <pc:sldMk cId="3784750566" sldId="478"/>
-        </pc:sldMkLst>
-      </pc:sldChg>
-      <pc:sldChg chg="addSp delSp modSp new mod modClrScheme chgLayout">
-        <pc:chgData name="Matthieu De Mari" userId="dfb708c9-d8dc-439f-9a3b-c772bf4a311c" providerId="ADAL" clId="{351A8279-968F-4E90-B7B9-1213B04AD13F}" dt="2024-02-13T04:57:50.074" v="1319" actId="20577"/>
-        <pc:sldMkLst>
-          <pc:docMk/>
-          <pc:sldMk cId="3943074771" sldId="479"/>
-        </pc:sldMkLst>
-      </pc:sldChg>
-      <pc:sldChg chg="addSp delSp modSp new del mod">
-        <pc:chgData name="Matthieu De Mari" userId="dfb708c9-d8dc-439f-9a3b-c772bf4a311c" providerId="ADAL" clId="{351A8279-968F-4E90-B7B9-1213B04AD13F}" dt="2024-02-13T05:03:47.544" v="1541" actId="47"/>
-        <pc:sldMkLst>
-          <pc:docMk/>
-          <pc:sldMk cId="354929650" sldId="480"/>
-        </pc:sldMkLst>
-      </pc:sldChg>
-      <pc:sldChg chg="delSp modSp new mod">
-        <pc:chgData name="Matthieu De Mari" userId="dfb708c9-d8dc-439f-9a3b-c772bf4a311c" providerId="ADAL" clId="{351A8279-968F-4E90-B7B9-1213B04AD13F}" dt="2024-02-13T05:02:36.218" v="1492" actId="20577"/>
-        <pc:sldMkLst>
-          <pc:docMk/>
-          <pc:sldMk cId="2420944380" sldId="481"/>
-        </pc:sldMkLst>
-      </pc:sldChg>
-      <pc:sldChg chg="addSp modSp add mod">
-        <pc:chgData name="Matthieu De Mari" userId="dfb708c9-d8dc-439f-9a3b-c772bf4a311c" providerId="ADAL" clId="{351A8279-968F-4E90-B7B9-1213B04AD13F}" dt="2024-02-13T05:03:44.763" v="1540" actId="1036"/>
-        <pc:sldMkLst>
-          <pc:docMk/>
-          <pc:sldMk cId="3878320393" sldId="482"/>
-        </pc:sldMkLst>
-      </pc:sldChg>
-      <pc:sldChg chg="addSp delSp modSp new mod modClrScheme chgLayout">
-        <pc:chgData name="Matthieu De Mari" userId="dfb708c9-d8dc-439f-9a3b-c772bf4a311c" providerId="ADAL" clId="{351A8279-968F-4E90-B7B9-1213B04AD13F}" dt="2024-03-14T06:20:15.478" v="4657" actId="20577"/>
-        <pc:sldMkLst>
-          <pc:docMk/>
-          <pc:sldMk cId="1200781502" sldId="483"/>
-        </pc:sldMkLst>
-      </pc:sldChg>
-      <pc:sldChg chg="delSp modSp add mod">
-        <pc:chgData name="Matthieu De Mari" userId="dfb708c9-d8dc-439f-9a3b-c772bf4a311c" providerId="ADAL" clId="{351A8279-968F-4E90-B7B9-1213B04AD13F}" dt="2024-02-16T01:34:19.041" v="1968" actId="20577"/>
-        <pc:sldMkLst>
-          <pc:docMk/>
-          <pc:sldMk cId="2944563140" sldId="484"/>
-        </pc:sldMkLst>
-      </pc:sldChg>
-      <pc:sldChg chg="add del">
-        <pc:chgData name="Matthieu De Mari" userId="dfb708c9-d8dc-439f-9a3b-c772bf4a311c" providerId="ADAL" clId="{351A8279-968F-4E90-B7B9-1213B04AD13F}" dt="2024-02-16T01:29:50.014" v="1737" actId="47"/>
-        <pc:sldMkLst>
-          <pc:docMk/>
-          <pc:sldMk cId="3135329192" sldId="485"/>
-        </pc:sldMkLst>
-      </pc:sldChg>
-      <pc:sldChg chg="modSp add mod">
-        <pc:chgData name="Matthieu De Mari" userId="dfb708c9-d8dc-439f-9a3b-c772bf4a311c" providerId="ADAL" clId="{351A8279-968F-4E90-B7B9-1213B04AD13F}" dt="2024-02-16T01:33:48.467" v="1957" actId="20577"/>
-        <pc:sldMkLst>
-          <pc:docMk/>
-          <pc:sldMk cId="1918018800" sldId="486"/>
-        </pc:sldMkLst>
-      </pc:sldChg>
-      <pc:sldChg chg="modSp add mod">
-        <pc:chgData name="Matthieu De Mari" userId="dfb708c9-d8dc-439f-9a3b-c772bf4a311c" providerId="ADAL" clId="{351A8279-968F-4E90-B7B9-1213B04AD13F}" dt="2024-02-16T01:34:52.382" v="2028" actId="207"/>
-        <pc:sldMkLst>
-          <pc:docMk/>
-          <pc:sldMk cId="3779706552" sldId="487"/>
-        </pc:sldMkLst>
-      </pc:sldChg>
-      <pc:sldChg chg="addSp delSp modSp add mod">
-        <pc:chgData name="Matthieu De Mari" userId="dfb708c9-d8dc-439f-9a3b-c772bf4a311c" providerId="ADAL" clId="{351A8279-968F-4E90-B7B9-1213B04AD13F}" dt="2024-02-16T01:36:03.044" v="2074" actId="20577"/>
-        <pc:sldMkLst>
-          <pc:docMk/>
-          <pc:sldMk cId="2454243125" sldId="488"/>
-        </pc:sldMkLst>
-      </pc:sldChg>
-      <pc:sldChg chg="addSp delSp modSp new mod ord modClrScheme chgLayout">
-        <pc:chgData name="Matthieu De Mari" userId="dfb708c9-d8dc-439f-9a3b-c772bf4a311c" providerId="ADAL" clId="{351A8279-968F-4E90-B7B9-1213B04AD13F}" dt="2024-03-14T06:09:54.465" v="4244"/>
-        <pc:sldMkLst>
-          <pc:docMk/>
-          <pc:sldMk cId="1712013538" sldId="489"/>
-        </pc:sldMkLst>
-      </pc:sldChg>
-      <pc:sldChg chg="modSp add mod">
-        <pc:chgData name="Matthieu De Mari" userId="dfb708c9-d8dc-439f-9a3b-c772bf4a311c" providerId="ADAL" clId="{351A8279-968F-4E90-B7B9-1213B04AD13F}" dt="2024-03-14T06:10:04.089" v="4245"/>
+        <pc:chgData name="Matthieu De Mari" userId="dfb708c9-d8dc-439f-9a3b-c772bf4a311c" providerId="ADAL" clId="{81E9B007-0C2C-493E-9B93-55A62C9C1F12}" dt="2026-01-14T08:39:23.410" v="3" actId="115"/>
         <pc:sldMkLst>
           <pc:docMk/>
           <pc:sldMk cId="1267674129" sldId="490"/>
         </pc:sldMkLst>
+        <pc:spChg chg="mod">
+          <ac:chgData name="Matthieu De Mari" userId="dfb708c9-d8dc-439f-9a3b-c772bf4a311c" providerId="ADAL" clId="{81E9B007-0C2C-493E-9B93-55A62C9C1F12}" dt="2026-01-14T08:39:23.410" v="3" actId="115"/>
+          <ac:spMkLst>
+            <pc:docMk/>
+            <pc:sldMk cId="1267674129" sldId="490"/>
+            <ac:spMk id="5" creationId="{B0003562-B0F9-FC63-4F67-49F09BA7CBB2}"/>
+          </ac:spMkLst>
+        </pc:spChg>
       </pc:sldChg>
-      <pc:sldChg chg="modSp add mod">
-        <pc:chgData name="Matthieu De Mari" userId="dfb708c9-d8dc-439f-9a3b-c772bf4a311c" providerId="ADAL" clId="{351A8279-968F-4E90-B7B9-1213B04AD13F}" dt="2024-02-16T01:46:01.793" v="2562" actId="20577"/>
-        <pc:sldMkLst>
-          <pc:docMk/>
-          <pc:sldMk cId="1208774770" sldId="491"/>
-        </pc:sldMkLst>
-      </pc:sldChg>
-      <pc:sldChg chg="modSp add mod">
-        <pc:chgData name="Matthieu De Mari" userId="dfb708c9-d8dc-439f-9a3b-c772bf4a311c" providerId="ADAL" clId="{351A8279-968F-4E90-B7B9-1213B04AD13F}" dt="2024-03-14T06:09:44.388" v="4238" actId="20577"/>
-        <pc:sldMkLst>
-          <pc:docMk/>
-          <pc:sldMk cId="2770414478" sldId="492"/>
-        </pc:sldMkLst>
-      </pc:sldChg>
-      <pc:sldChg chg="add del">
-        <pc:chgData name="Matthieu De Mari" userId="dfb708c9-d8dc-439f-9a3b-c772bf4a311c" providerId="ADAL" clId="{351A8279-968F-4E90-B7B9-1213B04AD13F}" dt="2024-02-16T01:50:40.778" v="2797" actId="47"/>
-        <pc:sldMkLst>
-          <pc:docMk/>
-          <pc:sldMk cId="2921476038" sldId="493"/>
-        </pc:sldMkLst>
-      </pc:sldChg>
-      <pc:sldChg chg="modSp add mod ord">
-        <pc:chgData name="Matthieu De Mari" userId="dfb708c9-d8dc-439f-9a3b-c772bf4a311c" providerId="ADAL" clId="{351A8279-968F-4E90-B7B9-1213B04AD13F}" dt="2024-02-16T09:53:53.280" v="3439" actId="20577"/>
-        <pc:sldMkLst>
-          <pc:docMk/>
-          <pc:sldMk cId="3566213655" sldId="494"/>
-        </pc:sldMkLst>
-      </pc:sldChg>
-      <pc:sldChg chg="modSp add mod ord">
-        <pc:chgData name="Matthieu De Mari" userId="dfb708c9-d8dc-439f-9a3b-c772bf4a311c" providerId="ADAL" clId="{351A8279-968F-4E90-B7B9-1213B04AD13F}" dt="2024-02-16T01:53:07.413" v="3100" actId="113"/>
-        <pc:sldMkLst>
-          <pc:docMk/>
-          <pc:sldMk cId="2400112166" sldId="495"/>
-        </pc:sldMkLst>
-      </pc:sldChg>
-      <pc:sldChg chg="modSp add mod">
-        <pc:chgData name="Matthieu De Mari" userId="dfb708c9-d8dc-439f-9a3b-c772bf4a311c" providerId="ADAL" clId="{351A8279-968F-4E90-B7B9-1213B04AD13F}" dt="2024-02-16T01:51:27.601" v="2890" actId="20577"/>
-        <pc:sldMkLst>
-          <pc:docMk/>
-          <pc:sldMk cId="1350055442" sldId="496"/>
-        </pc:sldMkLst>
-      </pc:sldChg>
-      <pc:sldChg chg="addSp modSp add mod">
-        <pc:chgData name="Matthieu De Mari" userId="dfb708c9-d8dc-439f-9a3b-c772bf4a311c" providerId="ADAL" clId="{351A8279-968F-4E90-B7B9-1213B04AD13F}" dt="2024-02-16T02:03:12.593" v="3431" actId="113"/>
+      <pc:sldChg chg="modSp mod">
+        <pc:chgData name="Matthieu De Mari" userId="dfb708c9-d8dc-439f-9a3b-c772bf4a311c" providerId="ADAL" clId="{81E9B007-0C2C-493E-9B93-55A62C9C1F12}" dt="2026-01-14T08:40:31.644" v="7" actId="20577"/>
         <pc:sldMkLst>
           <pc:docMk/>
           <pc:sldMk cId="756526478" sldId="497"/>
         </pc:sldMkLst>
-      </pc:sldChg>
-      <pc:sldChg chg="add del">
-        <pc:chgData name="Matthieu De Mari" userId="dfb708c9-d8dc-439f-9a3b-c772bf4a311c" providerId="ADAL" clId="{351A8279-968F-4E90-B7B9-1213B04AD13F}" dt="2024-03-14T06:19:45.423" v="4649" actId="47"/>
-        <pc:sldMkLst>
-          <pc:docMk/>
-          <pc:sldMk cId="1843957824" sldId="498"/>
-        </pc:sldMkLst>
-      </pc:sldChg>
-    </pc:docChg>
-  </pc:docChgLst>
-  <pc:docChgLst>
-    <pc:chgData name="Matthieu De Mari" userId="dfb708c9-d8dc-439f-9a3b-c772bf4a311c" providerId="ADAL" clId="{2E25C175-47A3-4BC7-8EFD-372D97A42A64}"/>
-    <pc:docChg chg="undo custSel addSld delSld modSld sldOrd addSection delSection modSection">
-      <pc:chgData name="Matthieu De Mari" userId="dfb708c9-d8dc-439f-9a3b-c772bf4a311c" providerId="ADAL" clId="{2E25C175-47A3-4BC7-8EFD-372D97A42A64}" dt="2023-03-07T10:46:51.155" v="7359" actId="20577"/>
-      <pc:docMkLst>
-        <pc:docMk/>
-      </pc:docMkLst>
-      <pc:sldChg chg="del">
-        <pc:chgData name="Matthieu De Mari" userId="dfb708c9-d8dc-439f-9a3b-c772bf4a311c" providerId="ADAL" clId="{2E25C175-47A3-4BC7-8EFD-372D97A42A64}" dt="2023-03-07T06:12:37.449" v="3" actId="47"/>
-        <pc:sldMkLst>
-          <pc:docMk/>
-          <pc:sldMk cId="3239548726" sldId="257"/>
-        </pc:sldMkLst>
-      </pc:sldChg>
-      <pc:sldChg chg="del">
-        <pc:chgData name="Matthieu De Mari" userId="dfb708c9-d8dc-439f-9a3b-c772bf4a311c" providerId="ADAL" clId="{2E25C175-47A3-4BC7-8EFD-372D97A42A64}" dt="2023-03-07T06:13:07.499" v="6" actId="47"/>
-        <pc:sldMkLst>
-          <pc:docMk/>
-          <pc:sldMk cId="1495819743" sldId="258"/>
-        </pc:sldMkLst>
-      </pc:sldChg>
-      <pc:sldChg chg="del">
-        <pc:chgData name="Matthieu De Mari" userId="dfb708c9-d8dc-439f-9a3b-c772bf4a311c" providerId="ADAL" clId="{2E25C175-47A3-4BC7-8EFD-372D97A42A64}" dt="2023-03-07T06:12:37.449" v="3" actId="47"/>
-        <pc:sldMkLst>
-          <pc:docMk/>
-          <pc:sldMk cId="609186567" sldId="259"/>
-        </pc:sldMkLst>
-      </pc:sldChg>
-      <pc:sldChg chg="del">
-        <pc:chgData name="Matthieu De Mari" userId="dfb708c9-d8dc-439f-9a3b-c772bf4a311c" providerId="ADAL" clId="{2E25C175-47A3-4BC7-8EFD-372D97A42A64}" dt="2023-03-07T06:12:37.449" v="3" actId="47"/>
-        <pc:sldMkLst>
-          <pc:docMk/>
-          <pc:sldMk cId="1812694891" sldId="260"/>
-        </pc:sldMkLst>
-      </pc:sldChg>
-      <pc:sldChg chg="del">
-        <pc:chgData name="Matthieu De Mari" userId="dfb708c9-d8dc-439f-9a3b-c772bf4a311c" providerId="ADAL" clId="{2E25C175-47A3-4BC7-8EFD-372D97A42A64}" dt="2023-03-07T06:12:37.449" v="3" actId="47"/>
-        <pc:sldMkLst>
-          <pc:docMk/>
-          <pc:sldMk cId="2172647381" sldId="261"/>
-        </pc:sldMkLst>
-      </pc:sldChg>
-      <pc:sldChg chg="del">
-        <pc:chgData name="Matthieu De Mari" userId="dfb708c9-d8dc-439f-9a3b-c772bf4a311c" providerId="ADAL" clId="{2E25C175-47A3-4BC7-8EFD-372D97A42A64}" dt="2023-03-07T06:12:37.449" v="3" actId="47"/>
-        <pc:sldMkLst>
-          <pc:docMk/>
-          <pc:sldMk cId="3166947328" sldId="262"/>
-        </pc:sldMkLst>
-      </pc:sldChg>
-      <pc:sldChg chg="del">
-        <pc:chgData name="Matthieu De Mari" userId="dfb708c9-d8dc-439f-9a3b-c772bf4a311c" providerId="ADAL" clId="{2E25C175-47A3-4BC7-8EFD-372D97A42A64}" dt="2023-03-07T06:12:41.881" v="4" actId="47"/>
-        <pc:sldMkLst>
-          <pc:docMk/>
-          <pc:sldMk cId="2723458640" sldId="263"/>
-        </pc:sldMkLst>
-      </pc:sldChg>
-      <pc:sldChg chg="del">
-        <pc:chgData name="Matthieu De Mari" userId="dfb708c9-d8dc-439f-9a3b-c772bf4a311c" providerId="ADAL" clId="{2E25C175-47A3-4BC7-8EFD-372D97A42A64}" dt="2023-03-07T06:12:37.449" v="3" actId="47"/>
-        <pc:sldMkLst>
-          <pc:docMk/>
-          <pc:sldMk cId="649892368" sldId="264"/>
-        </pc:sldMkLst>
-      </pc:sldChg>
-      <pc:sldChg chg="del">
-        <pc:chgData name="Matthieu De Mari" userId="dfb708c9-d8dc-439f-9a3b-c772bf4a311c" providerId="ADAL" clId="{2E25C175-47A3-4BC7-8EFD-372D97A42A64}" dt="2023-03-07T06:12:41.881" v="4" actId="47"/>
-        <pc:sldMkLst>
-          <pc:docMk/>
-          <pc:sldMk cId="4127898596" sldId="265"/>
-        </pc:sldMkLst>
-      </pc:sldChg>
-      <pc:sldChg chg="del">
-        <pc:chgData name="Matthieu De Mari" userId="dfb708c9-d8dc-439f-9a3b-c772bf4a311c" providerId="ADAL" clId="{2E25C175-47A3-4BC7-8EFD-372D97A42A64}" dt="2023-03-07T06:12:41.881" v="4" actId="47"/>
-        <pc:sldMkLst>
-          <pc:docMk/>
-          <pc:sldMk cId="256269341" sldId="266"/>
-        </pc:sldMkLst>
-      </pc:sldChg>
-      <pc:sldChg chg="del">
-        <pc:chgData name="Matthieu De Mari" userId="dfb708c9-d8dc-439f-9a3b-c772bf4a311c" providerId="ADAL" clId="{2E25C175-47A3-4BC7-8EFD-372D97A42A64}" dt="2023-03-07T06:12:44.957" v="5" actId="47"/>
-        <pc:sldMkLst>
-          <pc:docMk/>
-          <pc:sldMk cId="2566504203" sldId="267"/>
-        </pc:sldMkLst>
-      </pc:sldChg>
-      <pc:sldChg chg="del">
-        <pc:chgData name="Matthieu De Mari" userId="dfb708c9-d8dc-439f-9a3b-c772bf4a311c" providerId="ADAL" clId="{2E25C175-47A3-4BC7-8EFD-372D97A42A64}" dt="2023-03-07T06:12:37.449" v="3" actId="47"/>
-        <pc:sldMkLst>
-          <pc:docMk/>
-          <pc:sldMk cId="1205920737" sldId="268"/>
-        </pc:sldMkLst>
-      </pc:sldChg>
-      <pc:sldChg chg="del">
-        <pc:chgData name="Matthieu De Mari" userId="dfb708c9-d8dc-439f-9a3b-c772bf4a311c" providerId="ADAL" clId="{2E25C175-47A3-4BC7-8EFD-372D97A42A64}" dt="2023-03-07T06:12:44.957" v="5" actId="47"/>
-        <pc:sldMkLst>
-          <pc:docMk/>
-          <pc:sldMk cId="4188287311" sldId="269"/>
-        </pc:sldMkLst>
-      </pc:sldChg>
-      <pc:sldChg chg="del">
-        <pc:chgData name="Matthieu De Mari" userId="dfb708c9-d8dc-439f-9a3b-c772bf4a311c" providerId="ADAL" clId="{2E25C175-47A3-4BC7-8EFD-372D97A42A64}" dt="2023-03-07T06:12:41.881" v="4" actId="47"/>
-        <pc:sldMkLst>
-          <pc:docMk/>
-          <pc:sldMk cId="997896339" sldId="270"/>
-        </pc:sldMkLst>
-      </pc:sldChg>
-      <pc:sldChg chg="del">
-        <pc:chgData name="Matthieu De Mari" userId="dfb708c9-d8dc-439f-9a3b-c772bf4a311c" providerId="ADAL" clId="{2E25C175-47A3-4BC7-8EFD-372D97A42A64}" dt="2023-03-07T06:12:41.881" v="4" actId="47"/>
-        <pc:sldMkLst>
-          <pc:docMk/>
-          <pc:sldMk cId="961845771" sldId="271"/>
-        </pc:sldMkLst>
-      </pc:sldChg>
-      <pc:sldChg chg="modSp add del mod ord">
-        <pc:chgData name="Matthieu De Mari" userId="dfb708c9-d8dc-439f-9a3b-c772bf4a311c" providerId="ADAL" clId="{2E25C175-47A3-4BC7-8EFD-372D97A42A64}" dt="2023-03-07T06:35:53.661" v="220"/>
-        <pc:sldMkLst>
-          <pc:docMk/>
-          <pc:sldMk cId="1813455260" sldId="274"/>
-        </pc:sldMkLst>
-      </pc:sldChg>
-      <pc:sldChg chg="del">
-        <pc:chgData name="Matthieu De Mari" userId="dfb708c9-d8dc-439f-9a3b-c772bf4a311c" providerId="ADAL" clId="{2E25C175-47A3-4BC7-8EFD-372D97A42A64}" dt="2023-03-07T06:13:16.183" v="8" actId="47"/>
-        <pc:sldMkLst>
-          <pc:docMk/>
-          <pc:sldMk cId="144954399" sldId="275"/>
-        </pc:sldMkLst>
-      </pc:sldChg>
-      <pc:sldChg chg="del">
-        <pc:chgData name="Matthieu De Mari" userId="dfb708c9-d8dc-439f-9a3b-c772bf4a311c" providerId="ADAL" clId="{2E25C175-47A3-4BC7-8EFD-372D97A42A64}" dt="2023-03-07T06:13:17.350" v="9" actId="47"/>
-        <pc:sldMkLst>
-          <pc:docMk/>
-          <pc:sldMk cId="4217769597" sldId="276"/>
-        </pc:sldMkLst>
-      </pc:sldChg>
-      <pc:sldChg chg="del">
-        <pc:chgData name="Matthieu De Mari" userId="dfb708c9-d8dc-439f-9a3b-c772bf4a311c" providerId="ADAL" clId="{2E25C175-47A3-4BC7-8EFD-372D97A42A64}" dt="2023-03-07T06:13:18.262" v="10" actId="47"/>
-        <pc:sldMkLst>
-          <pc:docMk/>
-          <pc:sldMk cId="1233188664" sldId="277"/>
-        </pc:sldMkLst>
-      </pc:sldChg>
-      <pc:sldChg chg="del">
-        <pc:chgData name="Matthieu De Mari" userId="dfb708c9-d8dc-439f-9a3b-c772bf4a311c" providerId="ADAL" clId="{2E25C175-47A3-4BC7-8EFD-372D97A42A64}" dt="2023-03-07T06:13:16.183" v="8" actId="47"/>
-        <pc:sldMkLst>
-          <pc:docMk/>
-          <pc:sldMk cId="885607022" sldId="278"/>
-        </pc:sldMkLst>
-      </pc:sldChg>
-      <pc:sldChg chg="del">
-        <pc:chgData name="Matthieu De Mari" userId="dfb708c9-d8dc-439f-9a3b-c772bf4a311c" providerId="ADAL" clId="{2E25C175-47A3-4BC7-8EFD-372D97A42A64}" dt="2023-03-07T06:13:16.183" v="8" actId="47"/>
-        <pc:sldMkLst>
-          <pc:docMk/>
-          <pc:sldMk cId="3941141626" sldId="279"/>
-        </pc:sldMkLst>
-      </pc:sldChg>
-      <pc:sldChg chg="del">
-        <pc:chgData name="Matthieu De Mari" userId="dfb708c9-d8dc-439f-9a3b-c772bf4a311c" providerId="ADAL" clId="{2E25C175-47A3-4BC7-8EFD-372D97A42A64}" dt="2023-03-07T06:13:16.183" v="8" actId="47"/>
-        <pc:sldMkLst>
-          <pc:docMk/>
-          <pc:sldMk cId="2409304258" sldId="280"/>
-        </pc:sldMkLst>
-      </pc:sldChg>
-      <pc:sldChg chg="del">
-        <pc:chgData name="Matthieu De Mari" userId="dfb708c9-d8dc-439f-9a3b-c772bf4a311c" providerId="ADAL" clId="{2E25C175-47A3-4BC7-8EFD-372D97A42A64}" dt="2023-03-07T06:13:16.183" v="8" actId="47"/>
-        <pc:sldMkLst>
-          <pc:docMk/>
-          <pc:sldMk cId="2949375831" sldId="281"/>
-        </pc:sldMkLst>
-      </pc:sldChg>
-      <pc:sldChg chg="del">
-        <pc:chgData name="Matthieu De Mari" userId="dfb708c9-d8dc-439f-9a3b-c772bf4a311c" providerId="ADAL" clId="{2E25C175-47A3-4BC7-8EFD-372D97A42A64}" dt="2023-03-07T06:13:16.183" v="8" actId="47"/>
-        <pc:sldMkLst>
-          <pc:docMk/>
-          <pc:sldMk cId="2432782764" sldId="282"/>
-        </pc:sldMkLst>
-      </pc:sldChg>
-      <pc:sldChg chg="del">
-        <pc:chgData name="Matthieu De Mari" userId="dfb708c9-d8dc-439f-9a3b-c772bf4a311c" providerId="ADAL" clId="{2E25C175-47A3-4BC7-8EFD-372D97A42A64}" dt="2023-03-07T06:13:16.183" v="8" actId="47"/>
-        <pc:sldMkLst>
-          <pc:docMk/>
-          <pc:sldMk cId="3869391851" sldId="284"/>
-        </pc:sldMkLst>
-      </pc:sldChg>
-      <pc:sldChg chg="del">
-        <pc:chgData name="Matthieu De Mari" userId="dfb708c9-d8dc-439f-9a3b-c772bf4a311c" providerId="ADAL" clId="{2E25C175-47A3-4BC7-8EFD-372D97A42A64}" dt="2023-03-07T06:13:16.183" v="8" actId="47"/>
-        <pc:sldMkLst>
-          <pc:docMk/>
-          <pc:sldMk cId="1567445271" sldId="285"/>
-        </pc:sldMkLst>
-      </pc:sldChg>
-      <pc:sldChg chg="del">
-        <pc:chgData name="Matthieu De Mari" userId="dfb708c9-d8dc-439f-9a3b-c772bf4a311c" providerId="ADAL" clId="{2E25C175-47A3-4BC7-8EFD-372D97A42A64}" dt="2023-03-07T06:13:17.350" v="9" actId="47"/>
-        <pc:sldMkLst>
-          <pc:docMk/>
-          <pc:sldMk cId="2870852187" sldId="287"/>
-        </pc:sldMkLst>
-      </pc:sldChg>
-      <pc:sldChg chg="del">
-        <pc:chgData name="Matthieu De Mari" userId="dfb708c9-d8dc-439f-9a3b-c772bf4a311c" providerId="ADAL" clId="{2E25C175-47A3-4BC7-8EFD-372D97A42A64}" dt="2023-03-07T06:13:17.350" v="9" actId="47"/>
-        <pc:sldMkLst>
-          <pc:docMk/>
-          <pc:sldMk cId="3486387661" sldId="288"/>
-        </pc:sldMkLst>
-      </pc:sldChg>
-      <pc:sldChg chg="del">
-        <pc:chgData name="Matthieu De Mari" userId="dfb708c9-d8dc-439f-9a3b-c772bf4a311c" providerId="ADAL" clId="{2E25C175-47A3-4BC7-8EFD-372D97A42A64}" dt="2023-03-07T06:13:17.350" v="9" actId="47"/>
-        <pc:sldMkLst>
-          <pc:docMk/>
-          <pc:sldMk cId="2118681498" sldId="289"/>
-        </pc:sldMkLst>
-      </pc:sldChg>
-      <pc:sldChg chg="del">
-        <pc:chgData name="Matthieu De Mari" userId="dfb708c9-d8dc-439f-9a3b-c772bf4a311c" providerId="ADAL" clId="{2E25C175-47A3-4BC7-8EFD-372D97A42A64}" dt="2023-03-07T06:13:17.350" v="9" actId="47"/>
-        <pc:sldMkLst>
-          <pc:docMk/>
-          <pc:sldMk cId="2562857934" sldId="290"/>
-        </pc:sldMkLst>
-      </pc:sldChg>
-      <pc:sldChg chg="del">
-        <pc:chgData name="Matthieu De Mari" userId="dfb708c9-d8dc-439f-9a3b-c772bf4a311c" providerId="ADAL" clId="{2E25C175-47A3-4BC7-8EFD-372D97A42A64}" dt="2023-03-07T06:13:17.350" v="9" actId="47"/>
-        <pc:sldMkLst>
-          <pc:docMk/>
-          <pc:sldMk cId="3292482358" sldId="291"/>
-        </pc:sldMkLst>
-      </pc:sldChg>
-      <pc:sldChg chg="del">
-        <pc:chgData name="Matthieu De Mari" userId="dfb708c9-d8dc-439f-9a3b-c772bf4a311c" providerId="ADAL" clId="{2E25C175-47A3-4BC7-8EFD-372D97A42A64}" dt="2023-03-07T06:13:17.350" v="9" actId="47"/>
-        <pc:sldMkLst>
-          <pc:docMk/>
-          <pc:sldMk cId="3520355124" sldId="292"/>
-        </pc:sldMkLst>
-      </pc:sldChg>
-      <pc:sldChg chg="del">
-        <pc:chgData name="Matthieu De Mari" userId="dfb708c9-d8dc-439f-9a3b-c772bf4a311c" providerId="ADAL" clId="{2E25C175-47A3-4BC7-8EFD-372D97A42A64}" dt="2023-03-07T06:13:17.350" v="9" actId="47"/>
-        <pc:sldMkLst>
-          <pc:docMk/>
-          <pc:sldMk cId="3046349634" sldId="293"/>
-        </pc:sldMkLst>
-      </pc:sldChg>
-      <pc:sldChg chg="del">
-        <pc:chgData name="Matthieu De Mari" userId="dfb708c9-d8dc-439f-9a3b-c772bf4a311c" providerId="ADAL" clId="{2E25C175-47A3-4BC7-8EFD-372D97A42A64}" dt="2023-03-07T06:13:17.350" v="9" actId="47"/>
-        <pc:sldMkLst>
-          <pc:docMk/>
-          <pc:sldMk cId="427136966" sldId="294"/>
-        </pc:sldMkLst>
-      </pc:sldChg>
-      <pc:sldChg chg="del">
-        <pc:chgData name="Matthieu De Mari" userId="dfb708c9-d8dc-439f-9a3b-c772bf4a311c" providerId="ADAL" clId="{2E25C175-47A3-4BC7-8EFD-372D97A42A64}" dt="2023-03-07T06:13:18.262" v="10" actId="47"/>
-        <pc:sldMkLst>
-          <pc:docMk/>
-          <pc:sldMk cId="323951598" sldId="295"/>
-        </pc:sldMkLst>
-      </pc:sldChg>
-      <pc:sldChg chg="del">
-        <pc:chgData name="Matthieu De Mari" userId="dfb708c9-d8dc-439f-9a3b-c772bf4a311c" providerId="ADAL" clId="{2E25C175-47A3-4BC7-8EFD-372D97A42A64}" dt="2023-03-07T06:13:18.262" v="10" actId="47"/>
-        <pc:sldMkLst>
-          <pc:docMk/>
-          <pc:sldMk cId="1855779909" sldId="296"/>
-        </pc:sldMkLst>
-      </pc:sldChg>
-      <pc:sldChg chg="del">
-        <pc:chgData name="Matthieu De Mari" userId="dfb708c9-d8dc-439f-9a3b-c772bf4a311c" providerId="ADAL" clId="{2E25C175-47A3-4BC7-8EFD-372D97A42A64}" dt="2023-03-07T06:13:18.262" v="10" actId="47"/>
-        <pc:sldMkLst>
-          <pc:docMk/>
-          <pc:sldMk cId="1514077654" sldId="297"/>
-        </pc:sldMkLst>
-      </pc:sldChg>
-      <pc:sldChg chg="del">
-        <pc:chgData name="Matthieu De Mari" userId="dfb708c9-d8dc-439f-9a3b-c772bf4a311c" providerId="ADAL" clId="{2E25C175-47A3-4BC7-8EFD-372D97A42A64}" dt="2023-03-07T06:13:18.262" v="10" actId="47"/>
-        <pc:sldMkLst>
-          <pc:docMk/>
-          <pc:sldMk cId="2514894683" sldId="298"/>
-        </pc:sldMkLst>
-      </pc:sldChg>
-      <pc:sldChg chg="del">
-        <pc:chgData name="Matthieu De Mari" userId="dfb708c9-d8dc-439f-9a3b-c772bf4a311c" providerId="ADAL" clId="{2E25C175-47A3-4BC7-8EFD-372D97A42A64}" dt="2023-03-07T06:13:18.262" v="10" actId="47"/>
-        <pc:sldMkLst>
-          <pc:docMk/>
-          <pc:sldMk cId="1452574487" sldId="299"/>
-        </pc:sldMkLst>
-      </pc:sldChg>
-      <pc:sldChg chg="del">
-        <pc:chgData name="Matthieu De Mari" userId="dfb708c9-d8dc-439f-9a3b-c772bf4a311c" providerId="ADAL" clId="{2E25C175-47A3-4BC7-8EFD-372D97A42A64}" dt="2023-03-07T06:13:18.262" v="10" actId="47"/>
-        <pc:sldMkLst>
-          <pc:docMk/>
-          <pc:sldMk cId="1699114457" sldId="300"/>
-        </pc:sldMkLst>
-      </pc:sldChg>
-      <pc:sldChg chg="del">
-        <pc:chgData name="Matthieu De Mari" userId="dfb708c9-d8dc-439f-9a3b-c772bf4a311c" providerId="ADAL" clId="{2E25C175-47A3-4BC7-8EFD-372D97A42A64}" dt="2023-03-07T06:13:18.262" v="10" actId="47"/>
-        <pc:sldMkLst>
-          <pc:docMk/>
-          <pc:sldMk cId="1276239023" sldId="301"/>
-        </pc:sldMkLst>
-      </pc:sldChg>
-      <pc:sldChg chg="del">
-        <pc:chgData name="Matthieu De Mari" userId="dfb708c9-d8dc-439f-9a3b-c772bf4a311c" providerId="ADAL" clId="{2E25C175-47A3-4BC7-8EFD-372D97A42A64}" dt="2023-03-07T06:13:18.262" v="10" actId="47"/>
-        <pc:sldMkLst>
-          <pc:docMk/>
-          <pc:sldMk cId="3968924669" sldId="302"/>
-        </pc:sldMkLst>
-      </pc:sldChg>
-      <pc:sldChg chg="modSp add del mod">
-        <pc:chgData name="Matthieu De Mari" userId="dfb708c9-d8dc-439f-9a3b-c772bf4a311c" providerId="ADAL" clId="{2E25C175-47A3-4BC7-8EFD-372D97A42A64}" dt="2023-03-07T10:16:35.251" v="5714" actId="20577"/>
-        <pc:sldMkLst>
-          <pc:docMk/>
-          <pc:sldMk cId="4232115997" sldId="303"/>
-        </pc:sldMkLst>
-      </pc:sldChg>
-      <pc:sldChg chg="del">
-        <pc:chgData name="Matthieu De Mari" userId="dfb708c9-d8dc-439f-9a3b-c772bf4a311c" providerId="ADAL" clId="{2E25C175-47A3-4BC7-8EFD-372D97A42A64}" dt="2023-03-07T06:13:22.745" v="11" actId="47"/>
-        <pc:sldMkLst>
-          <pc:docMk/>
-          <pc:sldMk cId="354883896" sldId="304"/>
-        </pc:sldMkLst>
-      </pc:sldChg>
-      <pc:sldChg chg="del">
-        <pc:chgData name="Matthieu De Mari" userId="dfb708c9-d8dc-439f-9a3b-c772bf4a311c" providerId="ADAL" clId="{2E25C175-47A3-4BC7-8EFD-372D97A42A64}" dt="2023-03-07T06:13:22.745" v="11" actId="47"/>
-        <pc:sldMkLst>
-          <pc:docMk/>
-          <pc:sldMk cId="4099824996" sldId="305"/>
-        </pc:sldMkLst>
-      </pc:sldChg>
-      <pc:sldChg chg="del">
-        <pc:chgData name="Matthieu De Mari" userId="dfb708c9-d8dc-439f-9a3b-c772bf4a311c" providerId="ADAL" clId="{2E25C175-47A3-4BC7-8EFD-372D97A42A64}" dt="2023-03-07T06:13:22.745" v="11" actId="47"/>
-        <pc:sldMkLst>
-          <pc:docMk/>
-          <pc:sldMk cId="4051912021" sldId="306"/>
-        </pc:sldMkLst>
-      </pc:sldChg>
-      <pc:sldChg chg="del">
-        <pc:chgData name="Matthieu De Mari" userId="dfb708c9-d8dc-439f-9a3b-c772bf4a311c" providerId="ADAL" clId="{2E25C175-47A3-4BC7-8EFD-372D97A42A64}" dt="2023-03-07T06:13:22.745" v="11" actId="47"/>
-        <pc:sldMkLst>
-          <pc:docMk/>
-          <pc:sldMk cId="2900176786" sldId="307"/>
-        </pc:sldMkLst>
-      </pc:sldChg>
-      <pc:sldChg chg="del">
-        <pc:chgData name="Matthieu De Mari" userId="dfb708c9-d8dc-439f-9a3b-c772bf4a311c" providerId="ADAL" clId="{2E25C175-47A3-4BC7-8EFD-372D97A42A64}" dt="2023-03-07T06:13:22.745" v="11" actId="47"/>
-        <pc:sldMkLst>
-          <pc:docMk/>
-          <pc:sldMk cId="1601297533" sldId="308"/>
-        </pc:sldMkLst>
-      </pc:sldChg>
-      <pc:sldChg chg="del">
-        <pc:chgData name="Matthieu De Mari" userId="dfb708c9-d8dc-439f-9a3b-c772bf4a311c" providerId="ADAL" clId="{2E25C175-47A3-4BC7-8EFD-372D97A42A64}" dt="2023-03-07T06:13:22.745" v="11" actId="47"/>
-        <pc:sldMkLst>
-          <pc:docMk/>
-          <pc:sldMk cId="3331075550" sldId="309"/>
-        </pc:sldMkLst>
-      </pc:sldChg>
-      <pc:sldChg chg="del">
-        <pc:chgData name="Matthieu De Mari" userId="dfb708c9-d8dc-439f-9a3b-c772bf4a311c" providerId="ADAL" clId="{2E25C175-47A3-4BC7-8EFD-372D97A42A64}" dt="2023-03-07T06:13:22.745" v="11" actId="47"/>
-        <pc:sldMkLst>
-          <pc:docMk/>
-          <pc:sldMk cId="4251184714" sldId="310"/>
-        </pc:sldMkLst>
-      </pc:sldChg>
-      <pc:sldChg chg="del">
-        <pc:chgData name="Matthieu De Mari" userId="dfb708c9-d8dc-439f-9a3b-c772bf4a311c" providerId="ADAL" clId="{2E25C175-47A3-4BC7-8EFD-372D97A42A64}" dt="2023-03-07T06:13:22.745" v="11" actId="47"/>
-        <pc:sldMkLst>
-          <pc:docMk/>
-          <pc:sldMk cId="3629183510" sldId="311"/>
-        </pc:sldMkLst>
-      </pc:sldChg>
-      <pc:sldChg chg="del">
-        <pc:chgData name="Matthieu De Mari" userId="dfb708c9-d8dc-439f-9a3b-c772bf4a311c" providerId="ADAL" clId="{2E25C175-47A3-4BC7-8EFD-372D97A42A64}" dt="2023-03-07T06:13:22.745" v="11" actId="47"/>
-        <pc:sldMkLst>
-          <pc:docMk/>
-          <pc:sldMk cId="7996884" sldId="312"/>
-        </pc:sldMkLst>
-      </pc:sldChg>
-      <pc:sldChg chg="del">
-        <pc:chgData name="Matthieu De Mari" userId="dfb708c9-d8dc-439f-9a3b-c772bf4a311c" providerId="ADAL" clId="{2E25C175-47A3-4BC7-8EFD-372D97A42A64}" dt="2023-03-07T06:13:22.745" v="11" actId="47"/>
-        <pc:sldMkLst>
-          <pc:docMk/>
-          <pc:sldMk cId="1140638742" sldId="313"/>
-        </pc:sldMkLst>
-      </pc:sldChg>
-      <pc:sldChg chg="modSp mod">
-        <pc:chgData name="Matthieu De Mari" userId="dfb708c9-d8dc-439f-9a3b-c772bf4a311c" providerId="ADAL" clId="{2E25C175-47A3-4BC7-8EFD-372D97A42A64}" dt="2023-03-07T10:46:51.155" v="7359" actId="20577"/>
-        <pc:sldMkLst>
-          <pc:docMk/>
-          <pc:sldMk cId="2858358615" sldId="314"/>
-        </pc:sldMkLst>
-      </pc:sldChg>
-      <pc:sldChg chg="modSp mod">
-        <pc:chgData name="Matthieu De Mari" userId="dfb708c9-d8dc-439f-9a3b-c772bf4a311c" providerId="ADAL" clId="{2E25C175-47A3-4BC7-8EFD-372D97A42A64}" dt="2023-03-07T06:12:25.909" v="1" actId="20577"/>
-        <pc:sldMkLst>
-          <pc:docMk/>
-          <pc:sldMk cId="1040156172" sldId="377"/>
-        </pc:sldMkLst>
-      </pc:sldChg>
-      <pc:sldChg chg="addSp delSp modSp new mod modClrScheme chgLayout">
-        <pc:chgData name="Matthieu De Mari" userId="dfb708c9-d8dc-439f-9a3b-c772bf4a311c" providerId="ADAL" clId="{2E25C175-47A3-4BC7-8EFD-372D97A42A64}" dt="2023-03-07T06:51:43.777" v="743" actId="693"/>
-        <pc:sldMkLst>
-          <pc:docMk/>
-          <pc:sldMk cId="820057187" sldId="378"/>
-        </pc:sldMkLst>
-      </pc:sldChg>
-      <pc:sldChg chg="del">
-        <pc:chgData name="Matthieu De Mari" userId="dfb708c9-d8dc-439f-9a3b-c772bf4a311c" providerId="ADAL" clId="{2E25C175-47A3-4BC7-8EFD-372D97A42A64}" dt="2023-03-07T06:12:31.958" v="2" actId="47"/>
-        <pc:sldMkLst>
-          <pc:docMk/>
-          <pc:sldMk cId="3338565690" sldId="378"/>
-        </pc:sldMkLst>
-      </pc:sldChg>
-      <pc:sldChg chg="addSp delSp modSp new mod modClrScheme chgLayout">
-        <pc:chgData name="Matthieu De Mari" userId="dfb708c9-d8dc-439f-9a3b-c772bf4a311c" providerId="ADAL" clId="{2E25C175-47A3-4BC7-8EFD-372D97A42A64}" dt="2023-03-07T09:36:26.056" v="3847" actId="27636"/>
-        <pc:sldMkLst>
-          <pc:docMk/>
-          <pc:sldMk cId="691565538" sldId="379"/>
-        </pc:sldMkLst>
-      </pc:sldChg>
-      <pc:sldChg chg="addSp delSp modSp add mod">
-        <pc:chgData name="Matthieu De Mari" userId="dfb708c9-d8dc-439f-9a3b-c772bf4a311c" providerId="ADAL" clId="{2E25C175-47A3-4BC7-8EFD-372D97A42A64}" dt="2023-03-07T09:52:47.258" v="4759" actId="20577"/>
-        <pc:sldMkLst>
-          <pc:docMk/>
-          <pc:sldMk cId="4217274173" sldId="380"/>
-        </pc:sldMkLst>
-      </pc:sldChg>
-      <pc:sldChg chg="modSp add mod ord">
-        <pc:chgData name="Matthieu De Mari" userId="dfb708c9-d8dc-439f-9a3b-c772bf4a311c" providerId="ADAL" clId="{2E25C175-47A3-4BC7-8EFD-372D97A42A64}" dt="2023-03-07T09:52:40.373" v="4748" actId="20577"/>
-        <pc:sldMkLst>
-          <pc:docMk/>
-          <pc:sldMk cId="1253114987" sldId="381"/>
-        </pc:sldMkLst>
-      </pc:sldChg>
-      <pc:sldChg chg="add del">
-        <pc:chgData name="Matthieu De Mari" userId="dfb708c9-d8dc-439f-9a3b-c772bf4a311c" providerId="ADAL" clId="{2E25C175-47A3-4BC7-8EFD-372D97A42A64}" dt="2023-03-07T06:33:39.066" v="156"/>
-        <pc:sldMkLst>
-          <pc:docMk/>
-          <pc:sldMk cId="3859619901" sldId="381"/>
-        </pc:sldMkLst>
-      </pc:sldChg>
-      <pc:sldChg chg="modSp add mod">
-        <pc:chgData name="Matthieu De Mari" userId="dfb708c9-d8dc-439f-9a3b-c772bf4a311c" providerId="ADAL" clId="{2E25C175-47A3-4BC7-8EFD-372D97A42A64}" dt="2023-03-07T10:20:58.594" v="5878" actId="20577"/>
-        <pc:sldMkLst>
-          <pc:docMk/>
-          <pc:sldMk cId="336152115" sldId="382"/>
-        </pc:sldMkLst>
-      </pc:sldChg>
-      <pc:sldChg chg="modSp add mod">
-        <pc:chgData name="Matthieu De Mari" userId="dfb708c9-d8dc-439f-9a3b-c772bf4a311c" providerId="ADAL" clId="{2E25C175-47A3-4BC7-8EFD-372D97A42A64}" dt="2023-03-07T09:19:27.741" v="2933"/>
-        <pc:sldMkLst>
-          <pc:docMk/>
-          <pc:sldMk cId="1681210728" sldId="383"/>
-        </pc:sldMkLst>
-      </pc:sldChg>
-      <pc:sldChg chg="modSp new mod ord">
-        <pc:chgData name="Matthieu De Mari" userId="dfb708c9-d8dc-439f-9a3b-c772bf4a311c" providerId="ADAL" clId="{2E25C175-47A3-4BC7-8EFD-372D97A42A64}" dt="2023-03-07T07:15:22.193" v="1643" actId="207"/>
-        <pc:sldMkLst>
-          <pc:docMk/>
-          <pc:sldMk cId="1342602480" sldId="384"/>
-        </pc:sldMkLst>
-      </pc:sldChg>
-      <pc:sldChg chg="modSp add mod">
-        <pc:chgData name="Matthieu De Mari" userId="dfb708c9-d8dc-439f-9a3b-c772bf4a311c" providerId="ADAL" clId="{2E25C175-47A3-4BC7-8EFD-372D97A42A64}" dt="2023-03-07T06:52:07.120" v="746" actId="20577"/>
-        <pc:sldMkLst>
-          <pc:docMk/>
-          <pc:sldMk cId="3061177336" sldId="385"/>
-        </pc:sldMkLst>
-      </pc:sldChg>
-      <pc:sldChg chg="modSp add mod">
-        <pc:chgData name="Matthieu De Mari" userId="dfb708c9-d8dc-439f-9a3b-c772bf4a311c" providerId="ADAL" clId="{2E25C175-47A3-4BC7-8EFD-372D97A42A64}" dt="2023-03-07T10:21:04.127" v="5879"/>
-        <pc:sldMkLst>
-          <pc:docMk/>
-          <pc:sldMk cId="1114751945" sldId="386"/>
-        </pc:sldMkLst>
-      </pc:sldChg>
-      <pc:sldChg chg="modSp add mod">
-        <pc:chgData name="Matthieu De Mari" userId="dfb708c9-d8dc-439f-9a3b-c772bf4a311c" providerId="ADAL" clId="{2E25C175-47A3-4BC7-8EFD-372D97A42A64}" dt="2023-03-07T10:21:07.278" v="5880"/>
-        <pc:sldMkLst>
-          <pc:docMk/>
-          <pc:sldMk cId="881014307" sldId="387"/>
-        </pc:sldMkLst>
-      </pc:sldChg>
-      <pc:sldChg chg="addSp delSp modSp new del mod modClrScheme chgLayout">
-        <pc:chgData name="Matthieu De Mari" userId="dfb708c9-d8dc-439f-9a3b-c772bf4a311c" providerId="ADAL" clId="{2E25C175-47A3-4BC7-8EFD-372D97A42A64}" dt="2023-03-07T07:39:02.444" v="2518" actId="47"/>
-        <pc:sldMkLst>
-          <pc:docMk/>
-          <pc:sldMk cId="2957584795" sldId="388"/>
-        </pc:sldMkLst>
-      </pc:sldChg>
-      <pc:sldChg chg="addSp delSp modSp new mod">
-        <pc:chgData name="Matthieu De Mari" userId="dfb708c9-d8dc-439f-9a3b-c772bf4a311c" providerId="ADAL" clId="{2E25C175-47A3-4BC7-8EFD-372D97A42A64}" dt="2023-03-07T07:36:38.453" v="2381" actId="1076"/>
-        <pc:sldMkLst>
-          <pc:docMk/>
-          <pc:sldMk cId="1359818059" sldId="389"/>
-        </pc:sldMkLst>
-      </pc:sldChg>
-      <pc:sldChg chg="addSp delSp modSp new mod">
-        <pc:chgData name="Matthieu De Mari" userId="dfb708c9-d8dc-439f-9a3b-c772bf4a311c" providerId="ADAL" clId="{2E25C175-47A3-4BC7-8EFD-372D97A42A64}" dt="2023-03-07T07:35:30.101" v="2369" actId="1076"/>
-        <pc:sldMkLst>
-          <pc:docMk/>
-          <pc:sldMk cId="1233822438" sldId="390"/>
-        </pc:sldMkLst>
-      </pc:sldChg>
-      <pc:sldChg chg="addSp delSp modSp add mod ord modClrScheme chgLayout">
-        <pc:chgData name="Matthieu De Mari" userId="dfb708c9-d8dc-439f-9a3b-c772bf4a311c" providerId="ADAL" clId="{2E25C175-47A3-4BC7-8EFD-372D97A42A64}" dt="2023-03-07T07:38:39.051" v="2509" actId="1036"/>
-        <pc:sldMkLst>
-          <pc:docMk/>
-          <pc:sldMk cId="2406012581" sldId="391"/>
-        </pc:sldMkLst>
-      </pc:sldChg>
-      <pc:sldChg chg="addSp delSp modSp add mod">
-        <pc:chgData name="Matthieu De Mari" userId="dfb708c9-d8dc-439f-9a3b-c772bf4a311c" providerId="ADAL" clId="{2E25C175-47A3-4BC7-8EFD-372D97A42A64}" dt="2023-03-07T07:35:59.217" v="2376" actId="14100"/>
-        <pc:sldMkLst>
-          <pc:docMk/>
-          <pc:sldMk cId="1269624659" sldId="392"/>
-        </pc:sldMkLst>
-      </pc:sldChg>
-      <pc:sldChg chg="modSp new mod">
-        <pc:chgData name="Matthieu De Mari" userId="dfb708c9-d8dc-439f-9a3b-c772bf4a311c" providerId="ADAL" clId="{2E25C175-47A3-4BC7-8EFD-372D97A42A64}" dt="2023-03-07T07:45:56.776" v="2772" actId="20577"/>
-        <pc:sldMkLst>
-          <pc:docMk/>
-          <pc:sldMk cId="1060213588" sldId="393"/>
-        </pc:sldMkLst>
-      </pc:sldChg>
-      <pc:sldChg chg="addSp delSp modSp add mod modClrScheme chgLayout">
-        <pc:chgData name="Matthieu De Mari" userId="dfb708c9-d8dc-439f-9a3b-c772bf4a311c" providerId="ADAL" clId="{2E25C175-47A3-4BC7-8EFD-372D97A42A64}" dt="2023-03-07T07:34:46.250" v="2362" actId="1076"/>
-        <pc:sldMkLst>
-          <pc:docMk/>
-          <pc:sldMk cId="1215328976" sldId="394"/>
-        </pc:sldMkLst>
-      </pc:sldChg>
-      <pc:sldChg chg="addSp delSp modSp new mod modClrScheme chgLayout">
-        <pc:chgData name="Matthieu De Mari" userId="dfb708c9-d8dc-439f-9a3b-c772bf4a311c" providerId="ADAL" clId="{2E25C175-47A3-4BC7-8EFD-372D97A42A64}" dt="2023-03-07T07:28:47.793" v="2301" actId="20577"/>
-        <pc:sldMkLst>
-          <pc:docMk/>
-          <pc:sldMk cId="3544056403" sldId="395"/>
-        </pc:sldMkLst>
-      </pc:sldChg>
-      <pc:sldChg chg="addSp delSp modSp add del mod">
-        <pc:chgData name="Matthieu De Mari" userId="dfb708c9-d8dc-439f-9a3b-c772bf4a311c" providerId="ADAL" clId="{2E25C175-47A3-4BC7-8EFD-372D97A42A64}" dt="2023-03-07T07:33:16.168" v="2350" actId="47"/>
-        <pc:sldMkLst>
-          <pc:docMk/>
-          <pc:sldMk cId="1465774430" sldId="396"/>
-        </pc:sldMkLst>
-      </pc:sldChg>
-      <pc:sldChg chg="addSp delSp modSp add mod">
-        <pc:chgData name="Matthieu De Mari" userId="dfb708c9-d8dc-439f-9a3b-c772bf4a311c" providerId="ADAL" clId="{2E25C175-47A3-4BC7-8EFD-372D97A42A64}" dt="2023-03-07T07:44:01.388" v="2686" actId="20577"/>
-        <pc:sldMkLst>
-          <pc:docMk/>
-          <pc:sldMk cId="511100047" sldId="397"/>
-        </pc:sldMkLst>
-      </pc:sldChg>
-      <pc:sldChg chg="addSp delSp modSp add mod ord modClrScheme chgLayout">
-        <pc:chgData name="Matthieu De Mari" userId="dfb708c9-d8dc-439f-9a3b-c772bf4a311c" providerId="ADAL" clId="{2E25C175-47A3-4BC7-8EFD-372D97A42A64}" dt="2023-03-07T07:48:10.066" v="2811" actId="20577"/>
-        <pc:sldMkLst>
-          <pc:docMk/>
-          <pc:sldMk cId="2174133860" sldId="398"/>
-        </pc:sldMkLst>
-      </pc:sldChg>
-      <pc:sldChg chg="addSp delSp modSp add mod ord modClrScheme chgLayout">
-        <pc:chgData name="Matthieu De Mari" userId="dfb708c9-d8dc-439f-9a3b-c772bf4a311c" providerId="ADAL" clId="{2E25C175-47A3-4BC7-8EFD-372D97A42A64}" dt="2023-03-07T07:38:53.195" v="2516" actId="700"/>
-        <pc:sldMkLst>
-          <pc:docMk/>
-          <pc:sldMk cId="1114255243" sldId="399"/>
-        </pc:sldMkLst>
-      </pc:sldChg>
-      <pc:sldChg chg="add">
-        <pc:chgData name="Matthieu De Mari" userId="dfb708c9-d8dc-439f-9a3b-c772bf4a311c" providerId="ADAL" clId="{2E25C175-47A3-4BC7-8EFD-372D97A42A64}" dt="2023-03-07T07:39:00.501" v="2517"/>
-        <pc:sldMkLst>
-          <pc:docMk/>
-          <pc:sldMk cId="3412258979" sldId="400"/>
-        </pc:sldMkLst>
-      </pc:sldChg>
-      <pc:sldChg chg="addSp delSp modSp new mod modClrScheme chgLayout">
-        <pc:chgData name="Matthieu De Mari" userId="dfb708c9-d8dc-439f-9a3b-c772bf4a311c" providerId="ADAL" clId="{2E25C175-47A3-4BC7-8EFD-372D97A42A64}" dt="2023-03-07T07:44:19.570" v="2733" actId="20577"/>
-        <pc:sldMkLst>
-          <pc:docMk/>
-          <pc:sldMk cId="2615177350" sldId="401"/>
-        </pc:sldMkLst>
-      </pc:sldChg>
-      <pc:sldChg chg="addSp delSp modSp add mod ord modClrScheme chgLayout">
-        <pc:chgData name="Matthieu De Mari" userId="dfb708c9-d8dc-439f-9a3b-c772bf4a311c" providerId="ADAL" clId="{2E25C175-47A3-4BC7-8EFD-372D97A42A64}" dt="2023-03-07T07:45:19.255" v="2765"/>
-        <pc:sldMkLst>
-          <pc:docMk/>
-          <pc:sldMk cId="792071299" sldId="402"/>
-        </pc:sldMkLst>
-      </pc:sldChg>
-      <pc:sldChg chg="add del">
-        <pc:chgData name="Matthieu De Mari" userId="dfb708c9-d8dc-439f-9a3b-c772bf4a311c" providerId="ADAL" clId="{2E25C175-47A3-4BC7-8EFD-372D97A42A64}" dt="2023-03-07T07:43:26.095" v="2668" actId="47"/>
-        <pc:sldMkLst>
-          <pc:docMk/>
-          <pc:sldMk cId="2323503086" sldId="402"/>
-        </pc:sldMkLst>
-      </pc:sldChg>
-      <pc:sldChg chg="addSp delSp modSp add mod modClrScheme chgLayout">
-        <pc:chgData name="Matthieu De Mari" userId="dfb708c9-d8dc-439f-9a3b-c772bf4a311c" providerId="ADAL" clId="{2E25C175-47A3-4BC7-8EFD-372D97A42A64}" dt="2023-03-07T07:45:28.874" v="2770" actId="1076"/>
-        <pc:sldMkLst>
-          <pc:docMk/>
-          <pc:sldMk cId="990763623" sldId="403"/>
-        </pc:sldMkLst>
-      </pc:sldChg>
-      <pc:sldChg chg="modSp add mod">
-        <pc:chgData name="Matthieu De Mari" userId="dfb708c9-d8dc-439f-9a3b-c772bf4a311c" providerId="ADAL" clId="{2E25C175-47A3-4BC7-8EFD-372D97A42A64}" dt="2023-03-07T09:27:55.594" v="3381" actId="207"/>
-        <pc:sldMkLst>
-          <pc:docMk/>
-          <pc:sldMk cId="3762706142" sldId="404"/>
-        </pc:sldMkLst>
-      </pc:sldChg>
-      <pc:sldChg chg="addSp delSp modSp new mod modClrScheme chgLayout">
-        <pc:chgData name="Matthieu De Mari" userId="dfb708c9-d8dc-439f-9a3b-c772bf4a311c" providerId="ADAL" clId="{2E25C175-47A3-4BC7-8EFD-372D97A42A64}" dt="2023-03-07T09:21:37.295" v="3027" actId="1076"/>
-        <pc:sldMkLst>
-          <pc:docMk/>
-          <pc:sldMk cId="4232193198" sldId="405"/>
-        </pc:sldMkLst>
-      </pc:sldChg>
-      <pc:sldChg chg="addSp delSp modSp new mod">
-        <pc:chgData name="Matthieu De Mari" userId="dfb708c9-d8dc-439f-9a3b-c772bf4a311c" providerId="ADAL" clId="{2E25C175-47A3-4BC7-8EFD-372D97A42A64}" dt="2023-03-07T09:27:15.834" v="3347" actId="14100"/>
-        <pc:sldMkLst>
-          <pc:docMk/>
-          <pc:sldMk cId="1511321219" sldId="406"/>
-        </pc:sldMkLst>
-      </pc:sldChg>
-      <pc:sldChg chg="modSp add mod">
-        <pc:chgData name="Matthieu De Mari" userId="dfb708c9-d8dc-439f-9a3b-c772bf4a311c" providerId="ADAL" clId="{2E25C175-47A3-4BC7-8EFD-372D97A42A64}" dt="2023-03-07T09:26:18.953" v="3297" actId="27636"/>
-        <pc:sldMkLst>
-          <pc:docMk/>
-          <pc:sldMk cId="3233841990" sldId="407"/>
-        </pc:sldMkLst>
-      </pc:sldChg>
-      <pc:sldChg chg="modSp add mod">
-        <pc:chgData name="Matthieu De Mari" userId="dfb708c9-d8dc-439f-9a3b-c772bf4a311c" providerId="ADAL" clId="{2E25C175-47A3-4BC7-8EFD-372D97A42A64}" dt="2023-03-07T09:27:48.031" v="3380" actId="207"/>
-        <pc:sldMkLst>
-          <pc:docMk/>
-          <pc:sldMk cId="1609989787" sldId="408"/>
-        </pc:sldMkLst>
-      </pc:sldChg>
-      <pc:sldChg chg="addSp delSp modSp add mod modClrScheme chgLayout">
-        <pc:chgData name="Matthieu De Mari" userId="dfb708c9-d8dc-439f-9a3b-c772bf4a311c" providerId="ADAL" clId="{2E25C175-47A3-4BC7-8EFD-372D97A42A64}" dt="2023-03-07T10:24:07.578" v="6039" actId="207"/>
-        <pc:sldMkLst>
-          <pc:docMk/>
-          <pc:sldMk cId="3853734329" sldId="409"/>
-        </pc:sldMkLst>
-      </pc:sldChg>
-      <pc:sldChg chg="modSp add del mod">
-        <pc:chgData name="Matthieu De Mari" userId="dfb708c9-d8dc-439f-9a3b-c772bf4a311c" providerId="ADAL" clId="{2E25C175-47A3-4BC7-8EFD-372D97A42A64}" dt="2023-03-07T09:50:47.923" v="4520" actId="2696"/>
-        <pc:sldMkLst>
-          <pc:docMk/>
-          <pc:sldMk cId="2230671212" sldId="410"/>
-        </pc:sldMkLst>
-      </pc:sldChg>
-      <pc:sldChg chg="modSp add mod">
-        <pc:chgData name="Matthieu De Mari" userId="dfb708c9-d8dc-439f-9a3b-c772bf4a311c" providerId="ADAL" clId="{2E25C175-47A3-4BC7-8EFD-372D97A42A64}" dt="2023-03-07T10:04:11.442" v="5348" actId="20577"/>
-        <pc:sldMkLst>
-          <pc:docMk/>
-          <pc:sldMk cId="4281175894" sldId="410"/>
-        </pc:sldMkLst>
-      </pc:sldChg>
-      <pc:sldChg chg="modSp add del mod">
-        <pc:chgData name="Matthieu De Mari" userId="dfb708c9-d8dc-439f-9a3b-c772bf4a311c" providerId="ADAL" clId="{2E25C175-47A3-4BC7-8EFD-372D97A42A64}" dt="2023-03-07T09:50:47.923" v="4520" actId="2696"/>
-        <pc:sldMkLst>
-          <pc:docMk/>
-          <pc:sldMk cId="2214876847" sldId="411"/>
-        </pc:sldMkLst>
-      </pc:sldChg>
-      <pc:sldChg chg="modSp add mod">
-        <pc:chgData name="Matthieu De Mari" userId="dfb708c9-d8dc-439f-9a3b-c772bf4a311c" providerId="ADAL" clId="{2E25C175-47A3-4BC7-8EFD-372D97A42A64}" dt="2023-03-07T10:01:47.419" v="5118" actId="20577"/>
-        <pc:sldMkLst>
-          <pc:docMk/>
-          <pc:sldMk cId="3863789620" sldId="411"/>
-        </pc:sldMkLst>
-      </pc:sldChg>
-      <pc:sldChg chg="modSp add del mod">
-        <pc:chgData name="Matthieu De Mari" userId="dfb708c9-d8dc-439f-9a3b-c772bf4a311c" providerId="ADAL" clId="{2E25C175-47A3-4BC7-8EFD-372D97A42A64}" dt="2023-03-07T09:50:47.923" v="4520" actId="2696"/>
-        <pc:sldMkLst>
-          <pc:docMk/>
-          <pc:sldMk cId="1824916093" sldId="412"/>
-        </pc:sldMkLst>
-      </pc:sldChg>
-      <pc:sldChg chg="modSp add mod">
-        <pc:chgData name="Matthieu De Mari" userId="dfb708c9-d8dc-439f-9a3b-c772bf4a311c" providerId="ADAL" clId="{2E25C175-47A3-4BC7-8EFD-372D97A42A64}" dt="2023-03-07T10:11:33.236" v="5507" actId="20577"/>
-        <pc:sldMkLst>
-          <pc:docMk/>
-          <pc:sldMk cId="3522054596" sldId="412"/>
-        </pc:sldMkLst>
-      </pc:sldChg>
-      <pc:sldChg chg="addSp delSp modSp add mod">
-        <pc:chgData name="Matthieu De Mari" userId="dfb708c9-d8dc-439f-9a3b-c772bf4a311c" providerId="ADAL" clId="{2E25C175-47A3-4BC7-8EFD-372D97A42A64}" dt="2023-03-07T09:59:16.475" v="4959" actId="1076"/>
-        <pc:sldMkLst>
-          <pc:docMk/>
-          <pc:sldMk cId="2221766967" sldId="413"/>
-        </pc:sldMkLst>
-      </pc:sldChg>
-      <pc:sldChg chg="addSp delSp modSp new mod modClrScheme chgLayout">
-        <pc:chgData name="Matthieu De Mari" userId="dfb708c9-d8dc-439f-9a3b-c772bf4a311c" providerId="ADAL" clId="{2E25C175-47A3-4BC7-8EFD-372D97A42A64}" dt="2023-03-07T09:58:35.438" v="4956" actId="1076"/>
-        <pc:sldMkLst>
-          <pc:docMk/>
-          <pc:sldMk cId="912972080" sldId="414"/>
-        </pc:sldMkLst>
-      </pc:sldChg>
-      <pc:sldChg chg="modSp add mod">
-        <pc:chgData name="Matthieu De Mari" userId="dfb708c9-d8dc-439f-9a3b-c772bf4a311c" providerId="ADAL" clId="{2E25C175-47A3-4BC7-8EFD-372D97A42A64}" dt="2023-03-07T09:53:39.541" v="4799" actId="114"/>
-        <pc:sldMkLst>
-          <pc:docMk/>
-          <pc:sldMk cId="71985707" sldId="415"/>
-        </pc:sldMkLst>
-      </pc:sldChg>
-      <pc:sldChg chg="addSp modSp add mod">
-        <pc:chgData name="Matthieu De Mari" userId="dfb708c9-d8dc-439f-9a3b-c772bf4a311c" providerId="ADAL" clId="{2E25C175-47A3-4BC7-8EFD-372D97A42A64}" dt="2023-03-07T10:05:35.903" v="5356" actId="1076"/>
-        <pc:sldMkLst>
-          <pc:docMk/>
-          <pc:sldMk cId="1311368978" sldId="416"/>
-        </pc:sldMkLst>
-      </pc:sldChg>
-      <pc:sldChg chg="addSp delSp modSp add mod">
-        <pc:chgData name="Matthieu De Mari" userId="dfb708c9-d8dc-439f-9a3b-c772bf4a311c" providerId="ADAL" clId="{2E25C175-47A3-4BC7-8EFD-372D97A42A64}" dt="2023-03-07T10:10:43.605" v="5384" actId="14100"/>
-        <pc:sldMkLst>
-          <pc:docMk/>
-          <pc:sldMk cId="3072427418" sldId="417"/>
-        </pc:sldMkLst>
-      </pc:sldChg>
-      <pc:sldChg chg="addSp modSp add mod">
-        <pc:chgData name="Matthieu De Mari" userId="dfb708c9-d8dc-439f-9a3b-c772bf4a311c" providerId="ADAL" clId="{2E25C175-47A3-4BC7-8EFD-372D97A42A64}" dt="2023-03-07T10:11:59.407" v="5512" actId="207"/>
-        <pc:sldMkLst>
-          <pc:docMk/>
-          <pc:sldMk cId="298499389" sldId="418"/>
-        </pc:sldMkLst>
-      </pc:sldChg>
-      <pc:sldChg chg="modSp add mod">
-        <pc:chgData name="Matthieu De Mari" userId="dfb708c9-d8dc-439f-9a3b-c772bf4a311c" providerId="ADAL" clId="{2E25C175-47A3-4BC7-8EFD-372D97A42A64}" dt="2023-03-07T10:12:50.723" v="5624" actId="20577"/>
-        <pc:sldMkLst>
-          <pc:docMk/>
-          <pc:sldMk cId="3069423319" sldId="419"/>
-        </pc:sldMkLst>
-      </pc:sldChg>
-      <pc:sldChg chg="add">
-        <pc:chgData name="Matthieu De Mari" userId="dfb708c9-d8dc-439f-9a3b-c772bf4a311c" providerId="ADAL" clId="{2E25C175-47A3-4BC7-8EFD-372D97A42A64}" dt="2023-03-07T10:13:31.207" v="5629"/>
-        <pc:sldMkLst>
-          <pc:docMk/>
-          <pc:sldMk cId="485649805" sldId="420"/>
-        </pc:sldMkLst>
-      </pc:sldChg>
-      <pc:sldChg chg="add del">
-        <pc:chgData name="Matthieu De Mari" userId="dfb708c9-d8dc-439f-9a3b-c772bf4a311c" providerId="ADAL" clId="{2E25C175-47A3-4BC7-8EFD-372D97A42A64}" dt="2023-03-07T10:13:21.390" v="5626" actId="2696"/>
-        <pc:sldMkLst>
-          <pc:docMk/>
-          <pc:sldMk cId="1259014801" sldId="420"/>
-        </pc:sldMkLst>
-      </pc:sldChg>
-      <pc:sldChg chg="modSp add mod">
-        <pc:chgData name="Matthieu De Mari" userId="dfb708c9-d8dc-439f-9a3b-c772bf4a311c" providerId="ADAL" clId="{2E25C175-47A3-4BC7-8EFD-372D97A42A64}" dt="2023-03-07T10:16:44.162" v="5758" actId="20577"/>
-        <pc:sldMkLst>
-          <pc:docMk/>
-          <pc:sldMk cId="3351792085" sldId="421"/>
-        </pc:sldMkLst>
-      </pc:sldChg>
-      <pc:sldChg chg="new del">
-        <pc:chgData name="Matthieu De Mari" userId="dfb708c9-d8dc-439f-9a3b-c772bf4a311c" providerId="ADAL" clId="{2E25C175-47A3-4BC7-8EFD-372D97A42A64}" dt="2023-03-07T10:13:52.815" v="5632" actId="47"/>
-        <pc:sldMkLst>
-          <pc:docMk/>
-          <pc:sldMk cId="4263020084" sldId="421"/>
-        </pc:sldMkLst>
-      </pc:sldChg>
-      <pc:sldChg chg="new del">
-        <pc:chgData name="Matthieu De Mari" userId="dfb708c9-d8dc-439f-9a3b-c772bf4a311c" providerId="ADAL" clId="{2E25C175-47A3-4BC7-8EFD-372D97A42A64}" dt="2023-03-07T10:26:41.441" v="6051" actId="47"/>
-        <pc:sldMkLst>
-          <pc:docMk/>
-          <pc:sldMk cId="1402562889" sldId="422"/>
-        </pc:sldMkLst>
-      </pc:sldChg>
-      <pc:sldChg chg="modSp add mod ord">
-        <pc:chgData name="Matthieu De Mari" userId="dfb708c9-d8dc-439f-9a3b-c772bf4a311c" providerId="ADAL" clId="{2E25C175-47A3-4BC7-8EFD-372D97A42A64}" dt="2023-03-07T10:17:54.203" v="5801" actId="20577"/>
-        <pc:sldMkLst>
-          <pc:docMk/>
-          <pc:sldMk cId="3421583851" sldId="423"/>
-        </pc:sldMkLst>
-      </pc:sldChg>
-      <pc:sldChg chg="modSp add mod">
-        <pc:chgData name="Matthieu De Mari" userId="dfb708c9-d8dc-439f-9a3b-c772bf4a311c" providerId="ADAL" clId="{2E25C175-47A3-4BC7-8EFD-372D97A42A64}" dt="2023-03-07T10:18:00.790" v="5804" actId="207"/>
-        <pc:sldMkLst>
-          <pc:docMk/>
-          <pc:sldMk cId="2106229472" sldId="424"/>
-        </pc:sldMkLst>
-      </pc:sldChg>
-      <pc:sldChg chg="modSp add mod">
-        <pc:chgData name="Matthieu De Mari" userId="dfb708c9-d8dc-439f-9a3b-c772bf4a311c" providerId="ADAL" clId="{2E25C175-47A3-4BC7-8EFD-372D97A42A64}" dt="2023-03-07T10:19:35.729" v="5860" actId="113"/>
-        <pc:sldMkLst>
-          <pc:docMk/>
-          <pc:sldMk cId="833550183" sldId="425"/>
-        </pc:sldMkLst>
-      </pc:sldChg>
-      <pc:sldChg chg="modSp add mod">
-        <pc:chgData name="Matthieu De Mari" userId="dfb708c9-d8dc-439f-9a3b-c772bf4a311c" providerId="ADAL" clId="{2E25C175-47A3-4BC7-8EFD-372D97A42A64}" dt="2023-03-07T10:19:50.985" v="5865" actId="14100"/>
-        <pc:sldMkLst>
-          <pc:docMk/>
-          <pc:sldMk cId="1650955281" sldId="426"/>
-        </pc:sldMkLst>
-      </pc:sldChg>
-      <pc:sldChg chg="modSp add mod ord">
-        <pc:chgData name="Matthieu De Mari" userId="dfb708c9-d8dc-439f-9a3b-c772bf4a311c" providerId="ADAL" clId="{2E25C175-47A3-4BC7-8EFD-372D97A42A64}" dt="2023-03-07T10:24:33.206" v="6049" actId="207"/>
-        <pc:sldMkLst>
-          <pc:docMk/>
-          <pc:sldMk cId="25607758" sldId="427"/>
-        </pc:sldMkLst>
-      </pc:sldChg>
-      <pc:sldChg chg="modSp add mod">
-        <pc:chgData name="Matthieu De Mari" userId="dfb708c9-d8dc-439f-9a3b-c772bf4a311c" providerId="ADAL" clId="{2E25C175-47A3-4BC7-8EFD-372D97A42A64}" dt="2023-03-07T10:32:08.804" v="6515" actId="20577"/>
-        <pc:sldMkLst>
-          <pc:docMk/>
-          <pc:sldMk cId="2580070337" sldId="428"/>
-        </pc:sldMkLst>
-      </pc:sldChg>
-      <pc:sldChg chg="modSp add mod">
-        <pc:chgData name="Matthieu De Mari" userId="dfb708c9-d8dc-439f-9a3b-c772bf4a311c" providerId="ADAL" clId="{2E25C175-47A3-4BC7-8EFD-372D97A42A64}" dt="2023-03-07T10:32:13.911" v="6528" actId="20577"/>
-        <pc:sldMkLst>
-          <pc:docMk/>
-          <pc:sldMk cId="2609747574" sldId="429"/>
-        </pc:sldMkLst>
-      </pc:sldChg>
-      <pc:sldChg chg="modSp add mod">
-        <pc:chgData name="Matthieu De Mari" userId="dfb708c9-d8dc-439f-9a3b-c772bf4a311c" providerId="ADAL" clId="{2E25C175-47A3-4BC7-8EFD-372D97A42A64}" dt="2023-03-07T10:32:39.787" v="6641" actId="20577"/>
-        <pc:sldMkLst>
-          <pc:docMk/>
-          <pc:sldMk cId="1298953197" sldId="430"/>
-        </pc:sldMkLst>
-      </pc:sldChg>
-      <pc:sldChg chg="add del">
-        <pc:chgData name="Matthieu De Mari" userId="dfb708c9-d8dc-439f-9a3b-c772bf4a311c" providerId="ADAL" clId="{2E25C175-47A3-4BC7-8EFD-372D97A42A64}" dt="2023-03-07T10:30:25.877" v="6383" actId="47"/>
-        <pc:sldMkLst>
-          <pc:docMk/>
-          <pc:sldMk cId="3766509564" sldId="430"/>
-        </pc:sldMkLst>
-      </pc:sldChg>
-      <pc:sldChg chg="modSp new mod">
-        <pc:chgData name="Matthieu De Mari" userId="dfb708c9-d8dc-439f-9a3b-c772bf4a311c" providerId="ADAL" clId="{2E25C175-47A3-4BC7-8EFD-372D97A42A64}" dt="2023-03-07T10:34:48.172" v="6763" actId="20577"/>
-        <pc:sldMkLst>
-          <pc:docMk/>
-          <pc:sldMk cId="349686524" sldId="431"/>
-        </pc:sldMkLst>
-      </pc:sldChg>
-      <pc:sldChg chg="modSp add mod">
-        <pc:chgData name="Matthieu De Mari" userId="dfb708c9-d8dc-439f-9a3b-c772bf4a311c" providerId="ADAL" clId="{2E25C175-47A3-4BC7-8EFD-372D97A42A64}" dt="2023-03-07T10:33:02.161" v="6657" actId="207"/>
-        <pc:sldMkLst>
-          <pc:docMk/>
-          <pc:sldMk cId="3417944735" sldId="432"/>
-        </pc:sldMkLst>
-      </pc:sldChg>
-      <pc:sldChg chg="modSp add mod">
-        <pc:chgData name="Matthieu De Mari" userId="dfb708c9-d8dc-439f-9a3b-c772bf4a311c" providerId="ADAL" clId="{2E25C175-47A3-4BC7-8EFD-372D97A42A64}" dt="2023-03-07T10:35:45.030" v="6878" actId="207"/>
-        <pc:sldMkLst>
-          <pc:docMk/>
-          <pc:sldMk cId="2653152999" sldId="433"/>
-        </pc:sldMkLst>
-      </pc:sldChg>
-      <pc:sldChg chg="modSp add mod">
-        <pc:chgData name="Matthieu De Mari" userId="dfb708c9-d8dc-439f-9a3b-c772bf4a311c" providerId="ADAL" clId="{2E25C175-47A3-4BC7-8EFD-372D97A42A64}" dt="2023-03-07T10:36:00.421" v="6882" actId="207"/>
-        <pc:sldMkLst>
-          <pc:docMk/>
-          <pc:sldMk cId="2305199698" sldId="434"/>
-        </pc:sldMkLst>
-      </pc:sldChg>
-      <pc:sldChg chg="modSp add mod">
-        <pc:chgData name="Matthieu De Mari" userId="dfb708c9-d8dc-439f-9a3b-c772bf4a311c" providerId="ADAL" clId="{2E25C175-47A3-4BC7-8EFD-372D97A42A64}" dt="2023-03-07T10:39:44.701" v="7119" actId="20577"/>
-        <pc:sldMkLst>
-          <pc:docMk/>
-          <pc:sldMk cId="2095478576" sldId="435"/>
-        </pc:sldMkLst>
-      </pc:sldChg>
-      <pc:sldChg chg="modSp new mod">
-        <pc:chgData name="Matthieu De Mari" userId="dfb708c9-d8dc-439f-9a3b-c772bf4a311c" providerId="ADAL" clId="{2E25C175-47A3-4BC7-8EFD-372D97A42A64}" dt="2023-03-07T10:40:55.253" v="7150" actId="27636"/>
-        <pc:sldMkLst>
-          <pc:docMk/>
-          <pc:sldMk cId="2087017446" sldId="436"/>
-        </pc:sldMkLst>
-      </pc:sldChg>
-      <pc:sldChg chg="modSp add mod">
-        <pc:chgData name="Matthieu De Mari" userId="dfb708c9-d8dc-439f-9a3b-c772bf4a311c" providerId="ADAL" clId="{2E25C175-47A3-4BC7-8EFD-372D97A42A64}" dt="2023-03-07T10:46:33.418" v="7352" actId="20577"/>
-        <pc:sldMkLst>
-          <pc:docMk/>
-          <pc:sldMk cId="2927953506" sldId="437"/>
-        </pc:sldMkLst>
+        <pc:spChg chg="mod">
+          <ac:chgData name="Matthieu De Mari" userId="dfb708c9-d8dc-439f-9a3b-c772bf4a311c" providerId="ADAL" clId="{81E9B007-0C2C-493E-9B93-55A62C9C1F12}" dt="2026-01-14T08:40:31.644" v="7" actId="20577"/>
+          <ac:spMkLst>
+            <pc:docMk/>
+            <pc:sldMk cId="756526478" sldId="497"/>
+            <ac:spMk id="5" creationId="{E6A200B5-9C77-EEF0-29BA-30B546FFB1E9}"/>
+          </ac:spMkLst>
+        </pc:spChg>
       </pc:sldChg>
     </pc:docChg>
   </pc:docChgLst>
@@ -4415,7 +656,7 @@
           <a:p>
             <a:fld id="{98CFC6A4-B085-437B-8084-693BEB2A32DE}" type="datetimeFigureOut">
               <a:rPr lang="en-SG" smtClean="0"/>
-              <a:t>24/2/2025</a:t>
+              <a:t>14/1/2026</a:t>
             </a:fld>
             <a:endParaRPr lang="en-SG"/>
           </a:p>
@@ -5240,7 +1481,7 @@
           <a:p>
             <a:fld id="{AB35F6B0-D468-4997-9CE3-CF2A1AE5E3F9}" type="datetimeFigureOut">
               <a:rPr lang="en-SG" smtClean="0"/>
-              <a:t>24/2/2025</a:t>
+              <a:t>14/1/2026</a:t>
             </a:fld>
             <a:endParaRPr lang="en-SG"/>
           </a:p>
@@ -5440,7 +1681,7 @@
           <a:p>
             <a:fld id="{AB35F6B0-D468-4997-9CE3-CF2A1AE5E3F9}" type="datetimeFigureOut">
               <a:rPr lang="en-SG" smtClean="0"/>
-              <a:t>24/2/2025</a:t>
+              <a:t>14/1/2026</a:t>
             </a:fld>
             <a:endParaRPr lang="en-SG"/>
           </a:p>
@@ -5650,7 +1891,7 @@
           <a:p>
             <a:fld id="{AB35F6B0-D468-4997-9CE3-CF2A1AE5E3F9}" type="datetimeFigureOut">
               <a:rPr lang="en-SG" smtClean="0"/>
-              <a:t>24/2/2025</a:t>
+              <a:t>14/1/2026</a:t>
             </a:fld>
             <a:endParaRPr lang="en-SG"/>
           </a:p>
@@ -5850,7 +2091,7 @@
           <a:p>
             <a:fld id="{AB35F6B0-D468-4997-9CE3-CF2A1AE5E3F9}" type="datetimeFigureOut">
               <a:rPr lang="en-SG" smtClean="0"/>
-              <a:t>24/2/2025</a:t>
+              <a:t>14/1/2026</a:t>
             </a:fld>
             <a:endParaRPr lang="en-SG"/>
           </a:p>
@@ -6126,7 +2367,7 @@
           <a:p>
             <a:fld id="{AB35F6B0-D468-4997-9CE3-CF2A1AE5E3F9}" type="datetimeFigureOut">
               <a:rPr lang="en-SG" smtClean="0"/>
-              <a:t>24/2/2025</a:t>
+              <a:t>14/1/2026</a:t>
             </a:fld>
             <a:endParaRPr lang="en-SG"/>
           </a:p>
@@ -6394,7 +2635,7 @@
           <a:p>
             <a:fld id="{AB35F6B0-D468-4997-9CE3-CF2A1AE5E3F9}" type="datetimeFigureOut">
               <a:rPr lang="en-SG" smtClean="0"/>
-              <a:t>24/2/2025</a:t>
+              <a:t>14/1/2026</a:t>
             </a:fld>
             <a:endParaRPr lang="en-SG"/>
           </a:p>
@@ -6809,7 +3050,7 @@
           <a:p>
             <a:fld id="{AB35F6B0-D468-4997-9CE3-CF2A1AE5E3F9}" type="datetimeFigureOut">
               <a:rPr lang="en-SG" smtClean="0"/>
-              <a:t>24/2/2025</a:t>
+              <a:t>14/1/2026</a:t>
             </a:fld>
             <a:endParaRPr lang="en-SG"/>
           </a:p>
@@ -6951,7 +3192,7 @@
           <a:p>
             <a:fld id="{AB35F6B0-D468-4997-9CE3-CF2A1AE5E3F9}" type="datetimeFigureOut">
               <a:rPr lang="en-SG" smtClean="0"/>
-              <a:t>24/2/2025</a:t>
+              <a:t>14/1/2026</a:t>
             </a:fld>
             <a:endParaRPr lang="en-SG"/>
           </a:p>
@@ -7064,7 +3305,7 @@
           <a:p>
             <a:fld id="{AB35F6B0-D468-4997-9CE3-CF2A1AE5E3F9}" type="datetimeFigureOut">
               <a:rPr lang="en-SG" smtClean="0"/>
-              <a:t>24/2/2025</a:t>
+              <a:t>14/1/2026</a:t>
             </a:fld>
             <a:endParaRPr lang="en-SG"/>
           </a:p>
@@ -7377,7 +3618,7 @@
           <a:p>
             <a:fld id="{AB35F6B0-D468-4997-9CE3-CF2A1AE5E3F9}" type="datetimeFigureOut">
               <a:rPr lang="en-SG" smtClean="0"/>
-              <a:t>24/2/2025</a:t>
+              <a:t>14/1/2026</a:t>
             </a:fld>
             <a:endParaRPr lang="en-SG"/>
           </a:p>
@@ -7666,7 +3907,7 @@
           <a:p>
             <a:fld id="{AB35F6B0-D468-4997-9CE3-CF2A1AE5E3F9}" type="datetimeFigureOut">
               <a:rPr lang="en-SG" smtClean="0"/>
-              <a:t>24/2/2025</a:t>
+              <a:t>14/1/2026</a:t>
             </a:fld>
             <a:endParaRPr lang="en-SG"/>
           </a:p>
@@ -7909,7 +4150,7 @@
           <a:p>
             <a:fld id="{AB35F6B0-D468-4997-9CE3-CF2A1AE5E3F9}" type="datetimeFigureOut">
               <a:rPr lang="en-SG" smtClean="0"/>
-              <a:t>24/2/2025</a:t>
+              <a:t>14/1/2026</a:t>
             </a:fld>
             <a:endParaRPr lang="en-SG"/>
           </a:p>
@@ -19432,82 +15673,6 @@
           </a:p>
         </p:txBody>
       </p:sp>
-      <p:sp>
-        <p:nvSpPr>
-          <p:cNvPr id="4" name="Content Placeholder 3">
-            <a:extLst>
-              <a:ext uri="{FF2B5EF4-FFF2-40B4-BE49-F238E27FC236}">
-                <a16:creationId xmlns:a16="http://schemas.microsoft.com/office/drawing/2014/main" id="{A0FF4252-8E53-B941-EF50-7759A6112153}"/>
-              </a:ext>
-            </a:extLst>
-          </p:cNvPr>
-          <p:cNvSpPr>
-            <a:spLocks noGrp="1"/>
-          </p:cNvSpPr>
-          <p:nvPr>
-            <p:ph sz="half" idx="1"/>
-          </p:nvPr>
-        </p:nvSpPr>
-        <p:spPr/>
-        <p:txBody>
-          <a:bodyPr>
-            <a:normAutofit/>
-          </a:bodyPr>
-          <a:lstStyle/>
-          <a:p>
-            <a:pPr marL="0" indent="0">
-              <a:buNone/>
-            </a:pPr>
-            <a:endParaRPr lang="en-GB" dirty="0"/>
-          </a:p>
-          <a:p>
-            <a:pPr marL="0" indent="0">
-              <a:buNone/>
-            </a:pPr>
-            <a:r>
-              <a:rPr lang="en-GB" dirty="0"/>
-              <a:t>As before it is possible to build the FSM for “</a:t>
-            </a:r>
-            <a:r>
-              <a:rPr lang="en-GB" dirty="0" err="1"/>
-              <a:t>a|b</a:t>
-            </a:r>
-            <a:r>
-              <a:rPr lang="en-GB" dirty="0"/>
-              <a:t>” by</a:t>
-            </a:r>
-          </a:p>
-          <a:p>
-            <a:r>
-              <a:rPr lang="en-GB" dirty="0"/>
-              <a:t>combining the two FSMs for “a” and “b”,</a:t>
-            </a:r>
-          </a:p>
-          <a:p>
-            <a:r>
-              <a:rPr lang="en-GB" dirty="0"/>
-              <a:t>in </a:t>
-            </a:r>
-            <a:r>
-              <a:rPr lang="en-GB" b="1" dirty="0"/>
-              <a:t>parallel</a:t>
-            </a:r>
-            <a:r>
-              <a:rPr lang="en-GB" dirty="0"/>
-              <a:t>, this time,</a:t>
-            </a:r>
-          </a:p>
-          <a:p>
-            <a:r>
-              <a:rPr lang="en-GB" dirty="0"/>
-              <a:t>connecting them with Epsilon transitions.</a:t>
-            </a:r>
-          </a:p>
-          <a:p>
-            <a:endParaRPr lang="en-SG" dirty="0"/>
-          </a:p>
-        </p:txBody>
-      </p:sp>
       <p:cxnSp>
         <p:nvCxnSpPr>
           <p:cNvPr id="3" name="Straight Arrow Connector 2">
@@ -20751,6 +16916,97 @@
               <a:t>Anything but a</a:t>
             </a:r>
             <a:endParaRPr lang="en-SG" b="1" dirty="0"/>
+          </a:p>
+        </p:txBody>
+      </p:sp>
+      <p:sp>
+        <p:nvSpPr>
+          <p:cNvPr id="14" name="Content Placeholder 3">
+            <a:extLst>
+              <a:ext uri="{FF2B5EF4-FFF2-40B4-BE49-F238E27FC236}">
+                <a16:creationId xmlns:a16="http://schemas.microsoft.com/office/drawing/2014/main" id="{BDDF3693-513D-940D-EFD1-AD78FE2B1690}"/>
+              </a:ext>
+            </a:extLst>
+          </p:cNvPr>
+          <p:cNvSpPr>
+            <a:spLocks noGrp="1"/>
+          </p:cNvSpPr>
+          <p:nvPr>
+            <p:ph sz="half" idx="1"/>
+          </p:nvPr>
+        </p:nvSpPr>
+        <p:spPr>
+          <a:xfrm>
+            <a:off x="838200" y="1825624"/>
+            <a:ext cx="5181600" cy="5032375"/>
+          </a:xfrm>
+        </p:spPr>
+        <p:txBody>
+          <a:bodyPr>
+            <a:normAutofit/>
+          </a:bodyPr>
+          <a:lstStyle/>
+          <a:p>
+            <a:pPr marL="0" indent="0">
+              <a:buNone/>
+            </a:pPr>
+            <a:r>
+              <a:rPr lang="en-GB" dirty="0"/>
+              <a:t>As before it is possible to build the FSM for “</a:t>
+            </a:r>
+            <a:r>
+              <a:rPr lang="en-GB" dirty="0" err="1"/>
+              <a:t>a|b</a:t>
+            </a:r>
+            <a:r>
+              <a:rPr lang="en-GB" dirty="0"/>
+              <a:t>” by</a:t>
+            </a:r>
+          </a:p>
+          <a:p>
+            <a:r>
+              <a:rPr lang="en-GB" dirty="0"/>
+              <a:t>combining the two FSMs for “a” and “b”,</a:t>
+            </a:r>
+          </a:p>
+          <a:p>
+            <a:r>
+              <a:rPr lang="en-GB" dirty="0"/>
+              <a:t>in </a:t>
+            </a:r>
+            <a:r>
+              <a:rPr lang="en-GB" b="1" dirty="0"/>
+              <a:t>parallel</a:t>
+            </a:r>
+            <a:r>
+              <a:rPr lang="en-GB" dirty="0"/>
+              <a:t>, this time,</a:t>
+            </a:r>
+          </a:p>
+          <a:p>
+            <a:r>
+              <a:rPr lang="en-GB" dirty="0"/>
+              <a:t>connecting them with Epsilon transitions.</a:t>
+            </a:r>
+          </a:p>
+          <a:p>
+            <a:pPr marL="0" indent="0">
+              <a:buNone/>
+            </a:pPr>
+            <a:r>
+              <a:rPr lang="en-GB" i="1" dirty="0"/>
+              <a:t>(Note: Each state 1, 2, 3 has</a:t>
+            </a:r>
+            <a:br>
+              <a:rPr lang="en-GB" i="1" dirty="0"/>
+            </a:br>
+            <a:r>
+              <a:rPr lang="en-GB" i="1" dirty="0"/>
+              <a:t>self-links matching any character, removed for simplicity.)</a:t>
+            </a:r>
+          </a:p>
+          <a:p>
+            <a:endParaRPr lang="en-SG" dirty="0"/>
           </a:p>
         </p:txBody>
       </p:sp>
@@ -25186,7 +21442,15 @@
             </a:r>
             <a:r>
               <a:rPr lang="en-GB" b="1" dirty="0"/>
-              <a:t>“a*” would only match an empty string or strings that are composed exclusively of the letter 'a'</a:t>
+              <a:t>“a*” would only match an empty string or strings that are composed </a:t>
+            </a:r>
+            <a:r>
+              <a:rPr lang="en-GB" b="1" u="sng" dirty="0"/>
+              <a:t>exclusively</a:t>
+            </a:r>
+            <a:r>
+              <a:rPr lang="en-GB" b="1" dirty="0"/>
+              <a:t> of the letter 'a'</a:t>
             </a:r>
             <a:r>
               <a:rPr lang="en-GB" dirty="0"/>
@@ -26464,12 +22728,13 @@
             </a:r>
             <a:r>
               <a:rPr lang="en-GB" dirty="0"/>
-              <a:t>" because these </a:t>
-            </a:r>
-            <a:r>
-              <a:rPr lang="en-GB" dirty="0" err="1"/>
-              <a:t>st</a:t>
-            </a:r>
+              <a:t>“.</a:t>
+            </a:r>
+          </a:p>
+          <a:p>
+            <a:pPr marL="0" indent="0">
+              <a:buNone/>
+            </a:pPr>
             <a:br>
               <a:rPr lang="en-GB" dirty="0"/>
             </a:br>
@@ -29092,7 +25357,7 @@
             </a:pPr>
             <a:r>
               <a:rPr lang="en-GB" dirty="0"/>
-              <a:t>^(</a:t>
+              <a:t>(</a:t>
             </a:r>
             <a:r>
               <a:rPr lang="en-GB" dirty="0" err="1"/>
@@ -29100,7 +25365,7 @@
             </a:r>
             <a:r>
               <a:rPr lang="en-GB" dirty="0"/>
-              <a:t>)?at$</a:t>
+              <a:t>)at</a:t>
             </a:r>
           </a:p>
           <a:p>
@@ -29272,7 +25537,7 @@
             </a:pPr>
             <a:r>
               <a:rPr lang="en-GB" dirty="0"/>
-              <a:t>^(</a:t>
+              <a:t>(</a:t>
             </a:r>
             <a:r>
               <a:rPr lang="en-GB" dirty="0" err="1"/>
@@ -29280,7 +25545,7 @@
             </a:r>
             <a:r>
               <a:rPr lang="en-GB" dirty="0"/>
-              <a:t>)?at$</a:t>
+              <a:t>)at</a:t>
             </a:r>
           </a:p>
           <a:p>
@@ -29325,7 +25590,7 @@
             </a:pPr>
             <a:r>
               <a:rPr lang="en-GB" i="1" dirty="0"/>
-              <a:t>(Some others could work but they are terrible malpractice, so not going to accept them)</a:t>
+              <a:t>(Some others could work but they are either accepting more than “cat” and “bat”, or are overkill expressions, so not going to accept them)</a:t>
             </a:r>
           </a:p>
           <a:p>
@@ -29705,7 +25970,15 @@
             </a:r>
             <a:r>
               <a:rPr lang="en-GB" dirty="0"/>
-              <a:t>", and so on, but no other strings? The string “a” is not acceptable.</a:t>
+              <a:t>", and so on, but no other strings? The string “a” is </a:t>
+            </a:r>
+            <a:r>
+              <a:rPr lang="en-GB" u="sng" dirty="0"/>
+              <a:t>not</a:t>
+            </a:r>
+            <a:r>
+              <a:rPr lang="en-GB" dirty="0"/>
+              <a:t> acceptable.</a:t>
             </a:r>
           </a:p>
           <a:p>
@@ -29854,7 +26127,15 @@
             </a:r>
             <a:r>
               <a:rPr lang="en-GB" dirty="0"/>
-              <a:t>", and so on, but no other strings? The string “a” is not acceptable.</a:t>
+              <a:t>", and so on, but no other strings? The string “a” is </a:t>
+            </a:r>
+            <a:r>
+              <a:rPr lang="en-GB" u="sng" dirty="0"/>
+              <a:t>not</a:t>
+            </a:r>
+            <a:r>
+              <a:rPr lang="en-GB" dirty="0"/>
+              <a:t> acceptable.</a:t>
             </a:r>
           </a:p>
           <a:p>
@@ -30376,7 +26657,14 @@
             </a:r>
             <a:r>
               <a:rPr lang="en-GB" dirty="0"/>
-              <a:t>. For instance, </a:t>
+              <a:t>.</a:t>
+            </a:r>
+            <a:br>
+              <a:rPr lang="en-GB" dirty="0"/>
+            </a:br>
+            <a:r>
+              <a:rPr lang="en-GB" dirty="0"/>
+              <a:t>For instance, </a:t>
             </a:r>
           </a:p>
           <a:p>
@@ -30695,7 +26983,19 @@
             </a:pPr>
             <a:r>
               <a:rPr lang="en-GB" b="1" dirty="0"/>
-              <a:t>A quick note on the Caret symbol ^:</a:t>
+              <a:t>A quick note on the Caret symbol </a:t>
+            </a:r>
+            <a:r>
+              <a:rPr lang="en-GB" b="1" dirty="0">
+                <a:solidFill>
+                  <a:srgbClr val="00B050"/>
+                </a:solidFill>
+              </a:rPr>
+              <a:t>^</a:t>
+            </a:r>
+            <a:r>
+              <a:rPr lang="en-GB" b="1" dirty="0"/>
+              <a:t>:</a:t>
             </a:r>
           </a:p>
           <a:p>
@@ -30923,7 +27223,7 @@
             </a:br>
             <a:r>
               <a:rPr lang="en-GB" dirty="0"/>
-              <a:t>It is equivalent to ([a-zA-Z0-9_].</a:t>
+              <a:t>It is equivalent to [a-zA-Z0-9_].</a:t>
             </a:r>
             <a:endParaRPr lang="en-SG" dirty="0"/>
           </a:p>
@@ -31821,7 +28121,7 @@
             </a:pPr>
             <a:r>
               <a:rPr lang="en-GB" dirty="0"/>
-              <a:t>Any string that contains the substring “cat“</a:t>
+              <a:t>Any string that contains the substring “cat”</a:t>
             </a:r>
           </a:p>
           <a:p>
@@ -31966,7 +28266,7 @@
             </a:pPr>
             <a:r>
               <a:rPr lang="en-GB" dirty="0"/>
-              <a:t>Any string that contains the substring “cat“</a:t>
+              <a:t>Any string that contains the substring “cat”</a:t>
             </a:r>
           </a:p>
           <a:p>
@@ -33347,7 +29647,21 @@
             </a:r>
             <a:r>
               <a:rPr lang="en-GB" dirty="0"/>
-              <a:t>".</a:t>
+              <a:t>". This is equivalent to </a:t>
+            </a:r>
+            <a:r>
+              <a:rPr lang="en-GB" dirty="0" err="1"/>
+              <a:t>aaa?a</a:t>
+            </a:r>
+            <a:r>
+              <a:rPr lang="en-GB" dirty="0"/>
+              <a:t>?</a:t>
+            </a:r>
+          </a:p>
+          <a:p>
+            <a:r>
+              <a:rPr lang="en-GB" dirty="0"/>
+              <a:t>\d{2,} matches any string that contains at least two digits, such as "123", "45", or "6789". This is equivalent to aa+</a:t>
             </a:r>
           </a:p>
           <a:p>
@@ -33355,10 +29669,7 @@
               <a:buFont typeface="Arial" panose="020B0604020202020204" pitchFamily="34" charset="0"/>
               <a:buChar char="•"/>
             </a:pPr>
-            <a:r>
-              <a:rPr lang="en-GB" dirty="0"/>
-              <a:t>\d{2,} matches any string that contains at least two digits, such as "123", "45", or "6789".</a:t>
-            </a:r>
+            <a:endParaRPr lang="en-GB" dirty="0"/>
           </a:p>
           <a:p>
             <a:endParaRPr lang="en-SG" dirty="0"/>
@@ -34139,8 +30450,8 @@
         </p:nvSpPr>
         <p:spPr>
           <a:xfrm>
-            <a:off x="838200" y="275304"/>
-            <a:ext cx="10515600" cy="6582696"/>
+            <a:off x="838199" y="275304"/>
+            <a:ext cx="10843901" cy="6582696"/>
           </a:xfrm>
         </p:spPr>
         <p:txBody>
@@ -34231,7 +30542,7 @@
                 <a:ea typeface="Calibri" panose="020F0502020204030204" pitchFamily="34" charset="0"/>
                 <a:cs typeface="Times New Roman" panose="02020603050405020304" pitchFamily="18" charset="0"/>
               </a:rPr>
-              <a:t>. Do you agree with him and can explain why this is not possible</a:t>
+              <a:t>. Do you agree with him and can you explain why this is not possible</a:t>
             </a:r>
             <a:r>
               <a:rPr lang="en-SG" sz="2400" b="1" dirty="0">
@@ -34281,16 +30592,7 @@
                 <a:ea typeface="Calibri" panose="020F0502020204030204" pitchFamily="34" charset="0"/>
                 <a:cs typeface="Times New Roman" panose="02020603050405020304" pitchFamily="18" charset="0"/>
               </a:rPr>
-              <a:t> that works for this task and prove </a:t>
-            </a:r>
-            <a:r>
-              <a:rPr lang="en-SG" sz="2400" b="1">
-                <a:effectLst/>
-                <a:latin typeface="Calibri" panose="020F0502020204030204" pitchFamily="34" charset="0"/>
-                <a:ea typeface="Calibri" panose="020F0502020204030204" pitchFamily="34" charset="0"/>
-                <a:cs typeface="Times New Roman" panose="02020603050405020304" pitchFamily="18" charset="0"/>
-              </a:rPr>
-              <a:t>Chris wrong?</a:t>
+              <a:t> that works for this task and prove Chris wrong?</a:t>
             </a:r>
             <a:endParaRPr lang="en-GB" sz="2400" b="1" dirty="0">
               <a:latin typeface="Calibri" panose="020F0502020204030204" pitchFamily="34" charset="0"/>

--- a/W5/W5S2 - RegEx/W5S2.pptx
+++ b/W5/W5S2 - RegEx/W5S2.pptx
@@ -329,7 +329,7 @@
 <file path=ppt/revisionInfo.xml><?xml version="1.0" encoding="utf-8"?>
 <p1510:revInfo xmlns:a="http://schemas.openxmlformats.org/drawingml/2006/main" xmlns:r="http://schemas.openxmlformats.org/officeDocument/2006/relationships" xmlns:p1510="http://schemas.microsoft.com/office/powerpoint/2015/10/main">
   <p1510:revLst>
-    <p1510:client id="{681CBE4F-CC71-4C63-997E-D1757BF8379E}" v="2" dt="2026-01-14T08:47:23.150"/>
+    <p1510:client id="{79218A5F-0102-4BA6-9DFB-22CE95F5F93F}" v="1" dt="2026-02-24T03:51:37.079"/>
   </p1510:revLst>
 </p1510:revInfo>
 </file>
@@ -339,18 +339,33 @@
   <pc:docChgLst>
     <pc:chgData name="Matthieu De Mari" userId="dfb708c9-d8dc-439f-9a3b-c772bf4a311c" providerId="ADAL" clId="{81E9B007-0C2C-493E-9B93-55A62C9C1F12}"/>
     <pc:docChg chg="custSel modSld">
-      <pc:chgData name="Matthieu De Mari" userId="dfb708c9-d8dc-439f-9a3b-c772bf4a311c" providerId="ADAL" clId="{81E9B007-0C2C-493E-9B93-55A62C9C1F12}" dt="2026-01-14T08:48:42.334" v="155" actId="14100"/>
+      <pc:chgData name="Matthieu De Mari" userId="dfb708c9-d8dc-439f-9a3b-c772bf4a311c" providerId="ADAL" clId="{81E9B007-0C2C-493E-9B93-55A62C9C1F12}" dt="2026-02-24T03:51:37.079" v="209"/>
       <pc:docMkLst>
         <pc:docMk/>
       </pc:docMkLst>
       <pc:sldChg chg="modSp mod">
-        <pc:chgData name="Matthieu De Mari" userId="dfb708c9-d8dc-439f-9a3b-c772bf4a311c" providerId="ADAL" clId="{81E9B007-0C2C-493E-9B93-55A62C9C1F12}" dt="2026-01-14T08:42:00.123" v="10" actId="20577"/>
+        <pc:chgData name="Matthieu De Mari" userId="dfb708c9-d8dc-439f-9a3b-c772bf4a311c" providerId="ADAL" clId="{81E9B007-0C2C-493E-9B93-55A62C9C1F12}" dt="2026-02-24T02:54:07.992" v="156" actId="400"/>
+        <pc:sldMkLst>
+          <pc:docMk/>
+          <pc:sldMk cId="1794465962" sldId="424"/>
+        </pc:sldMkLst>
+        <pc:spChg chg="mod">
+          <ac:chgData name="Matthieu De Mari" userId="dfb708c9-d8dc-439f-9a3b-c772bf4a311c" providerId="ADAL" clId="{81E9B007-0C2C-493E-9B93-55A62C9C1F12}" dt="2026-02-24T02:54:07.992" v="156" actId="400"/>
+          <ac:spMkLst>
+            <pc:docMk/>
+            <pc:sldMk cId="1794465962" sldId="424"/>
+            <ac:spMk id="3" creationId="{C51ADC3A-36BE-B86B-FA40-9DF3C5E68D0A}"/>
+          </ac:spMkLst>
+        </pc:spChg>
+      </pc:sldChg>
+      <pc:sldChg chg="modSp mod">
+        <pc:chgData name="Matthieu De Mari" userId="dfb708c9-d8dc-439f-9a3b-c772bf4a311c" providerId="ADAL" clId="{81E9B007-0C2C-493E-9B93-55A62C9C1F12}" dt="2026-02-24T03:51:29.683" v="208" actId="20577"/>
         <pc:sldMkLst>
           <pc:docMk/>
           <pc:sldMk cId="1448790682" sldId="441"/>
         </pc:sldMkLst>
         <pc:spChg chg="mod">
-          <ac:chgData name="Matthieu De Mari" userId="dfb708c9-d8dc-439f-9a3b-c772bf4a311c" providerId="ADAL" clId="{81E9B007-0C2C-493E-9B93-55A62C9C1F12}" dt="2026-01-14T08:42:00.123" v="10" actId="20577"/>
+          <ac:chgData name="Matthieu De Mari" userId="dfb708c9-d8dc-439f-9a3b-c772bf4a311c" providerId="ADAL" clId="{81E9B007-0C2C-493E-9B93-55A62C9C1F12}" dt="2026-02-24T03:51:29.683" v="208" actId="20577"/>
           <ac:spMkLst>
             <pc:docMk/>
             <pc:sldMk cId="1448790682" sldId="441"/>
@@ -358,14 +373,14 @@
           </ac:spMkLst>
         </pc:spChg>
       </pc:sldChg>
-      <pc:sldChg chg="modSp mod">
-        <pc:chgData name="Matthieu De Mari" userId="dfb708c9-d8dc-439f-9a3b-c772bf4a311c" providerId="ADAL" clId="{81E9B007-0C2C-493E-9B93-55A62C9C1F12}" dt="2026-01-14T08:42:51.360" v="102" actId="20577"/>
+      <pc:sldChg chg="modSp">
+        <pc:chgData name="Matthieu De Mari" userId="dfb708c9-d8dc-439f-9a3b-c772bf4a311c" providerId="ADAL" clId="{81E9B007-0C2C-493E-9B93-55A62C9C1F12}" dt="2026-02-24T03:51:37.079" v="209"/>
         <pc:sldMkLst>
           <pc:docMk/>
           <pc:sldMk cId="110232736" sldId="443"/>
         </pc:sldMkLst>
         <pc:spChg chg="mod">
-          <ac:chgData name="Matthieu De Mari" userId="dfb708c9-d8dc-439f-9a3b-c772bf4a311c" providerId="ADAL" clId="{81E9B007-0C2C-493E-9B93-55A62C9C1F12}" dt="2026-01-14T08:42:51.360" v="102" actId="20577"/>
+          <ac:chgData name="Matthieu De Mari" userId="dfb708c9-d8dc-439f-9a3b-c772bf4a311c" providerId="ADAL" clId="{81E9B007-0C2C-493E-9B93-55A62C9C1F12}" dt="2026-02-24T03:51:37.079" v="209"/>
           <ac:spMkLst>
             <pc:docMk/>
             <pc:sldMk cId="110232736" sldId="443"/>
@@ -374,198 +389,47 @@
         </pc:spChg>
       </pc:sldChg>
       <pc:sldChg chg="modSp mod">
-        <pc:chgData name="Matthieu De Mari" userId="dfb708c9-d8dc-439f-9a3b-c772bf4a311c" providerId="ADAL" clId="{81E9B007-0C2C-493E-9B93-55A62C9C1F12}" dt="2026-01-14T08:43:09.779" v="104" actId="115"/>
+        <pc:chgData name="Matthieu De Mari" userId="dfb708c9-d8dc-439f-9a3b-c772bf4a311c" providerId="ADAL" clId="{81E9B007-0C2C-493E-9B93-55A62C9C1F12}" dt="2026-02-24T03:45:58.383" v="180" actId="20577"/>
         <pc:sldMkLst>
           <pc:docMk/>
-          <pc:sldMk cId="4016554108" sldId="448"/>
+          <pc:sldMk cId="3521859159" sldId="457"/>
         </pc:sldMkLst>
         <pc:spChg chg="mod">
-          <ac:chgData name="Matthieu De Mari" userId="dfb708c9-d8dc-439f-9a3b-c772bf4a311c" providerId="ADAL" clId="{81E9B007-0C2C-493E-9B93-55A62C9C1F12}" dt="2026-01-14T08:43:09.779" v="104" actId="115"/>
+          <ac:chgData name="Matthieu De Mari" userId="dfb708c9-d8dc-439f-9a3b-c772bf4a311c" providerId="ADAL" clId="{81E9B007-0C2C-493E-9B93-55A62C9C1F12}" dt="2026-02-24T03:45:58.383" v="180" actId="20577"/>
           <ac:spMkLst>
             <pc:docMk/>
-            <pc:sldMk cId="4016554108" sldId="448"/>
-            <ac:spMk id="3" creationId="{98C8E745-17FA-0972-8665-9C637236AA5B}"/>
+            <pc:sldMk cId="3521859159" sldId="457"/>
+            <ac:spMk id="5" creationId="{4F0C9377-31A4-50F3-144A-62B9B92A0435}"/>
           </ac:spMkLst>
         </pc:spChg>
       </pc:sldChg>
       <pc:sldChg chg="modSp mod">
-        <pc:chgData name="Matthieu De Mari" userId="dfb708c9-d8dc-439f-9a3b-c772bf4a311c" providerId="ADAL" clId="{81E9B007-0C2C-493E-9B93-55A62C9C1F12}" dt="2026-01-14T08:43:06.584" v="103" actId="115"/>
+        <pc:chgData name="Matthieu De Mari" userId="dfb708c9-d8dc-439f-9a3b-c772bf4a311c" providerId="ADAL" clId="{81E9B007-0C2C-493E-9B93-55A62C9C1F12}" dt="2026-02-24T03:46:16.826" v="205" actId="20577"/>
         <pc:sldMkLst>
           <pc:docMk/>
-          <pc:sldMk cId="512281156" sldId="449"/>
+          <pc:sldMk cId="1844132787" sldId="458"/>
         </pc:sldMkLst>
         <pc:spChg chg="mod">
-          <ac:chgData name="Matthieu De Mari" userId="dfb708c9-d8dc-439f-9a3b-c772bf4a311c" providerId="ADAL" clId="{81E9B007-0C2C-493E-9B93-55A62C9C1F12}" dt="2026-01-14T08:43:06.584" v="103" actId="115"/>
+          <ac:chgData name="Matthieu De Mari" userId="dfb708c9-d8dc-439f-9a3b-c772bf4a311c" providerId="ADAL" clId="{81E9B007-0C2C-493E-9B93-55A62C9C1F12}" dt="2026-02-24T03:46:16.826" v="205" actId="20577"/>
           <ac:spMkLst>
             <pc:docMk/>
-            <pc:sldMk cId="512281156" sldId="449"/>
-            <ac:spMk id="3" creationId="{98C8E745-17FA-0972-8665-9C637236AA5B}"/>
-          </ac:spMkLst>
-        </pc:spChg>
-      </pc:sldChg>
-      <pc:sldChg chg="addSp delSp modSp mod">
-        <pc:chgData name="Matthieu De Mari" userId="dfb708c9-d8dc-439f-9a3b-c772bf4a311c" providerId="ADAL" clId="{81E9B007-0C2C-493E-9B93-55A62C9C1F12}" dt="2026-01-14T08:37:57.734" v="2"/>
-        <pc:sldMkLst>
-          <pc:docMk/>
-          <pc:sldMk cId="3824911825" sldId="453"/>
-        </pc:sldMkLst>
-        <pc:spChg chg="del">
-          <ac:chgData name="Matthieu De Mari" userId="dfb708c9-d8dc-439f-9a3b-c772bf4a311c" providerId="ADAL" clId="{81E9B007-0C2C-493E-9B93-55A62C9C1F12}" dt="2026-01-14T08:37:55.300" v="0" actId="478"/>
-          <ac:spMkLst>
-            <pc:docMk/>
-            <pc:sldMk cId="3824911825" sldId="453"/>
-            <ac:spMk id="4" creationId="{A0FF4252-8E53-B941-EF50-7759A6112153}"/>
-          </ac:spMkLst>
-        </pc:spChg>
-        <pc:spChg chg="add del mod">
-          <ac:chgData name="Matthieu De Mari" userId="dfb708c9-d8dc-439f-9a3b-c772bf4a311c" providerId="ADAL" clId="{81E9B007-0C2C-493E-9B93-55A62C9C1F12}" dt="2026-01-14T08:37:57.138" v="1" actId="478"/>
-          <ac:spMkLst>
-            <pc:docMk/>
-            <pc:sldMk cId="3824911825" sldId="453"/>
-            <ac:spMk id="8" creationId="{3D530F01-50FF-BF4C-1977-D8BC1A2F697D}"/>
-          </ac:spMkLst>
-        </pc:spChg>
-        <pc:spChg chg="add mod">
-          <ac:chgData name="Matthieu De Mari" userId="dfb708c9-d8dc-439f-9a3b-c772bf4a311c" providerId="ADAL" clId="{81E9B007-0C2C-493E-9B93-55A62C9C1F12}" dt="2026-01-14T08:37:57.734" v="2"/>
-          <ac:spMkLst>
-            <pc:docMk/>
-            <pc:sldMk cId="3824911825" sldId="453"/>
-            <ac:spMk id="14" creationId="{BDDF3693-513D-940D-EFD1-AD78FE2B1690}"/>
+            <pc:sldMk cId="1844132787" sldId="458"/>
+            <ac:spMk id="5" creationId="{4F0C9377-31A4-50F3-144A-62B9B92A0435}"/>
           </ac:spMkLst>
         </pc:spChg>
       </pc:sldChg>
       <pc:sldChg chg="modSp mod">
-        <pc:chgData name="Matthieu De Mari" userId="dfb708c9-d8dc-439f-9a3b-c772bf4a311c" providerId="ADAL" clId="{81E9B007-0C2C-493E-9B93-55A62C9C1F12}" dt="2026-01-14T08:43:40.542" v="106" actId="20577"/>
-        <pc:sldMkLst>
-          <pc:docMk/>
-          <pc:sldMk cId="146061813" sldId="459"/>
-        </pc:sldMkLst>
-        <pc:spChg chg="mod">
-          <ac:chgData name="Matthieu De Mari" userId="dfb708c9-d8dc-439f-9a3b-c772bf4a311c" providerId="ADAL" clId="{81E9B007-0C2C-493E-9B93-55A62C9C1F12}" dt="2026-01-14T08:43:40.542" v="106" actId="20577"/>
-          <ac:spMkLst>
-            <pc:docMk/>
-            <pc:sldMk cId="146061813" sldId="459"/>
-            <ac:spMk id="5" creationId="{B3F89993-8E2D-39C7-D73F-D6F5D0507F8F}"/>
-          </ac:spMkLst>
-        </pc:spChg>
-      </pc:sldChg>
-      <pc:sldChg chg="modSp mod">
-        <pc:chgData name="Matthieu De Mari" userId="dfb708c9-d8dc-439f-9a3b-c772bf4a311c" providerId="ADAL" clId="{81E9B007-0C2C-493E-9B93-55A62C9C1F12}" dt="2026-01-14T08:43:58.855" v="107" actId="207"/>
-        <pc:sldMkLst>
-          <pc:docMk/>
-          <pc:sldMk cId="2491784038" sldId="460"/>
-        </pc:sldMkLst>
-        <pc:spChg chg="mod">
-          <ac:chgData name="Matthieu De Mari" userId="dfb708c9-d8dc-439f-9a3b-c772bf4a311c" providerId="ADAL" clId="{81E9B007-0C2C-493E-9B93-55A62C9C1F12}" dt="2026-01-14T08:43:58.855" v="107" actId="207"/>
-          <ac:spMkLst>
-            <pc:docMk/>
-            <pc:sldMk cId="2491784038" sldId="460"/>
-            <ac:spMk id="6" creationId="{9B6A00C8-E3FA-09B1-418B-292BC486CB87}"/>
-          </ac:spMkLst>
-        </pc:spChg>
-      </pc:sldChg>
-      <pc:sldChg chg="modSp mod">
-        <pc:chgData name="Matthieu De Mari" userId="dfb708c9-d8dc-439f-9a3b-c772bf4a311c" providerId="ADAL" clId="{81E9B007-0C2C-493E-9B93-55A62C9C1F12}" dt="2026-01-14T08:44:29.252" v="108" actId="20577"/>
-        <pc:sldMkLst>
-          <pc:docMk/>
-          <pc:sldMk cId="2636270797" sldId="461"/>
-        </pc:sldMkLst>
-        <pc:spChg chg="mod">
-          <ac:chgData name="Matthieu De Mari" userId="dfb708c9-d8dc-439f-9a3b-c772bf4a311c" providerId="ADAL" clId="{81E9B007-0C2C-493E-9B93-55A62C9C1F12}" dt="2026-01-14T08:44:29.252" v="108" actId="20577"/>
-          <ac:spMkLst>
-            <pc:docMk/>
-            <pc:sldMk cId="2636270797" sldId="461"/>
-            <ac:spMk id="3" creationId="{8821F76F-B59B-FBFA-F2D2-1D9ABA97022B}"/>
-          </ac:spMkLst>
-        </pc:spChg>
-      </pc:sldChg>
-      <pc:sldChg chg="modSp mod">
-        <pc:chgData name="Matthieu De Mari" userId="dfb708c9-d8dc-439f-9a3b-c772bf4a311c" providerId="ADAL" clId="{81E9B007-0C2C-493E-9B93-55A62C9C1F12}" dt="2026-01-14T08:47:29.164" v="150" actId="20577"/>
-        <pc:sldMkLst>
-          <pc:docMk/>
-          <pc:sldMk cId="2960715248" sldId="464"/>
-        </pc:sldMkLst>
-        <pc:spChg chg="mod">
-          <ac:chgData name="Matthieu De Mari" userId="dfb708c9-d8dc-439f-9a3b-c772bf4a311c" providerId="ADAL" clId="{81E9B007-0C2C-493E-9B93-55A62C9C1F12}" dt="2026-01-14T08:47:29.164" v="150" actId="20577"/>
-          <ac:spMkLst>
-            <pc:docMk/>
-            <pc:sldMk cId="2960715248" sldId="464"/>
-            <ac:spMk id="4" creationId="{7A2AC50E-1465-5908-D118-3F008F99595A}"/>
-          </ac:spMkLst>
-        </pc:spChg>
-      </pc:sldChg>
-      <pc:sldChg chg="modSp mod">
-        <pc:chgData name="Matthieu De Mari" userId="dfb708c9-d8dc-439f-9a3b-c772bf4a311c" providerId="ADAL" clId="{81E9B007-0C2C-493E-9B93-55A62C9C1F12}" dt="2026-01-14T08:45:47.602" v="114" actId="313"/>
-        <pc:sldMkLst>
-          <pc:docMk/>
-          <pc:sldMk cId="1643155833" sldId="469"/>
-        </pc:sldMkLst>
-        <pc:spChg chg="mod">
-          <ac:chgData name="Matthieu De Mari" userId="dfb708c9-d8dc-439f-9a3b-c772bf4a311c" providerId="ADAL" clId="{81E9B007-0C2C-493E-9B93-55A62C9C1F12}" dt="2026-01-14T08:45:47.602" v="114" actId="313"/>
-          <ac:spMkLst>
-            <pc:docMk/>
-            <pc:sldMk cId="1643155833" sldId="469"/>
-            <ac:spMk id="3" creationId="{C88E7E02-41CA-5502-EC81-CC1584EA1981}"/>
-          </ac:spMkLst>
-        </pc:spChg>
-      </pc:sldChg>
-      <pc:sldChg chg="modSp mod">
-        <pc:chgData name="Matthieu De Mari" userId="dfb708c9-d8dc-439f-9a3b-c772bf4a311c" providerId="ADAL" clId="{81E9B007-0C2C-493E-9B93-55A62C9C1F12}" dt="2026-01-14T08:45:41.017" v="111" actId="313"/>
-        <pc:sldMkLst>
-          <pc:docMk/>
-          <pc:sldMk cId="3784750566" sldId="478"/>
-        </pc:sldMkLst>
-        <pc:spChg chg="mod">
-          <ac:chgData name="Matthieu De Mari" userId="dfb708c9-d8dc-439f-9a3b-c772bf4a311c" providerId="ADAL" clId="{81E9B007-0C2C-493E-9B93-55A62C9C1F12}" dt="2026-01-14T08:45:41.017" v="111" actId="313"/>
-          <ac:spMkLst>
-            <pc:docMk/>
-            <pc:sldMk cId="3784750566" sldId="478"/>
-            <ac:spMk id="3" creationId="{C88E7E02-41CA-5502-EC81-CC1584EA1981}"/>
-          </ac:spMkLst>
-        </pc:spChg>
-      </pc:sldChg>
-      <pc:sldChg chg="modSp mod">
-        <pc:chgData name="Matthieu De Mari" userId="dfb708c9-d8dc-439f-9a3b-c772bf4a311c" providerId="ADAL" clId="{81E9B007-0C2C-493E-9B93-55A62C9C1F12}" dt="2026-01-14T08:48:42.334" v="155" actId="14100"/>
-        <pc:sldMkLst>
-          <pc:docMk/>
-          <pc:sldMk cId="3878320393" sldId="482"/>
-        </pc:sldMkLst>
-        <pc:spChg chg="mod">
-          <ac:chgData name="Matthieu De Mari" userId="dfb708c9-d8dc-439f-9a3b-c772bf4a311c" providerId="ADAL" clId="{81E9B007-0C2C-493E-9B93-55A62C9C1F12}" dt="2026-01-14T08:48:42.334" v="155" actId="14100"/>
-          <ac:spMkLst>
-            <pc:docMk/>
-            <pc:sldMk cId="3878320393" sldId="482"/>
-            <ac:spMk id="3" creationId="{220F8BCD-1F74-0CCD-9D50-EB70D633319C}"/>
-          </ac:spMkLst>
-        </pc:spChg>
-      </pc:sldChg>
-      <pc:sldChg chg="modSp mod">
-        <pc:chgData name="Matthieu De Mari" userId="dfb708c9-d8dc-439f-9a3b-c772bf4a311c" providerId="ADAL" clId="{81E9B007-0C2C-493E-9B93-55A62C9C1F12}" dt="2026-01-14T08:39:23.410" v="3" actId="115"/>
+        <pc:chgData name="Matthieu De Mari" userId="dfb708c9-d8dc-439f-9a3b-c772bf4a311c" providerId="ADAL" clId="{81E9B007-0C2C-493E-9B93-55A62C9C1F12}" dt="2026-02-24T02:55:42.301" v="159" actId="113"/>
         <pc:sldMkLst>
           <pc:docMk/>
           <pc:sldMk cId="1267674129" sldId="490"/>
         </pc:sldMkLst>
         <pc:spChg chg="mod">
-          <ac:chgData name="Matthieu De Mari" userId="dfb708c9-d8dc-439f-9a3b-c772bf4a311c" providerId="ADAL" clId="{81E9B007-0C2C-493E-9B93-55A62C9C1F12}" dt="2026-01-14T08:39:23.410" v="3" actId="115"/>
+          <ac:chgData name="Matthieu De Mari" userId="dfb708c9-d8dc-439f-9a3b-c772bf4a311c" providerId="ADAL" clId="{81E9B007-0C2C-493E-9B93-55A62C9C1F12}" dt="2026-02-24T02:55:42.301" v="159" actId="113"/>
           <ac:spMkLst>
             <pc:docMk/>
             <pc:sldMk cId="1267674129" sldId="490"/>
             <ac:spMk id="5" creationId="{B0003562-B0F9-FC63-4F67-49F09BA7CBB2}"/>
-          </ac:spMkLst>
-        </pc:spChg>
-      </pc:sldChg>
-      <pc:sldChg chg="modSp mod">
-        <pc:chgData name="Matthieu De Mari" userId="dfb708c9-d8dc-439f-9a3b-c772bf4a311c" providerId="ADAL" clId="{81E9B007-0C2C-493E-9B93-55A62C9C1F12}" dt="2026-01-14T08:40:31.644" v="7" actId="20577"/>
-        <pc:sldMkLst>
-          <pc:docMk/>
-          <pc:sldMk cId="756526478" sldId="497"/>
-        </pc:sldMkLst>
-        <pc:spChg chg="mod">
-          <ac:chgData name="Matthieu De Mari" userId="dfb708c9-d8dc-439f-9a3b-c772bf4a311c" providerId="ADAL" clId="{81E9B007-0C2C-493E-9B93-55A62C9C1F12}" dt="2026-01-14T08:40:31.644" v="7" actId="20577"/>
-          <ac:spMkLst>
-            <pc:docMk/>
-            <pc:sldMk cId="756526478" sldId="497"/>
-            <ac:spMk id="5" creationId="{E6A200B5-9C77-EEF0-29BA-30B546FFB1E9}"/>
           </ac:spMkLst>
         </pc:spChg>
       </pc:sldChg>
@@ -656,7 +520,7 @@
           <a:p>
             <a:fld id="{98CFC6A4-B085-437B-8084-693BEB2A32DE}" type="datetimeFigureOut">
               <a:rPr lang="en-SG" smtClean="0"/>
-              <a:t>14/1/2026</a:t>
+              <a:t>24/2/2026</a:t>
             </a:fld>
             <a:endParaRPr lang="en-SG"/>
           </a:p>
@@ -1481,7 +1345,7 @@
           <a:p>
             <a:fld id="{AB35F6B0-D468-4997-9CE3-CF2A1AE5E3F9}" type="datetimeFigureOut">
               <a:rPr lang="en-SG" smtClean="0"/>
-              <a:t>14/1/2026</a:t>
+              <a:t>24/2/2026</a:t>
             </a:fld>
             <a:endParaRPr lang="en-SG"/>
           </a:p>
@@ -1681,7 +1545,7 @@
           <a:p>
             <a:fld id="{AB35F6B0-D468-4997-9CE3-CF2A1AE5E3F9}" type="datetimeFigureOut">
               <a:rPr lang="en-SG" smtClean="0"/>
-              <a:t>14/1/2026</a:t>
+              <a:t>24/2/2026</a:t>
             </a:fld>
             <a:endParaRPr lang="en-SG"/>
           </a:p>
@@ -1891,7 +1755,7 @@
           <a:p>
             <a:fld id="{AB35F6B0-D468-4997-9CE3-CF2A1AE5E3F9}" type="datetimeFigureOut">
               <a:rPr lang="en-SG" smtClean="0"/>
-              <a:t>14/1/2026</a:t>
+              <a:t>24/2/2026</a:t>
             </a:fld>
             <a:endParaRPr lang="en-SG"/>
           </a:p>
@@ -2091,7 +1955,7 @@
           <a:p>
             <a:fld id="{AB35F6B0-D468-4997-9CE3-CF2A1AE5E3F9}" type="datetimeFigureOut">
               <a:rPr lang="en-SG" smtClean="0"/>
-              <a:t>14/1/2026</a:t>
+              <a:t>24/2/2026</a:t>
             </a:fld>
             <a:endParaRPr lang="en-SG"/>
           </a:p>
@@ -2367,7 +2231,7 @@
           <a:p>
             <a:fld id="{AB35F6B0-D468-4997-9CE3-CF2A1AE5E3F9}" type="datetimeFigureOut">
               <a:rPr lang="en-SG" smtClean="0"/>
-              <a:t>14/1/2026</a:t>
+              <a:t>24/2/2026</a:t>
             </a:fld>
             <a:endParaRPr lang="en-SG"/>
           </a:p>
@@ -2635,7 +2499,7 @@
           <a:p>
             <a:fld id="{AB35F6B0-D468-4997-9CE3-CF2A1AE5E3F9}" type="datetimeFigureOut">
               <a:rPr lang="en-SG" smtClean="0"/>
-              <a:t>14/1/2026</a:t>
+              <a:t>24/2/2026</a:t>
             </a:fld>
             <a:endParaRPr lang="en-SG"/>
           </a:p>
@@ -3050,7 +2914,7 @@
           <a:p>
             <a:fld id="{AB35F6B0-D468-4997-9CE3-CF2A1AE5E3F9}" type="datetimeFigureOut">
               <a:rPr lang="en-SG" smtClean="0"/>
-              <a:t>14/1/2026</a:t>
+              <a:t>24/2/2026</a:t>
             </a:fld>
             <a:endParaRPr lang="en-SG"/>
           </a:p>
@@ -3192,7 +3056,7 @@
           <a:p>
             <a:fld id="{AB35F6B0-D468-4997-9CE3-CF2A1AE5E3F9}" type="datetimeFigureOut">
               <a:rPr lang="en-SG" smtClean="0"/>
-              <a:t>14/1/2026</a:t>
+              <a:t>24/2/2026</a:t>
             </a:fld>
             <a:endParaRPr lang="en-SG"/>
           </a:p>
@@ -3305,7 +3169,7 @@
           <a:p>
             <a:fld id="{AB35F6B0-D468-4997-9CE3-CF2A1AE5E3F9}" type="datetimeFigureOut">
               <a:rPr lang="en-SG" smtClean="0"/>
-              <a:t>14/1/2026</a:t>
+              <a:t>24/2/2026</a:t>
             </a:fld>
             <a:endParaRPr lang="en-SG"/>
           </a:p>
@@ -3618,7 +3482,7 @@
           <a:p>
             <a:fld id="{AB35F6B0-D468-4997-9CE3-CF2A1AE5E3F9}" type="datetimeFigureOut">
               <a:rPr lang="en-SG" smtClean="0"/>
-              <a:t>14/1/2026</a:t>
+              <a:t>24/2/2026</a:t>
             </a:fld>
             <a:endParaRPr lang="en-SG"/>
           </a:p>
@@ -3907,7 +3771,7 @@
           <a:p>
             <a:fld id="{AB35F6B0-D468-4997-9CE3-CF2A1AE5E3F9}" type="datetimeFigureOut">
               <a:rPr lang="en-SG" smtClean="0"/>
-              <a:t>14/1/2026</a:t>
+              <a:t>24/2/2026</a:t>
             </a:fld>
             <a:endParaRPr lang="en-SG"/>
           </a:p>
@@ -4150,7 +4014,7 @@
           <a:p>
             <a:fld id="{AB35F6B0-D468-4997-9CE3-CF2A1AE5E3F9}" type="datetimeFigureOut">
               <a:rPr lang="en-SG" smtClean="0"/>
-              <a:t>14/1/2026</a:t>
+              <a:t>24/2/2026</a:t>
             </a:fld>
             <a:endParaRPr lang="en-SG"/>
           </a:p>
@@ -21400,17 +21264,8 @@
             </a:r>
             <a:r>
               <a:rPr lang="en-GB" dirty="0"/>
-              <a:t>instead</a:t>
-            </a:r>
-            <a:r>
-              <a:rPr lang="en-GB" b="1" dirty="0">
-                <a:solidFill>
-                  <a:srgbClr val="7030A0"/>
-                </a:solidFill>
-              </a:rPr>
-              <a:t>.</a:t>
-            </a:r>
-            <a:endParaRPr lang="en-GB" dirty="0"/>
+              <a:t>instead.</a:t>
+            </a:r>
           </a:p>
           <a:p>
             <a:pPr marL="0" indent="0">
@@ -24165,7 +24020,15 @@
             </a:r>
             <a:r>
               <a:rPr lang="en-GB" dirty="0"/>
-              <a:t>, consists of </a:t>
+              <a:t>, the </a:t>
+            </a:r>
+            <a:r>
+              <a:rPr lang="en-GB" dirty="0" err="1"/>
+              <a:t>RegEx</a:t>
+            </a:r>
+            <a:r>
+              <a:rPr lang="en-GB" dirty="0"/>
+              <a:t> “^a+$” consists of </a:t>
             </a:r>
             <a:r>
               <a:rPr lang="en-GB" b="1" dirty="0"/>
@@ -24292,8 +24155,8 @@
           </a:p>
         </p:txBody>
       </p:sp>
-      <mc:AlternateContent xmlns:mc="http://schemas.openxmlformats.org/markup-compatibility/2006" xmlns:a14="http://schemas.microsoft.com/office/drawing/2010/main">
-        <mc:Choice Requires="a14">
+      <mc:AlternateContent xmlns:mc="http://schemas.openxmlformats.org/markup-compatibility/2006">
+        <mc:Choice xmlns:a14="http://schemas.microsoft.com/office/drawing/2010/main" Requires="a14">
           <p:sp>
             <p:nvSpPr>
               <p:cNvPr id="5" name="Content Placeholder 4">
@@ -24450,7 +24313,15 @@
                 </a:r>
                 <a:r>
                   <a:rPr lang="en-GB" dirty="0"/>
-                  <a:t>, consists of </a:t>
+                  <a:t>, the </a:t>
+                </a:r>
+                <a:r>
+                  <a:rPr lang="en-GB" dirty="0" err="1"/>
+                  <a:t>RegEx</a:t>
+                </a:r>
+                <a:r>
+                  <a:rPr lang="en-GB" dirty="0"/>
+                  <a:t> “^a?$” consists of </a:t>
                 </a:r>
                 <a:r>
                   <a:rPr lang="en-GB" b="1" dirty="0"/>
@@ -24551,7 +24422,7 @@
             </p:txBody>
           </p:sp>
         </mc:Choice>
-        <mc:Fallback xmlns="">
+        <mc:Fallback>
           <p:sp>
             <p:nvSpPr>
               <p:cNvPr id="5" name="Content Placeholder 4">
@@ -25357,7 +25228,7 @@
             </a:pPr>
             <a:r>
               <a:rPr lang="en-GB" dirty="0"/>
-              <a:t>(</a:t>
+              <a:t>^(</a:t>
             </a:r>
             <a:r>
               <a:rPr lang="en-GB" dirty="0" err="1"/>
@@ -25365,7 +25236,7 @@
             </a:r>
             <a:r>
               <a:rPr lang="en-GB" dirty="0"/>
-              <a:t>)at</a:t>
+              <a:t>)?at$</a:t>
             </a:r>
           </a:p>
           <a:p>
@@ -25537,7 +25408,7 @@
             </a:pPr>
             <a:r>
               <a:rPr lang="en-GB" dirty="0"/>
-              <a:t>(</a:t>
+              <a:t>^(</a:t>
             </a:r>
             <a:r>
               <a:rPr lang="en-GB" dirty="0" err="1"/>
@@ -25545,7 +25416,7 @@
             </a:r>
             <a:r>
               <a:rPr lang="en-GB" dirty="0"/>
-              <a:t>)at</a:t>
+              <a:t>)?at$</a:t>
             </a:r>
           </a:p>
           <a:p>
@@ -26884,15 +26755,15 @@
               <a:buNone/>
             </a:pPr>
             <a:r>
-              <a:rPr lang="en-SG" dirty="0"/>
+              <a:rPr lang="en-SG" strike="sngStrike" dirty="0"/>
               <a:t>Q2 (cannot be solved for now, get back to it later): Could that be described using a </a:t>
             </a:r>
             <a:r>
-              <a:rPr lang="en-SG" dirty="0" err="1"/>
+              <a:rPr lang="en-SG" strike="sngStrike" dirty="0" err="1"/>
               <a:t>RegEx</a:t>
             </a:r>
             <a:r>
-              <a:rPr lang="en-SG" dirty="0"/>
+              <a:rPr lang="en-SG" strike="sngStrike" dirty="0"/>
               <a:t> of some sort?</a:t>
             </a:r>
           </a:p>
